--- a/재정학/01_Lectures/재정학_Chapter_9.pptx
+++ b/재정학/01_Lectures/재정학_Chapter_9.pptx
@@ -5,7 +5,7 @@
     <p:sldMasterId id="2147483648" r:id="rId1"/>
   </p:sldMasterIdLst>
   <p:notesMasterIdLst>
-    <p:notesMasterId r:id="rId29"/>
+    <p:notesMasterId r:id="rId33"/>
   </p:notesMasterIdLst>
   <p:sldIdLst>
     <p:sldId id="375" r:id="rId2"/>
@@ -28,13 +28,17 @@
     <p:sldId id="741" r:id="rId19"/>
     <p:sldId id="742" r:id="rId20"/>
     <p:sldId id="743" r:id="rId21"/>
-    <p:sldId id="727" r:id="rId22"/>
-    <p:sldId id="728" r:id="rId23"/>
-    <p:sldId id="722" r:id="rId24"/>
-    <p:sldId id="723" r:id="rId25"/>
-    <p:sldId id="724" r:id="rId26"/>
-    <p:sldId id="725" r:id="rId27"/>
-    <p:sldId id="364" r:id="rId28"/>
+    <p:sldId id="744" r:id="rId22"/>
+    <p:sldId id="745" r:id="rId23"/>
+    <p:sldId id="727" r:id="rId24"/>
+    <p:sldId id="746" r:id="rId25"/>
+    <p:sldId id="747" r:id="rId26"/>
+    <p:sldId id="748" r:id="rId27"/>
+    <p:sldId id="749" r:id="rId28"/>
+    <p:sldId id="750" r:id="rId29"/>
+    <p:sldId id="728" r:id="rId30"/>
+    <p:sldId id="751" r:id="rId31"/>
+    <p:sldId id="364" r:id="rId32"/>
   </p:sldIdLst>
   <p:sldSz cx="12192000" cy="6858000"/>
   <p:notesSz cx="6858000" cy="9144000"/>
@@ -245,7 +249,7 @@
           <a:p>
             <a:fld id="{4A5E00EF-AEA4-43E2-9451-8F9C59A39471}" type="datetimeFigureOut">
               <a:rPr lang="ko-KR" altLang="en-US" smtClean="0"/>
-              <a:t>2026-03-31</a:t>
+              <a:t>2026-04-01</a:t>
             </a:fld>
             <a:endParaRPr lang="ko-KR" altLang="en-US"/>
           </a:p>
@@ -667,7 +671,7 @@
           <a:p>
             <a:fld id="{CD32C56F-BD27-4999-9E6D-D4EACE3DA9F4}" type="datetime1">
               <a:rPr lang="ko-KR" altLang="en-US" smtClean="0"/>
-              <a:t>2026-03-31</a:t>
+              <a:t>2026-04-01</a:t>
             </a:fld>
             <a:endParaRPr lang="ko-KR" altLang="en-US"/>
           </a:p>
@@ -881,7 +885,7 @@
           <a:p>
             <a:fld id="{8EF4A19C-72C8-45CA-8E3F-68A7FA345D6C}" type="datetime1">
               <a:rPr lang="ko-KR" altLang="en-US" smtClean="0"/>
-              <a:t>2026-03-31</a:t>
+              <a:t>2026-04-01</a:t>
             </a:fld>
             <a:endParaRPr lang="ko-KR" altLang="en-US"/>
           </a:p>
@@ -1105,7 +1109,7 @@
           <a:p>
             <a:fld id="{56A175B2-010B-4341-954C-5F8F5C70B124}" type="datetime1">
               <a:rPr lang="ko-KR" altLang="en-US" smtClean="0"/>
-              <a:t>2026-03-31</a:t>
+              <a:t>2026-04-01</a:t>
             </a:fld>
             <a:endParaRPr lang="ko-KR" altLang="en-US"/>
           </a:p>
@@ -1319,7 +1323,7 @@
           <a:p>
             <a:fld id="{16B83F9E-22C9-45CA-9E85-070F1D3EF530}" type="datetime1">
               <a:rPr lang="ko-KR" altLang="en-US" smtClean="0"/>
-              <a:t>2026-03-31</a:t>
+              <a:t>2026-04-01</a:t>
             </a:fld>
             <a:endParaRPr lang="ko-KR" altLang="en-US"/>
           </a:p>
@@ -1610,7 +1614,7 @@
           <a:p>
             <a:fld id="{03278F45-FB3C-4C4D-B89A-7BC3F5F229F6}" type="datetime1">
               <a:rPr lang="ko-KR" altLang="en-US" smtClean="0"/>
-              <a:t>2026-03-31</a:t>
+              <a:t>2026-04-01</a:t>
             </a:fld>
             <a:endParaRPr lang="ko-KR" altLang="en-US"/>
           </a:p>
@@ -2003,7 +2007,7 @@
           <a:p>
             <a:fld id="{38FDAC3C-35A6-415C-9F03-738A6AC328B1}" type="datetime1">
               <a:rPr lang="ko-KR" altLang="en-US" smtClean="0"/>
-              <a:t>2026-03-31</a:t>
+              <a:t>2026-04-01</a:t>
             </a:fld>
             <a:endParaRPr lang="ko-KR" altLang="en-US"/>
           </a:p>
@@ -3597,7 +3601,7 @@
           <a:p>
             <a:fld id="{507A0DF1-AEE6-4B0D-89D2-351E7B3EF65C}" type="datetime1">
               <a:rPr lang="ko-KR" altLang="en-US" smtClean="0"/>
-              <a:t>2026-03-31</a:t>
+              <a:t>2026-04-01</a:t>
             </a:fld>
             <a:endParaRPr lang="ko-KR" altLang="en-US"/>
           </a:p>
@@ -4025,7 +4029,7 @@
           <a:p>
             <a:fld id="{CA93B8C9-630F-4D57-944D-04FD37CECCD3}" type="datetime1">
               <a:rPr lang="ko-KR" altLang="en-US" smtClean="0"/>
-              <a:t>2026-03-31</a:t>
+              <a:t>2026-04-01</a:t>
             </a:fld>
             <a:endParaRPr lang="ko-KR" altLang="en-US"/>
           </a:p>
@@ -4182,7 +4186,7 @@
           <a:p>
             <a:fld id="{E986165A-AC43-4902-9541-874ECD310BA3}" type="datetime1">
               <a:rPr lang="ko-KR" altLang="en-US" smtClean="0"/>
-              <a:t>2026-03-31</a:t>
+              <a:t>2026-04-01</a:t>
             </a:fld>
             <a:endParaRPr lang="ko-KR" altLang="en-US"/>
           </a:p>
@@ -4509,7 +4513,7 @@
           <a:p>
             <a:fld id="{47E6EE6D-2B0E-43A9-87A2-7354CDB998F4}" type="datetime1">
               <a:rPr lang="ko-KR" altLang="en-US" smtClean="0"/>
-              <a:t>2026-03-31</a:t>
+              <a:t>2026-04-01</a:t>
             </a:fld>
             <a:endParaRPr lang="ko-KR" altLang="en-US"/>
           </a:p>
@@ -4813,7 +4817,7 @@
           <a:p>
             <a:fld id="{5CC5944E-0BC8-4FAA-9F94-6B4B05834E10}" type="datetime1">
               <a:rPr lang="ko-KR" altLang="en-US" smtClean="0"/>
-              <a:t>2026-03-31</a:t>
+              <a:t>2026-04-01</a:t>
             </a:fld>
             <a:endParaRPr lang="ko-KR" altLang="en-US"/>
           </a:p>
@@ -9495,8 +9499,8 @@
           </a:p>
         </p:txBody>
       </p:sp>
-      <mc:AlternateContent xmlns:mc="http://schemas.openxmlformats.org/markup-compatibility/2006">
-        <mc:Choice xmlns:a14="http://schemas.microsoft.com/office/drawing/2010/main" Requires="a14">
+      <mc:AlternateContent xmlns:mc="http://schemas.openxmlformats.org/markup-compatibility/2006" xmlns:a14="http://schemas.microsoft.com/office/drawing/2010/main">
+        <mc:Choice Requires="a14">
           <p:sp>
             <p:nvSpPr>
               <p:cNvPr id="6" name="TextBox 5">
@@ -9895,7 +9899,7 @@
             </p:txBody>
           </p:sp>
         </mc:Choice>
-        <mc:Fallback>
+        <mc:Fallback xmlns="">
           <p:sp>
             <p:nvSpPr>
               <p:cNvPr id="6" name="TextBox 5">
@@ -9940,8 +9944,8 @@
           </p:sp>
         </mc:Fallback>
       </mc:AlternateContent>
-      <mc:AlternateContent xmlns:mc="http://schemas.openxmlformats.org/markup-compatibility/2006">
-        <mc:Choice xmlns:a14="http://schemas.microsoft.com/office/drawing/2010/main" Requires="a14">
+      <mc:AlternateContent xmlns:mc="http://schemas.openxmlformats.org/markup-compatibility/2006" xmlns:a14="http://schemas.microsoft.com/office/drawing/2010/main">
+        <mc:Choice Requires="a14">
           <p:sp>
             <p:nvSpPr>
               <p:cNvPr id="3" name="TextBox 2">
@@ -10015,7 +10019,7 @@
             </p:txBody>
           </p:sp>
         </mc:Choice>
-        <mc:Fallback>
+        <mc:Fallback xmlns="">
           <p:sp>
             <p:nvSpPr>
               <p:cNvPr id="3" name="TextBox 2">
@@ -10142,8 +10146,8 @@
           </a:p>
         </p:txBody>
       </p:sp>
-      <mc:AlternateContent xmlns:mc="http://schemas.openxmlformats.org/markup-compatibility/2006">
-        <mc:Choice xmlns:a14="http://schemas.microsoft.com/office/drawing/2010/main" Requires="a14">
+      <mc:AlternateContent xmlns:mc="http://schemas.openxmlformats.org/markup-compatibility/2006" xmlns:a14="http://schemas.microsoft.com/office/drawing/2010/main">
+        <mc:Choice Requires="a14">
           <p:sp>
             <p:nvSpPr>
               <p:cNvPr id="8" name="TextBox 7">
@@ -10341,7 +10345,7 @@
             </p:txBody>
           </p:sp>
         </mc:Choice>
-        <mc:Fallback>
+        <mc:Fallback xmlns="">
           <p:sp>
             <p:nvSpPr>
               <p:cNvPr id="8" name="TextBox 7">
@@ -11603,8 +11607,8 @@
           </a:p>
         </p:txBody>
       </p:sp>
-      <mc:AlternateContent xmlns:mc="http://schemas.openxmlformats.org/markup-compatibility/2006">
-        <mc:Choice xmlns:a14="http://schemas.microsoft.com/office/drawing/2010/main" Requires="a14">
+      <mc:AlternateContent xmlns:mc="http://schemas.openxmlformats.org/markup-compatibility/2006" xmlns:a14="http://schemas.microsoft.com/office/drawing/2010/main">
+        <mc:Choice Requires="a14">
           <p:sp>
             <p:nvSpPr>
               <p:cNvPr id="6" name="TextBox 5">
@@ -12012,7 +12016,7 @@
             </p:txBody>
           </p:sp>
         </mc:Choice>
-        <mc:Fallback>
+        <mc:Fallback xmlns="">
           <p:sp>
             <p:nvSpPr>
               <p:cNvPr id="6" name="TextBox 5">
@@ -12418,8 +12422,8 @@
           </a:p>
         </p:txBody>
       </p:sp>
-      <mc:AlternateContent xmlns:mc="http://schemas.openxmlformats.org/markup-compatibility/2006">
-        <mc:Choice xmlns:a14="http://schemas.microsoft.com/office/drawing/2010/main" Requires="a14">
+      <mc:AlternateContent xmlns:mc="http://schemas.openxmlformats.org/markup-compatibility/2006" xmlns:a14="http://schemas.microsoft.com/office/drawing/2010/main">
+        <mc:Choice Requires="a14">
           <p:sp>
             <p:nvSpPr>
               <p:cNvPr id="6" name="TextBox 5">
@@ -12723,7 +12727,7 @@
             </p:txBody>
           </p:sp>
         </mc:Choice>
-        <mc:Fallback>
+        <mc:Fallback xmlns="">
           <p:sp>
             <p:nvSpPr>
               <p:cNvPr id="6" name="TextBox 5">
@@ -12830,7 +12834,7 @@
             <p:spPr>
               <a:xfrm>
                 <a:off x="288790" y="3282992"/>
-                <a:ext cx="7522827" cy="1563185"/>
+                <a:ext cx="7522827" cy="2773067"/>
               </a:xfrm>
               <a:prstGeom prst="rect">
                 <a:avLst/>
@@ -12856,7 +12860,7 @@
                       <m:barPr>
                         <m:pos m:val="top"/>
                         <m:ctrlPr>
-                          <a:rPr lang="en-US" altLang="ko-KR" sz="1600" i="1" spc="-50">
+                          <a:rPr lang="en-US" altLang="ko-KR" sz="1600" i="1" spc="-50" smtClean="0">
                             <a:latin typeface="Cambria Math" panose="02040503050406030204" pitchFamily="18" charset="0"/>
                           </a:rPr>
                         </m:ctrlPr>
@@ -12918,12 +12922,232 @@
                 </a:r>
               </a:p>
               <a:p>
+                <a:pPr marL="835025" lvl="1" indent="-285750">
+                  <a:lnSpc>
+                    <a:spcPct val="150000"/>
+                  </a:lnSpc>
+                  <a:buFont typeface="Wingdings" panose="05000000000000000000" pitchFamily="2" charset="2"/>
+                  <a:buChar char="ü"/>
+                </a:pPr>
+                <a:r>
+                  <a:rPr lang="ko-KR" altLang="en-US" sz="1600" spc="-50" dirty="0"/>
+                  <a:t>근로장려세제 도입 후의 노동 공급량은 </a:t>
+                </a:r>
+                <a14:m>
+                  <m:oMath xmlns:m="http://schemas.openxmlformats.org/officeDocument/2006/math">
+                    <m:bar>
+                      <m:barPr>
+                        <m:pos m:val="top"/>
+                        <m:ctrlPr>
+                          <a:rPr lang="en-US" altLang="ko-KR" sz="1600" i="1" spc="-50">
+                            <a:latin typeface="Cambria Math" panose="02040503050406030204" pitchFamily="18" charset="0"/>
+                          </a:rPr>
+                        </m:ctrlPr>
+                      </m:barPr>
+                      <m:e>
+                        <m:sSup>
+                          <m:sSupPr>
+                            <m:ctrlPr>
+                              <a:rPr lang="en-US" altLang="ko-KR" sz="1600" i="1" spc="-50" smtClean="0">
+                                <a:latin typeface="Cambria Math" panose="02040503050406030204" pitchFamily="18" charset="0"/>
+                              </a:rPr>
+                            </m:ctrlPr>
+                          </m:sSupPr>
+                          <m:e>
+                            <m:r>
+                              <a:rPr lang="en-US" altLang="ko-KR" sz="1600" b="0" i="1" spc="-50" smtClean="0">
+                                <a:latin typeface="Cambria Math" panose="02040503050406030204" pitchFamily="18" charset="0"/>
+                              </a:rPr>
+                              <m:t>𝐿</m:t>
+                            </m:r>
+                          </m:e>
+                          <m:sup>
+                            <m:r>
+                              <a:rPr lang="en-US" altLang="ko-KR" sz="1600" b="0" i="1" spc="-50" smtClean="0">
+                                <a:latin typeface="Cambria Math" panose="02040503050406030204" pitchFamily="18" charset="0"/>
+                              </a:rPr>
+                              <m:t>∗</m:t>
+                            </m:r>
+                          </m:sup>
+                        </m:sSup>
+                        <m:r>
+                          <a:rPr lang="en-US" altLang="ko-KR" sz="1600" b="0" i="1" spc="-50" smtClean="0">
+                            <a:latin typeface="Cambria Math" panose="02040503050406030204" pitchFamily="18" charset="0"/>
+                          </a:rPr>
+                          <m:t>𝐵</m:t>
+                        </m:r>
+                      </m:e>
+                    </m:bar>
+                  </m:oMath>
+                </a14:m>
+                <a:r>
+                  <a:rPr lang="en-US" altLang="ko-KR" sz="1600" spc="-50" dirty="0"/>
+                  <a:t> </a:t>
+                </a:r>
+                <a:r>
+                  <a:rPr lang="ko-KR" altLang="en-US" sz="1600" spc="-50" dirty="0"/>
+                  <a:t>에서 </a:t>
+                </a:r>
+                <a14:m>
+                  <m:oMath xmlns:m="http://schemas.openxmlformats.org/officeDocument/2006/math">
+                    <m:bar>
+                      <m:barPr>
+                        <m:pos m:val="top"/>
+                        <m:ctrlPr>
+                          <a:rPr lang="en-US" altLang="ko-KR" sz="1600" i="1" spc="-50">
+                            <a:latin typeface="Cambria Math" panose="02040503050406030204" pitchFamily="18" charset="0"/>
+                          </a:rPr>
+                        </m:ctrlPr>
+                      </m:barPr>
+                      <m:e>
+                        <m:acc>
+                          <m:accPr>
+                            <m:chr m:val="̂"/>
+                            <m:ctrlPr>
+                              <a:rPr lang="en-US" altLang="ko-KR" sz="1600" i="1" spc="-50" smtClean="0">
+                                <a:latin typeface="Cambria Math" panose="02040503050406030204" pitchFamily="18" charset="0"/>
+                              </a:rPr>
+                            </m:ctrlPr>
+                          </m:accPr>
+                          <m:e>
+                            <m:r>
+                              <a:rPr lang="en-US" altLang="ko-KR" sz="1600" b="0" i="1" spc="-50" smtClean="0">
+                                <a:latin typeface="Cambria Math" panose="02040503050406030204" pitchFamily="18" charset="0"/>
+                              </a:rPr>
+                              <m:t>𝐿</m:t>
+                            </m:r>
+                          </m:e>
+                        </m:acc>
+                        <m:r>
+                          <a:rPr lang="en-US" altLang="ko-KR" sz="1600" i="1" spc="-50">
+                            <a:latin typeface="Cambria Math" panose="02040503050406030204" pitchFamily="18" charset="0"/>
+                          </a:rPr>
+                          <m:t>𝐵</m:t>
+                        </m:r>
+                      </m:e>
+                    </m:bar>
+                  </m:oMath>
+                </a14:m>
+                <a:r>
+                  <a:rPr lang="en-US" altLang="ko-KR" sz="1600" spc="-50" dirty="0"/>
+                  <a:t> </a:t>
+                </a:r>
+                <a:r>
+                  <a:rPr lang="ko-KR" altLang="en-US" sz="1600" spc="-50" dirty="0"/>
+                  <a:t>로 줄었다</a:t>
+                </a:r>
+                <a:r>
+                  <a:rPr lang="en-US" altLang="ko-KR" sz="1600" spc="-50" dirty="0"/>
+                  <a:t>.</a:t>
+                </a:r>
+              </a:p>
+              <a:p>
                 <a:pPr marL="1292225" lvl="2" indent="-285750">
                   <a:lnSpc>
                     <a:spcPct val="150000"/>
                   </a:lnSpc>
                   <a:buFont typeface="Wingdings" panose="05000000000000000000" pitchFamily="2" charset="2"/>
                   <a:buChar char="Ø"/>
+                </a:pPr>
+                <a:r>
+                  <a:rPr lang="ko-KR" altLang="en-US" sz="1600" spc="-50" dirty="0"/>
+                  <a:t>그의 선택점이 </a:t>
+                </a:r>
+                <a14:m>
+                  <m:oMath xmlns:m="http://schemas.openxmlformats.org/officeDocument/2006/math">
+                    <m:r>
+                      <a:rPr lang="en-US" altLang="ko-KR" sz="1600" i="1" spc="-50">
+                        <a:latin typeface="Cambria Math" panose="02040503050406030204" pitchFamily="18" charset="0"/>
+                      </a:rPr>
+                      <m:t>𝐸</m:t>
+                    </m:r>
+                  </m:oMath>
+                </a14:m>
+                <a:r>
+                  <a:rPr lang="ko-KR" altLang="en-US" sz="1600" spc="-50" dirty="0"/>
+                  <a:t>에서 </a:t>
+                </a:r>
+                <a14:m>
+                  <m:oMath xmlns:m="http://schemas.openxmlformats.org/officeDocument/2006/math">
+                    <m:sSup>
+                      <m:sSupPr>
+                        <m:ctrlPr>
+                          <a:rPr lang="en-US" altLang="ko-KR" sz="1600" i="1" spc="-50">
+                            <a:latin typeface="Cambria Math" panose="02040503050406030204" pitchFamily="18" charset="0"/>
+                          </a:rPr>
+                        </m:ctrlPr>
+                      </m:sSupPr>
+                      <m:e>
+                        <m:r>
+                          <a:rPr lang="en-US" altLang="ko-KR" sz="1600" i="1" spc="-50">
+                            <a:latin typeface="Cambria Math" panose="02040503050406030204" pitchFamily="18" charset="0"/>
+                          </a:rPr>
+                          <m:t>𝐸</m:t>
+                        </m:r>
+                      </m:e>
+                      <m:sup>
+                        <m:r>
+                          <a:rPr lang="en-US" altLang="ko-KR" sz="1600" i="1" spc="-50">
+                            <a:latin typeface="Cambria Math" panose="02040503050406030204" pitchFamily="18" charset="0"/>
+                          </a:rPr>
+                          <m:t>′</m:t>
+                        </m:r>
+                        <m:r>
+                          <a:rPr lang="en-US" altLang="ko-KR" sz="1600" b="0" i="1" spc="-50" smtClean="0">
+                            <a:latin typeface="Cambria Math" panose="02040503050406030204" pitchFamily="18" charset="0"/>
+                          </a:rPr>
+                          <m:t>′</m:t>
+                        </m:r>
+                      </m:sup>
+                    </m:sSup>
+                  </m:oMath>
+                </a14:m>
+                <a:r>
+                  <a:rPr lang="ko-KR" altLang="en-US" sz="1600" spc="-50" dirty="0"/>
+                  <a:t>으로 이동한 것을 보면 알 수 있다</a:t>
+                </a:r>
+                <a:r>
+                  <a:rPr lang="en-US" altLang="ko-KR" sz="1600" spc="-50" dirty="0"/>
+                  <a:t>.</a:t>
+                </a:r>
+                <a:r>
+                  <a:rPr lang="ko-KR" altLang="en-US" sz="1600" spc="-50" dirty="0"/>
+                  <a:t>  </a:t>
+                </a:r>
+                <a:endParaRPr lang="en-US" altLang="ko-KR" sz="1600" spc="-50" dirty="0"/>
+              </a:p>
+              <a:p>
+                <a:pPr marL="835025" lvl="1" indent="-285750">
+                  <a:lnSpc>
+                    <a:spcPct val="150000"/>
+                  </a:lnSpc>
+                  <a:buFont typeface="Wingdings" panose="05000000000000000000" pitchFamily="2" charset="2"/>
+                  <a:buChar char="ü"/>
+                </a:pPr>
+                <a:r>
+                  <a:rPr lang="ko-KR" altLang="en-US" sz="1600" spc="-50" dirty="0"/>
+                  <a:t>앞서 공공부조 프로그램과 비교했을 때</a:t>
+                </a:r>
+                <a:r>
+                  <a:rPr lang="en-US" altLang="ko-KR" sz="1600" spc="-50" dirty="0"/>
+                  <a:t>, </a:t>
+                </a:r>
+                <a:r>
+                  <a:rPr lang="ko-KR" altLang="en-US" sz="1600" spc="-50" dirty="0"/>
+                  <a:t>노동의 감소폭이 작다</a:t>
+                </a:r>
+                <a:r>
+                  <a:rPr lang="en-US" altLang="ko-KR" sz="1600" spc="-50" dirty="0"/>
+                  <a:t>.</a:t>
+                </a:r>
+              </a:p>
+              <a:p>
+                <a:pPr marL="835025" lvl="1" indent="-285750">
+                  <a:lnSpc>
+                    <a:spcPct val="150000"/>
+                  </a:lnSpc>
+                  <a:buFont typeface="Wingdings" panose="05000000000000000000" pitchFamily="2" charset="2"/>
+                  <a:buChar char="ü"/>
                 </a:pPr>
                 <a:endParaRPr lang="en-US" altLang="ko-KR" sz="1600" spc="-50" dirty="0"/>
               </a:p>
@@ -12958,7 +13182,7 @@
             <p:spPr>
               <a:xfrm>
                 <a:off x="288790" y="3282992"/>
-                <a:ext cx="7522827" cy="1563185"/>
+                <a:ext cx="7522827" cy="2773067"/>
               </a:xfrm>
               <a:prstGeom prst="rect">
                 <a:avLst/>
@@ -12999,6 +13223,605 @@
 </file>
 
 <file path=ppt/slides/slide21.xml><?xml version="1.0" encoding="utf-8"?>
+<p:sld xmlns:a="http://schemas.openxmlformats.org/drawingml/2006/main" xmlns:r="http://schemas.openxmlformats.org/officeDocument/2006/relationships" xmlns:p="http://schemas.openxmlformats.org/presentationml/2006/main">
+  <p:cSld>
+    <p:spTree>
+      <p:nvGrpSpPr>
+        <p:cNvPr id="1" name="">
+          <a:extLst>
+            <a:ext uri="{FF2B5EF4-FFF2-40B4-BE49-F238E27FC236}">
+              <a16:creationId xmlns:a16="http://schemas.microsoft.com/office/drawing/2014/main" id="{37F71A1E-9B47-50D7-EEE7-449268E691A6}"/>
+            </a:ext>
+          </a:extLst>
+        </p:cNvPr>
+        <p:cNvGrpSpPr/>
+        <p:nvPr/>
+      </p:nvGrpSpPr>
+      <p:grpSpPr>
+        <a:xfrm>
+          <a:off x="0" y="0"/>
+          <a:ext cx="0" cy="0"/>
+          <a:chOff x="0" y="0"/>
+          <a:chExt cx="0" cy="0"/>
+        </a:xfrm>
+      </p:grpSpPr>
+      <p:sp>
+        <p:nvSpPr>
+          <p:cNvPr id="2" name="제목 1">
+            <a:extLst>
+              <a:ext uri="{FF2B5EF4-FFF2-40B4-BE49-F238E27FC236}">
+                <a16:creationId xmlns:a16="http://schemas.microsoft.com/office/drawing/2014/main" id="{D69F5F5A-E448-C19B-DD73-26E1A5B6DB08}"/>
+              </a:ext>
+            </a:extLst>
+          </p:cNvPr>
+          <p:cNvSpPr>
+            <a:spLocks noGrp="1"/>
+          </p:cNvSpPr>
+          <p:nvPr>
+            <p:ph type="title"/>
+          </p:nvPr>
+        </p:nvSpPr>
+        <p:spPr/>
+        <p:txBody>
+          <a:bodyPr/>
+          <a:lstStyle/>
+          <a:p>
+            <a:r>
+              <a:rPr lang="ko-KR" altLang="en-US" dirty="0"/>
+              <a:t>기본소득제도</a:t>
+            </a:r>
+          </a:p>
+        </p:txBody>
+      </p:sp>
+      <p:sp>
+        <p:nvSpPr>
+          <p:cNvPr id="4" name="슬라이드 번호 개체 틀 3">
+            <a:extLst>
+              <a:ext uri="{FF2B5EF4-FFF2-40B4-BE49-F238E27FC236}">
+                <a16:creationId xmlns:a16="http://schemas.microsoft.com/office/drawing/2014/main" id="{AE53D890-E99F-579A-6CBF-09CC3971CC42}"/>
+              </a:ext>
+            </a:extLst>
+          </p:cNvPr>
+          <p:cNvSpPr>
+            <a:spLocks noGrp="1"/>
+          </p:cNvSpPr>
+          <p:nvPr>
+            <p:ph type="sldNum" sz="quarter" idx="12"/>
+          </p:nvPr>
+        </p:nvSpPr>
+        <p:spPr/>
+        <p:txBody>
+          <a:bodyPr/>
+          <a:lstStyle/>
+          <a:p>
+            <a:fld id="{109C872D-39A9-4065-8BF3-6A613116E2A1}" type="slidenum">
+              <a:rPr lang="ko-KR" altLang="en-US" smtClean="0"/>
+              <a:t>21</a:t>
+            </a:fld>
+            <a:endParaRPr lang="ko-KR" altLang="en-US"/>
+          </a:p>
+        </p:txBody>
+      </p:sp>
+      <p:sp>
+        <p:nvSpPr>
+          <p:cNvPr id="3" name="TextBox 2">
+            <a:extLst>
+              <a:ext uri="{FF2B5EF4-FFF2-40B4-BE49-F238E27FC236}">
+                <a16:creationId xmlns:a16="http://schemas.microsoft.com/office/drawing/2014/main" id="{97F9C7F3-4B34-D8C7-B1F2-9952E8DA66E6}"/>
+              </a:ext>
+            </a:extLst>
+          </p:cNvPr>
+          <p:cNvSpPr txBox="1"/>
+          <p:nvPr/>
+        </p:nvSpPr>
+        <p:spPr>
+          <a:xfrm>
+            <a:off x="288790" y="958844"/>
+            <a:ext cx="11250267" cy="5215338"/>
+          </a:xfrm>
+          <a:prstGeom prst="rect">
+            <a:avLst/>
+          </a:prstGeom>
+          <a:noFill/>
+        </p:spPr>
+        <p:txBody>
+          <a:bodyPr wrap="square" rtlCol="0" anchor="t">
+            <a:spAutoFit/>
+          </a:bodyPr>
+          <a:lstStyle/>
+          <a:p>
+            <a:pPr marL="377825" indent="-285750">
+              <a:lnSpc>
+                <a:spcPct val="150000"/>
+              </a:lnSpc>
+              <a:buFont typeface="Arial" panose="020B0604020202020204" pitchFamily="34" charset="0"/>
+              <a:buChar char="•"/>
+            </a:pPr>
+            <a:r>
+              <a:rPr lang="ko-KR" altLang="en-US" sz="1600" spc="-50" dirty="0"/>
+              <a:t>기본소득제도는 사회에 속한 모든 사람들을 똑같이 지원 대상으로 삼는다는 점에서</a:t>
+            </a:r>
+            <a:r>
+              <a:rPr lang="en-US" altLang="ko-KR" sz="1600" spc="-50" dirty="0"/>
+              <a:t>, </a:t>
+            </a:r>
+            <a:r>
+              <a:rPr lang="ko-KR" altLang="en-US" sz="1600" spc="-50" dirty="0"/>
+              <a:t>빈곤층을 대상으로만 하는 공공부조 프로그램과 차이를 갖는다</a:t>
+            </a:r>
+            <a:r>
+              <a:rPr lang="en-US" altLang="ko-KR" sz="1600" spc="-50" dirty="0"/>
+              <a:t>.</a:t>
+            </a:r>
+          </a:p>
+          <a:p>
+            <a:pPr marL="835025" lvl="1" indent="-285750">
+              <a:lnSpc>
+                <a:spcPct val="150000"/>
+              </a:lnSpc>
+              <a:buFont typeface="Wingdings" panose="05000000000000000000" pitchFamily="2" charset="2"/>
+              <a:buChar char="ü"/>
+            </a:pPr>
+            <a:r>
+              <a:rPr lang="ko-KR" altLang="en-US" sz="1600" spc="-50" dirty="0"/>
+              <a:t>모든 구성원들이 각자의 상황과 관계없이 최소한의 생활수준을 누릴 권리를 갖고 있다는 의미이다</a:t>
+            </a:r>
+            <a:r>
+              <a:rPr lang="en-US" altLang="ko-KR" sz="1600" spc="-50" dirty="0"/>
+              <a:t>.</a:t>
+            </a:r>
+          </a:p>
+          <a:p>
+            <a:pPr marL="377825" indent="-285750">
+              <a:lnSpc>
+                <a:spcPct val="150000"/>
+              </a:lnSpc>
+              <a:buFont typeface="Arial" panose="020B0604020202020204" pitchFamily="34" charset="0"/>
+              <a:buChar char="•"/>
+            </a:pPr>
+            <a:r>
+              <a:rPr lang="ko-KR" altLang="en-US" sz="1600" spc="-50" dirty="0"/>
+              <a:t>선별적 복지제도와 비교했을 때</a:t>
+            </a:r>
+            <a:r>
+              <a:rPr lang="en-US" altLang="ko-KR" sz="1600" spc="-50" dirty="0"/>
+              <a:t>,</a:t>
+            </a:r>
+            <a:r>
+              <a:rPr lang="ko-KR" altLang="en-US" sz="1600" spc="-50" dirty="0"/>
+              <a:t> 기본소득제도가 갖는 장점은 아래와 같다</a:t>
+            </a:r>
+            <a:r>
+              <a:rPr lang="en-US" altLang="ko-KR" sz="1600" spc="-50" dirty="0"/>
+              <a:t>.</a:t>
+            </a:r>
+          </a:p>
+          <a:p>
+            <a:pPr marL="835025" lvl="1" indent="-285750">
+              <a:lnSpc>
+                <a:spcPct val="150000"/>
+              </a:lnSpc>
+              <a:buFont typeface="Wingdings" panose="05000000000000000000" pitchFamily="2" charset="2"/>
+              <a:buChar char="ü"/>
+            </a:pPr>
+            <a:r>
+              <a:rPr lang="ko-KR" altLang="en-US" sz="1600" spc="-50" dirty="0"/>
+              <a:t>대상을 선별하지 않으니</a:t>
+            </a:r>
+            <a:r>
+              <a:rPr lang="en-US" altLang="ko-KR" sz="1600" spc="-50" dirty="0"/>
+              <a:t>, </a:t>
+            </a:r>
+            <a:r>
+              <a:rPr lang="ko-KR" altLang="en-US" sz="1600" spc="-50" dirty="0"/>
+              <a:t>그만큼 행정비용이 줄어든다는 장점이 있고</a:t>
+            </a:r>
+            <a:r>
+              <a:rPr lang="en-US" altLang="ko-KR" sz="1600" spc="-50" dirty="0"/>
+              <a:t>, </a:t>
+            </a:r>
+            <a:r>
+              <a:rPr lang="ko-KR" altLang="en-US" sz="1600" spc="-50" dirty="0"/>
+              <a:t>복지의 사각지대가 해소될 수 있다</a:t>
+            </a:r>
+            <a:r>
+              <a:rPr lang="en-US" altLang="ko-KR" sz="1600" spc="-50" dirty="0"/>
+              <a:t>.</a:t>
+            </a:r>
+          </a:p>
+          <a:p>
+            <a:pPr marL="1292225" lvl="2" indent="-285750">
+              <a:lnSpc>
+                <a:spcPct val="150000"/>
+              </a:lnSpc>
+              <a:buFont typeface="Wingdings" panose="05000000000000000000" pitchFamily="2" charset="2"/>
+              <a:buChar char="Ø"/>
+            </a:pPr>
+            <a:r>
+              <a:rPr lang="ko-KR" altLang="en-US" sz="1600" spc="-50" dirty="0"/>
+              <a:t>선별적 복지제도는 지원 대상을 선별하는 과정에서 지원대상이 될 수 없는 사람들이 지원을 받거나</a:t>
+            </a:r>
+            <a:r>
+              <a:rPr lang="en-US" altLang="ko-KR" sz="1600" spc="-50" dirty="0"/>
+              <a:t>, </a:t>
+            </a:r>
+            <a:r>
+              <a:rPr lang="ko-KR" altLang="en-US" sz="1600" spc="-50" dirty="0"/>
+              <a:t>지원 대상이 되어야 할 사람들이 지원을 못 받는 문제가 끊임없이 발생하고 있다</a:t>
+            </a:r>
+            <a:r>
+              <a:rPr lang="en-US" altLang="ko-KR" sz="1600" spc="-50" dirty="0"/>
+              <a:t>.</a:t>
+            </a:r>
+          </a:p>
+          <a:p>
+            <a:pPr marL="835025" lvl="1" indent="-285750">
+              <a:lnSpc>
+                <a:spcPct val="150000"/>
+              </a:lnSpc>
+              <a:buFont typeface="Wingdings" panose="05000000000000000000" pitchFamily="2" charset="2"/>
+              <a:buChar char="ü"/>
+            </a:pPr>
+            <a:r>
+              <a:rPr lang="ko-KR" altLang="en-US" sz="1600" spc="-50" dirty="0"/>
+              <a:t>선별적 복지의 대상인 구성원들은 무능력하거나 게으른 사람이라고 사회적 낙인이 찍힌다는 문제가 발생하는데 반해</a:t>
+            </a:r>
+            <a:r>
+              <a:rPr lang="en-US" altLang="ko-KR" sz="1600" spc="-50" dirty="0"/>
+              <a:t>, </a:t>
+            </a:r>
+            <a:r>
+              <a:rPr lang="ko-KR" altLang="en-US" sz="1600" spc="-50" dirty="0" err="1"/>
+              <a:t>기본소득제도하에서는</a:t>
+            </a:r>
+            <a:r>
+              <a:rPr lang="ko-KR" altLang="en-US" sz="1600" spc="-50" dirty="0"/>
+              <a:t> 그런 문제가 발생하지 않는다</a:t>
+            </a:r>
+            <a:r>
+              <a:rPr lang="en-US" altLang="ko-KR" sz="1600" spc="-50" dirty="0"/>
+              <a:t>.</a:t>
+            </a:r>
+          </a:p>
+          <a:p>
+            <a:pPr marL="377825" indent="-285750">
+              <a:lnSpc>
+                <a:spcPct val="150000"/>
+              </a:lnSpc>
+              <a:buFont typeface="Arial" panose="020B0604020202020204" pitchFamily="34" charset="0"/>
+              <a:buChar char="•"/>
+            </a:pPr>
+            <a:r>
+              <a:rPr lang="ko-KR" altLang="en-US" sz="1600" spc="-50" dirty="0"/>
+              <a:t>그러나 기본소득제도가 갖는 단점도 존재한다</a:t>
+            </a:r>
+            <a:r>
+              <a:rPr lang="en-US" altLang="ko-KR" sz="1600" spc="-50" dirty="0"/>
+              <a:t>.</a:t>
+            </a:r>
+          </a:p>
+          <a:p>
+            <a:pPr marL="835025" lvl="1" indent="-285750">
+              <a:lnSpc>
+                <a:spcPct val="150000"/>
+              </a:lnSpc>
+              <a:buFont typeface="Wingdings" panose="05000000000000000000" pitchFamily="2" charset="2"/>
+              <a:buChar char="ü"/>
+            </a:pPr>
+            <a:r>
+              <a:rPr lang="ko-KR" altLang="en-US" sz="1600" spc="-50" dirty="0"/>
+              <a:t>엄청난 규모의 재원이 필요하다</a:t>
+            </a:r>
+            <a:r>
+              <a:rPr lang="en-US" altLang="ko-KR" sz="1600" spc="-50" dirty="0"/>
+              <a:t>.</a:t>
+            </a:r>
+          </a:p>
+          <a:p>
+            <a:pPr marL="1292225" lvl="2" indent="-285750">
+              <a:lnSpc>
+                <a:spcPct val="150000"/>
+              </a:lnSpc>
+              <a:buFont typeface="Wingdings" panose="05000000000000000000" pitchFamily="2" charset="2"/>
+              <a:buChar char="Ø"/>
+            </a:pPr>
+            <a:r>
+              <a:rPr lang="ko-KR" altLang="en-US" sz="1600" spc="-50" dirty="0"/>
+              <a:t>국민들의 동의를 받아 엄청나게 많은 세금을 거두어야 하는 것은 불가피한 일이다</a:t>
+            </a:r>
+            <a:r>
+              <a:rPr lang="en-US" altLang="ko-KR" sz="1600" spc="-50" dirty="0"/>
+              <a:t>.</a:t>
+            </a:r>
+          </a:p>
+          <a:p>
+            <a:pPr marL="835025" lvl="1" indent="-285750">
+              <a:lnSpc>
+                <a:spcPct val="150000"/>
+              </a:lnSpc>
+              <a:buFont typeface="Wingdings" panose="05000000000000000000" pitchFamily="2" charset="2"/>
+              <a:buChar char="ü"/>
+            </a:pPr>
+            <a:r>
+              <a:rPr lang="ko-KR" altLang="en-US" sz="1600" spc="-50" dirty="0"/>
+              <a:t>근로의욕을 떨어뜨려 경제의 생산성 하락을 유발할 수 있다</a:t>
+            </a:r>
+            <a:r>
+              <a:rPr lang="en-US" altLang="ko-KR" sz="1600" spc="-50" dirty="0"/>
+              <a:t>. </a:t>
+            </a:r>
+          </a:p>
+          <a:p>
+            <a:pPr marL="1292225" lvl="2" indent="-285750">
+              <a:lnSpc>
+                <a:spcPct val="150000"/>
+              </a:lnSpc>
+              <a:buFont typeface="Wingdings" panose="05000000000000000000" pitchFamily="2" charset="2"/>
+              <a:buChar char="Ø"/>
+            </a:pPr>
+            <a:r>
+              <a:rPr lang="ko-KR" altLang="en-US" sz="1600" spc="-50" dirty="0"/>
+              <a:t>사회적 낙인을 걱정할 필요 없이 구태여 힘들게 일을 할 필요가 없어지기 때문이다</a:t>
+            </a:r>
+            <a:r>
+              <a:rPr lang="en-US" altLang="ko-KR" sz="1600" spc="-50" dirty="0"/>
+              <a:t>.</a:t>
+            </a:r>
+          </a:p>
+        </p:txBody>
+      </p:sp>
+    </p:spTree>
+    <p:extLst>
+      <p:ext uri="{BB962C8B-B14F-4D97-AF65-F5344CB8AC3E}">
+        <p14:creationId xmlns:p14="http://schemas.microsoft.com/office/powerpoint/2010/main" val="318429427"/>
+      </p:ext>
+    </p:extLst>
+  </p:cSld>
+  <p:clrMapOvr>
+    <a:masterClrMapping/>
+  </p:clrMapOvr>
+</p:sld>
+</file>
+
+<file path=ppt/slides/slide22.xml><?xml version="1.0" encoding="utf-8"?>
+<p:sld xmlns:a="http://schemas.openxmlformats.org/drawingml/2006/main" xmlns:r="http://schemas.openxmlformats.org/officeDocument/2006/relationships" xmlns:p="http://schemas.openxmlformats.org/presentationml/2006/main">
+  <p:cSld>
+    <p:spTree>
+      <p:nvGrpSpPr>
+        <p:cNvPr id="1" name="">
+          <a:extLst>
+            <a:ext uri="{FF2B5EF4-FFF2-40B4-BE49-F238E27FC236}">
+              <a16:creationId xmlns:a16="http://schemas.microsoft.com/office/drawing/2014/main" id="{A1398A0A-7389-D3DF-CACE-D1A923161128}"/>
+            </a:ext>
+          </a:extLst>
+        </p:cNvPr>
+        <p:cNvGrpSpPr/>
+        <p:nvPr/>
+      </p:nvGrpSpPr>
+      <p:grpSpPr>
+        <a:xfrm>
+          <a:off x="0" y="0"/>
+          <a:ext cx="0" cy="0"/>
+          <a:chOff x="0" y="0"/>
+          <a:chExt cx="0" cy="0"/>
+        </a:xfrm>
+      </p:grpSpPr>
+      <p:sp>
+        <p:nvSpPr>
+          <p:cNvPr id="2" name="제목 1">
+            <a:extLst>
+              <a:ext uri="{FF2B5EF4-FFF2-40B4-BE49-F238E27FC236}">
+                <a16:creationId xmlns:a16="http://schemas.microsoft.com/office/drawing/2014/main" id="{0F623959-216D-873F-0CEA-DF3660586926}"/>
+              </a:ext>
+            </a:extLst>
+          </p:cNvPr>
+          <p:cNvSpPr>
+            <a:spLocks noGrp="1"/>
+          </p:cNvSpPr>
+          <p:nvPr>
+            <p:ph type="title"/>
+          </p:nvPr>
+        </p:nvSpPr>
+        <p:spPr/>
+        <p:txBody>
+          <a:bodyPr/>
+          <a:lstStyle/>
+          <a:p>
+            <a:r>
+              <a:rPr lang="ko-KR" altLang="en-US" dirty="0"/>
+              <a:t>기본소득제도</a:t>
+            </a:r>
+          </a:p>
+        </p:txBody>
+      </p:sp>
+      <p:sp>
+        <p:nvSpPr>
+          <p:cNvPr id="4" name="슬라이드 번호 개체 틀 3">
+            <a:extLst>
+              <a:ext uri="{FF2B5EF4-FFF2-40B4-BE49-F238E27FC236}">
+                <a16:creationId xmlns:a16="http://schemas.microsoft.com/office/drawing/2014/main" id="{8FA54FA9-3647-51B8-9737-393348C76E38}"/>
+              </a:ext>
+            </a:extLst>
+          </p:cNvPr>
+          <p:cNvSpPr>
+            <a:spLocks noGrp="1"/>
+          </p:cNvSpPr>
+          <p:nvPr>
+            <p:ph type="sldNum" sz="quarter" idx="12"/>
+          </p:nvPr>
+        </p:nvSpPr>
+        <p:spPr/>
+        <p:txBody>
+          <a:bodyPr/>
+          <a:lstStyle/>
+          <a:p>
+            <a:fld id="{109C872D-39A9-4065-8BF3-6A613116E2A1}" type="slidenum">
+              <a:rPr lang="ko-KR" altLang="en-US" smtClean="0"/>
+              <a:t>22</a:t>
+            </a:fld>
+            <a:endParaRPr lang="ko-KR" altLang="en-US"/>
+          </a:p>
+        </p:txBody>
+      </p:sp>
+      <p:sp>
+        <p:nvSpPr>
+          <p:cNvPr id="3" name="TextBox 2">
+            <a:extLst>
+              <a:ext uri="{FF2B5EF4-FFF2-40B4-BE49-F238E27FC236}">
+                <a16:creationId xmlns:a16="http://schemas.microsoft.com/office/drawing/2014/main" id="{595D7CB8-A0DA-0577-4EA0-5EF7AAE125EA}"/>
+              </a:ext>
+            </a:extLst>
+          </p:cNvPr>
+          <p:cNvSpPr txBox="1"/>
+          <p:nvPr/>
+        </p:nvSpPr>
+        <p:spPr>
+          <a:xfrm>
+            <a:off x="288790" y="958844"/>
+            <a:ext cx="11250267" cy="1891352"/>
+          </a:xfrm>
+          <a:prstGeom prst="rect">
+            <a:avLst/>
+          </a:prstGeom>
+          <a:noFill/>
+        </p:spPr>
+        <p:txBody>
+          <a:bodyPr wrap="square" rtlCol="0" anchor="t">
+            <a:spAutoFit/>
+          </a:bodyPr>
+          <a:lstStyle/>
+          <a:p>
+            <a:pPr marL="377825" indent="-285750">
+              <a:lnSpc>
+                <a:spcPct val="150000"/>
+              </a:lnSpc>
+              <a:buFont typeface="Arial" panose="020B0604020202020204" pitchFamily="34" charset="0"/>
+              <a:buChar char="•"/>
+            </a:pPr>
+            <a:r>
+              <a:rPr lang="ko-KR" altLang="en-US" sz="1600" spc="-50" dirty="0"/>
+              <a:t>기본소득제도는 비교적 최근에 와서 본격적인 주목을 받기 시작했고</a:t>
+            </a:r>
+            <a:r>
+              <a:rPr lang="en-US" altLang="ko-KR" sz="1600" spc="-50" dirty="0"/>
+              <a:t>, </a:t>
+            </a:r>
+            <a:r>
+              <a:rPr lang="ko-KR" altLang="en-US" sz="1600" spc="-50" dirty="0"/>
+              <a:t>앞으로도 저출산</a:t>
+            </a:r>
+            <a:r>
+              <a:rPr lang="en-US" altLang="ko-KR" sz="1600" spc="-50" dirty="0"/>
+              <a:t>, </a:t>
+            </a:r>
+            <a:r>
+              <a:rPr lang="ko-KR" altLang="en-US" sz="1600" spc="-50" dirty="0"/>
+              <a:t>고령화 문제가 심각해지면서 이에 관한 논의가 점점 활발해질 것으로 보인다</a:t>
+            </a:r>
+            <a:r>
+              <a:rPr lang="en-US" altLang="ko-KR" sz="1600" spc="-50" dirty="0"/>
+              <a:t>.</a:t>
+            </a:r>
+          </a:p>
+          <a:p>
+            <a:pPr marL="835025" lvl="1" indent="-285750">
+              <a:lnSpc>
+                <a:spcPct val="150000"/>
+              </a:lnSpc>
+              <a:buFont typeface="Wingdings" panose="05000000000000000000" pitchFamily="2" charset="2"/>
+              <a:buChar char="ü"/>
+            </a:pPr>
+            <a:r>
+              <a:rPr lang="ko-KR" altLang="en-US" sz="1600" spc="-50" dirty="0"/>
+              <a:t>기존의 선별적 복지제도가 갖는 한계점을 인식하고</a:t>
+            </a:r>
+            <a:r>
+              <a:rPr lang="en-US" altLang="ko-KR" sz="1600" spc="-50" dirty="0"/>
+              <a:t>, </a:t>
+            </a:r>
+            <a:r>
+              <a:rPr lang="ko-KR" altLang="en-US" sz="1600" spc="-50" dirty="0"/>
+              <a:t>대안을 모색한다는 점에서 중요한 의미를 갖는다</a:t>
+            </a:r>
+            <a:r>
+              <a:rPr lang="en-US" altLang="ko-KR" sz="1600" spc="-50" dirty="0"/>
+              <a:t>.</a:t>
+            </a:r>
+          </a:p>
+          <a:p>
+            <a:pPr marL="835025" lvl="1" indent="-285750">
+              <a:lnSpc>
+                <a:spcPct val="150000"/>
+              </a:lnSpc>
+              <a:buFont typeface="Wingdings" panose="05000000000000000000" pitchFamily="2" charset="2"/>
+              <a:buChar char="ü"/>
+            </a:pPr>
+            <a:r>
+              <a:rPr lang="ko-KR" altLang="en-US" sz="1600" spc="-50" dirty="0"/>
+              <a:t>다만 기본소득제도는 일단 도입이 되면</a:t>
+            </a:r>
+            <a:r>
+              <a:rPr lang="en-US" altLang="ko-KR" sz="1600" spc="-50" dirty="0"/>
+              <a:t>, </a:t>
+            </a:r>
+            <a:r>
+              <a:rPr lang="ko-KR" altLang="en-US" sz="1600" spc="-50" dirty="0"/>
+              <a:t>다시 되돌리는 것이 쉽지 않다는 점에서 신중할 필요가 있다</a:t>
+            </a:r>
+            <a:r>
+              <a:rPr lang="en-US" altLang="ko-KR" sz="1600" spc="-50" dirty="0"/>
+              <a:t>.</a:t>
+            </a:r>
+          </a:p>
+          <a:p>
+            <a:pPr marL="835025" lvl="1" indent="-285750">
+              <a:lnSpc>
+                <a:spcPct val="150000"/>
+              </a:lnSpc>
+              <a:buFont typeface="Wingdings" panose="05000000000000000000" pitchFamily="2" charset="2"/>
+              <a:buChar char="ü"/>
+            </a:pPr>
+            <a:r>
+              <a:rPr lang="ko-KR" altLang="en-US" sz="1600" spc="-50" dirty="0"/>
+              <a:t>또</a:t>
+            </a:r>
+            <a:r>
+              <a:rPr lang="en-US" altLang="ko-KR" sz="1600" spc="-50" dirty="0"/>
+              <a:t>, </a:t>
+            </a:r>
+            <a:r>
+              <a:rPr lang="ko-KR" altLang="en-US" sz="1600" spc="-50" dirty="0"/>
+              <a:t>기본소득의 수준과</a:t>
+            </a:r>
+            <a:r>
+              <a:rPr lang="en-US" altLang="ko-KR" sz="1600" spc="-50" dirty="0"/>
+              <a:t>, </a:t>
+            </a:r>
+            <a:r>
+              <a:rPr lang="ko-KR" altLang="en-US" sz="1600" spc="-50" dirty="0"/>
+              <a:t>재원마련에 대한 검토가 선행되어야 한다</a:t>
+            </a:r>
+            <a:r>
+              <a:rPr lang="en-US" altLang="ko-KR" sz="1600" spc="-50" dirty="0"/>
+              <a:t>.</a:t>
+            </a:r>
+          </a:p>
+        </p:txBody>
+      </p:sp>
+    </p:spTree>
+    <p:extLst>
+      <p:ext uri="{BB962C8B-B14F-4D97-AF65-F5344CB8AC3E}">
+        <p14:creationId xmlns:p14="http://schemas.microsoft.com/office/powerpoint/2010/main" val="2299870628"/>
+      </p:ext>
+    </p:extLst>
+  </p:cSld>
+  <p:clrMapOvr>
+    <a:masterClrMapping/>
+  </p:clrMapOvr>
+</p:sld>
+</file>
+
+<file path=ppt/slides/slide23.xml><?xml version="1.0" encoding="utf-8"?>
 <p:sld xmlns:a="http://schemas.openxmlformats.org/drawingml/2006/main" xmlns:r="http://schemas.openxmlformats.org/officeDocument/2006/relationships" xmlns:p="http://schemas.openxmlformats.org/presentationml/2006/main">
   <p:cSld>
     <p:spTree>
@@ -13081,7 +13904,7 @@
           <a:p>
             <a:fld id="{109C872D-39A9-4065-8BF3-6A613116E2A1}" type="slidenum">
               <a:rPr lang="ko-KR" altLang="en-US" smtClean="0"/>
-              <a:t>21</a:t>
+              <a:t>23</a:t>
             </a:fld>
             <a:endParaRPr lang="ko-KR" altLang="en-US"/>
           </a:p>
@@ -13141,7 +13964,1706 @@
 </p:sld>
 </file>
 
-<file path=ppt/slides/slide22.xml><?xml version="1.0" encoding="utf-8"?>
+<file path=ppt/slides/slide24.xml><?xml version="1.0" encoding="utf-8"?>
+<p:sld xmlns:a="http://schemas.openxmlformats.org/drawingml/2006/main" xmlns:r="http://schemas.openxmlformats.org/officeDocument/2006/relationships" xmlns:p="http://schemas.openxmlformats.org/presentationml/2006/main">
+  <p:cSld>
+    <p:spTree>
+      <p:nvGrpSpPr>
+        <p:cNvPr id="1" name="">
+          <a:extLst>
+            <a:ext uri="{FF2B5EF4-FFF2-40B4-BE49-F238E27FC236}">
+              <a16:creationId xmlns:a16="http://schemas.microsoft.com/office/drawing/2014/main" id="{A6CFC944-53E8-0769-8FEF-02CA6A97FB1C}"/>
+            </a:ext>
+          </a:extLst>
+        </p:cNvPr>
+        <p:cNvGrpSpPr/>
+        <p:nvPr/>
+      </p:nvGrpSpPr>
+      <p:grpSpPr>
+        <a:xfrm>
+          <a:off x="0" y="0"/>
+          <a:ext cx="0" cy="0"/>
+          <a:chOff x="0" y="0"/>
+          <a:chExt cx="0" cy="0"/>
+        </a:xfrm>
+      </p:grpSpPr>
+      <p:sp>
+        <p:nvSpPr>
+          <p:cNvPr id="2" name="제목 1">
+            <a:extLst>
+              <a:ext uri="{FF2B5EF4-FFF2-40B4-BE49-F238E27FC236}">
+                <a16:creationId xmlns:a16="http://schemas.microsoft.com/office/drawing/2014/main" id="{E34AFABA-462E-2668-9892-943A57FD2F47}"/>
+              </a:ext>
+            </a:extLst>
+          </p:cNvPr>
+          <p:cNvSpPr>
+            <a:spLocks noGrp="1"/>
+          </p:cNvSpPr>
+          <p:nvPr>
+            <p:ph type="title"/>
+          </p:nvPr>
+        </p:nvSpPr>
+        <p:spPr/>
+        <p:txBody>
+          <a:bodyPr/>
+          <a:lstStyle/>
+          <a:p>
+            <a:r>
+              <a:rPr lang="ko-KR" altLang="en-US" dirty="0"/>
+              <a:t>빈곤선의 결정</a:t>
+            </a:r>
+          </a:p>
+        </p:txBody>
+      </p:sp>
+      <p:sp>
+        <p:nvSpPr>
+          <p:cNvPr id="4" name="슬라이드 번호 개체 틀 3">
+            <a:extLst>
+              <a:ext uri="{FF2B5EF4-FFF2-40B4-BE49-F238E27FC236}">
+                <a16:creationId xmlns:a16="http://schemas.microsoft.com/office/drawing/2014/main" id="{E7A506A0-6796-BF89-32C1-860CF7B0A7BC}"/>
+              </a:ext>
+            </a:extLst>
+          </p:cNvPr>
+          <p:cNvSpPr>
+            <a:spLocks noGrp="1"/>
+          </p:cNvSpPr>
+          <p:nvPr>
+            <p:ph type="sldNum" sz="quarter" idx="12"/>
+          </p:nvPr>
+        </p:nvSpPr>
+        <p:spPr/>
+        <p:txBody>
+          <a:bodyPr/>
+          <a:lstStyle/>
+          <a:p>
+            <a:fld id="{109C872D-39A9-4065-8BF3-6A613116E2A1}" type="slidenum">
+              <a:rPr lang="ko-KR" altLang="en-US" smtClean="0"/>
+              <a:t>24</a:t>
+            </a:fld>
+            <a:endParaRPr lang="ko-KR" altLang="en-US"/>
+          </a:p>
+        </p:txBody>
+      </p:sp>
+      <p:sp>
+        <p:nvSpPr>
+          <p:cNvPr id="3" name="TextBox 2">
+            <a:extLst>
+              <a:ext uri="{FF2B5EF4-FFF2-40B4-BE49-F238E27FC236}">
+                <a16:creationId xmlns:a16="http://schemas.microsoft.com/office/drawing/2014/main" id="{AA8D6E92-810C-6274-D426-A759A56674CE}"/>
+              </a:ext>
+            </a:extLst>
+          </p:cNvPr>
+          <p:cNvSpPr txBox="1"/>
+          <p:nvPr/>
+        </p:nvSpPr>
+        <p:spPr>
+          <a:xfrm>
+            <a:off x="288790" y="958844"/>
+            <a:ext cx="11250267" cy="4107343"/>
+          </a:xfrm>
+          <a:prstGeom prst="rect">
+            <a:avLst/>
+          </a:prstGeom>
+          <a:noFill/>
+        </p:spPr>
+        <p:txBody>
+          <a:bodyPr wrap="square" rtlCol="0" anchor="t">
+            <a:spAutoFit/>
+          </a:bodyPr>
+          <a:lstStyle/>
+          <a:p>
+            <a:pPr marL="377825" indent="-285750">
+              <a:lnSpc>
+                <a:spcPct val="150000"/>
+              </a:lnSpc>
+              <a:buFont typeface="Arial" panose="020B0604020202020204" pitchFamily="34" charset="0"/>
+              <a:buChar char="•"/>
+            </a:pPr>
+            <a:r>
+              <a:rPr lang="ko-KR" altLang="en-US" sz="1600" spc="-50" dirty="0"/>
+              <a:t>선별적 복지정책은 어떤 사람이 복지정책의 대상이 될지 결정하는 과정으로부터 출발한다</a:t>
+            </a:r>
+            <a:r>
+              <a:rPr lang="en-US" altLang="ko-KR" sz="1600" spc="-50" dirty="0"/>
+              <a:t>.</a:t>
+            </a:r>
+          </a:p>
+          <a:p>
+            <a:pPr marL="835025" lvl="1" indent="-285750">
+              <a:lnSpc>
+                <a:spcPct val="150000"/>
+              </a:lnSpc>
+              <a:buFont typeface="Wingdings" panose="05000000000000000000" pitchFamily="2" charset="2"/>
+              <a:buChar char="ü"/>
+            </a:pPr>
+            <a:r>
+              <a:rPr lang="ko-KR" altLang="en-US" sz="1600" spc="-50" dirty="0"/>
+              <a:t>보통 어떤 하나의 소득수준을 </a:t>
+            </a:r>
+            <a:r>
+              <a:rPr lang="ko-KR" altLang="en-US" sz="1600" b="1" spc="-50" dirty="0"/>
+              <a:t>빈곤선</a:t>
+            </a:r>
+            <a:r>
+              <a:rPr lang="ko-KR" altLang="en-US" sz="1600" spc="-50" dirty="0"/>
+              <a:t>으로 책정해놓고</a:t>
+            </a:r>
+            <a:r>
+              <a:rPr lang="en-US" altLang="ko-KR" sz="1600" spc="-50" dirty="0"/>
+              <a:t>, </a:t>
+            </a:r>
+            <a:r>
+              <a:rPr lang="ko-KR" altLang="en-US" sz="1600" spc="-50" dirty="0"/>
+              <a:t>그 소득 수준에 미치지 못하면 빈곤한 사람으로 간주한다</a:t>
+            </a:r>
+            <a:r>
+              <a:rPr lang="en-US" altLang="ko-KR" sz="1600" spc="-50" dirty="0"/>
+              <a:t>.</a:t>
+            </a:r>
+          </a:p>
+          <a:p>
+            <a:pPr marL="377825" indent="-285750">
+              <a:lnSpc>
+                <a:spcPct val="150000"/>
+              </a:lnSpc>
+              <a:buFont typeface="Arial" panose="020B0604020202020204" pitchFamily="34" charset="0"/>
+              <a:buChar char="•"/>
+            </a:pPr>
+            <a:r>
+              <a:rPr lang="ko-KR" altLang="en-US" sz="1600" spc="-50" dirty="0"/>
+              <a:t>빈곤한 사람과 그렇지 않은 사람을 가르는 기준</a:t>
+            </a:r>
+            <a:r>
+              <a:rPr lang="en-US" altLang="ko-KR" sz="1600" spc="-50" dirty="0"/>
+              <a:t>(</a:t>
+            </a:r>
+            <a:r>
+              <a:rPr lang="ko-KR" altLang="en-US" sz="1600" spc="-50" dirty="0"/>
+              <a:t>빈곤선</a:t>
+            </a:r>
+            <a:r>
+              <a:rPr lang="en-US" altLang="ko-KR" sz="1600" spc="-50" dirty="0"/>
+              <a:t>)</a:t>
+            </a:r>
+            <a:r>
+              <a:rPr lang="ko-KR" altLang="en-US" sz="1600" spc="-50" dirty="0"/>
+              <a:t>을 어떻게 설정해야 할지 고민하기 시작하면</a:t>
+            </a:r>
+            <a:r>
+              <a:rPr lang="en-US" altLang="ko-KR" sz="1600" spc="-50" dirty="0"/>
+              <a:t>, </a:t>
+            </a:r>
+            <a:r>
+              <a:rPr lang="ko-KR" altLang="en-US" sz="1600" spc="-50" dirty="0"/>
+              <a:t>과연 빈곤이라는 것이 무엇인가 라는 원초적인 질문을 하게 된다</a:t>
+            </a:r>
+            <a:r>
+              <a:rPr lang="en-US" altLang="ko-KR" sz="1600" spc="-50" dirty="0"/>
+              <a:t>.</a:t>
+            </a:r>
+          </a:p>
+          <a:p>
+            <a:pPr marL="835025" lvl="1" indent="-285750">
+              <a:lnSpc>
+                <a:spcPct val="150000"/>
+              </a:lnSpc>
+              <a:buFont typeface="Wingdings" panose="05000000000000000000" pitchFamily="2" charset="2"/>
+              <a:buChar char="ü"/>
+            </a:pPr>
+            <a:r>
+              <a:rPr lang="ko-KR" altLang="en-US" sz="1600" spc="-50" dirty="0"/>
+              <a:t>이에 대해 우리 사회는 한 가지로 통일된 답을 갖고 있지 않다</a:t>
+            </a:r>
+            <a:r>
+              <a:rPr lang="en-US" altLang="ko-KR" sz="1600" spc="-50" dirty="0"/>
+              <a:t>.</a:t>
+            </a:r>
+          </a:p>
+          <a:p>
+            <a:pPr marL="1292225" lvl="2" indent="-285750">
+              <a:lnSpc>
+                <a:spcPct val="150000"/>
+              </a:lnSpc>
+              <a:buFont typeface="Wingdings" panose="05000000000000000000" pitchFamily="2" charset="2"/>
+              <a:buChar char="Ø"/>
+            </a:pPr>
+            <a:r>
+              <a:rPr lang="ko-KR" altLang="en-US" sz="1600" spc="-50" dirty="0"/>
+              <a:t>의식주를 고려하여 절대적 기준을 정해 놓고 이를 구입하기에 충분하지 못한 소득을 가진 사람을 빈곤한 사람이라고 </a:t>
+            </a:r>
+            <a:r>
+              <a:rPr lang="ko-KR" altLang="en-US" sz="1600" spc="-50" dirty="0" err="1"/>
+              <a:t>간주해야한다는</a:t>
+            </a:r>
+            <a:r>
+              <a:rPr lang="ko-KR" altLang="en-US" sz="1600" spc="-50" dirty="0"/>
+              <a:t> 의견이 있을 수 있고</a:t>
+            </a:r>
+            <a:r>
+              <a:rPr lang="en-US" altLang="ko-KR" sz="1600" spc="-50" dirty="0"/>
+              <a:t>,</a:t>
+            </a:r>
+          </a:p>
+          <a:p>
+            <a:pPr marL="1292225" lvl="2" indent="-285750">
+              <a:lnSpc>
+                <a:spcPct val="150000"/>
+              </a:lnSpc>
+              <a:buFont typeface="Wingdings" panose="05000000000000000000" pitchFamily="2" charset="2"/>
+              <a:buChar char="Ø"/>
+            </a:pPr>
+            <a:r>
+              <a:rPr lang="ko-KR" altLang="en-US" sz="1600" spc="-50" dirty="0"/>
+              <a:t>모두가 풍요로운 생활을 하고 있는 사회 일지라도</a:t>
+            </a:r>
+            <a:r>
+              <a:rPr lang="en-US" altLang="ko-KR" sz="1600" spc="-50" dirty="0"/>
+              <a:t>, </a:t>
+            </a:r>
+            <a:r>
+              <a:rPr lang="ko-KR" altLang="en-US" sz="1600" spc="-50" dirty="0"/>
+              <a:t>상대적으로 빈곤층이 있을 수 있음을 지적하기도 한다</a:t>
+            </a:r>
+            <a:r>
+              <a:rPr lang="en-US" altLang="ko-KR" sz="1600" spc="-50" dirty="0"/>
+              <a:t>.</a:t>
+            </a:r>
+          </a:p>
+          <a:p>
+            <a:pPr marL="835025" lvl="1" indent="-285750">
+              <a:lnSpc>
+                <a:spcPct val="150000"/>
+              </a:lnSpc>
+              <a:buFont typeface="Wingdings" panose="05000000000000000000" pitchFamily="2" charset="2"/>
+              <a:buChar char="ü"/>
+            </a:pPr>
+            <a:r>
+              <a:rPr lang="ko-KR" altLang="en-US" sz="1600" spc="-50" dirty="0"/>
+              <a:t>한편</a:t>
+            </a:r>
+            <a:r>
+              <a:rPr lang="en-US" altLang="ko-KR" sz="1600" spc="-50" dirty="0"/>
+              <a:t>, </a:t>
+            </a:r>
+            <a:r>
+              <a:rPr lang="ko-KR" altLang="en-US" sz="1600" spc="-50" dirty="0"/>
+              <a:t>빈곤을 주관적으로 평가할 수도 있다</a:t>
+            </a:r>
+            <a:r>
+              <a:rPr lang="en-US" altLang="ko-KR" sz="1600" spc="-50" dirty="0"/>
+              <a:t>.</a:t>
+            </a:r>
+          </a:p>
+          <a:p>
+            <a:pPr marL="1292225" lvl="2" indent="-285750">
+              <a:lnSpc>
+                <a:spcPct val="150000"/>
+              </a:lnSpc>
+              <a:buFont typeface="Wingdings" panose="05000000000000000000" pitchFamily="2" charset="2"/>
+              <a:buChar char="Ø"/>
+            </a:pPr>
+            <a:r>
+              <a:rPr lang="ko-KR" altLang="en-US" sz="1600" spc="-50" dirty="0"/>
+              <a:t>최소한의 생활도 유지하지 못하는 소득을 가지고 있지만</a:t>
+            </a:r>
+            <a:r>
+              <a:rPr lang="en-US" altLang="ko-KR" sz="1600" spc="-50" dirty="0"/>
+              <a:t>, </a:t>
+            </a:r>
+            <a:r>
+              <a:rPr lang="ko-KR" altLang="en-US" sz="1600" spc="-50" dirty="0"/>
+              <a:t>자신은 빈곤하지 않다고 주장하는 사람이 있을 수 있는데</a:t>
+            </a:r>
+            <a:r>
+              <a:rPr lang="en-US" altLang="ko-KR" sz="1600" spc="-50" dirty="0"/>
+              <a:t>, </a:t>
+            </a:r>
+            <a:r>
+              <a:rPr lang="ko-KR" altLang="en-US" sz="1600" spc="-50" dirty="0"/>
+              <a:t>이 경우 빈곤을 평가하기란 무척 힘들다</a:t>
+            </a:r>
+            <a:r>
+              <a:rPr lang="en-US" altLang="ko-KR" sz="1600" spc="-50" dirty="0"/>
+              <a:t>.</a:t>
+            </a:r>
+          </a:p>
+        </p:txBody>
+      </p:sp>
+    </p:spTree>
+    <p:extLst>
+      <p:ext uri="{BB962C8B-B14F-4D97-AF65-F5344CB8AC3E}">
+        <p14:creationId xmlns:p14="http://schemas.microsoft.com/office/powerpoint/2010/main" val="2243390816"/>
+      </p:ext>
+    </p:extLst>
+  </p:cSld>
+  <p:clrMapOvr>
+    <a:masterClrMapping/>
+  </p:clrMapOvr>
+</p:sld>
+</file>
+
+<file path=ppt/slides/slide25.xml><?xml version="1.0" encoding="utf-8"?>
+<p:sld xmlns:a="http://schemas.openxmlformats.org/drawingml/2006/main" xmlns:r="http://schemas.openxmlformats.org/officeDocument/2006/relationships" xmlns:p="http://schemas.openxmlformats.org/presentationml/2006/main">
+  <p:cSld>
+    <p:spTree>
+      <p:nvGrpSpPr>
+        <p:cNvPr id="1" name="">
+          <a:extLst>
+            <a:ext uri="{FF2B5EF4-FFF2-40B4-BE49-F238E27FC236}">
+              <a16:creationId xmlns:a16="http://schemas.microsoft.com/office/drawing/2014/main" id="{3EEC384B-A2EA-EF8C-A505-DFBCB6FE3E5A}"/>
+            </a:ext>
+          </a:extLst>
+        </p:cNvPr>
+        <p:cNvGrpSpPr/>
+        <p:nvPr/>
+      </p:nvGrpSpPr>
+      <p:grpSpPr>
+        <a:xfrm>
+          <a:off x="0" y="0"/>
+          <a:ext cx="0" cy="0"/>
+          <a:chOff x="0" y="0"/>
+          <a:chExt cx="0" cy="0"/>
+        </a:xfrm>
+      </p:grpSpPr>
+      <p:sp>
+        <p:nvSpPr>
+          <p:cNvPr id="2" name="제목 1">
+            <a:extLst>
+              <a:ext uri="{FF2B5EF4-FFF2-40B4-BE49-F238E27FC236}">
+                <a16:creationId xmlns:a16="http://schemas.microsoft.com/office/drawing/2014/main" id="{B0A4B746-BA0F-6479-392D-091BE1CF0D47}"/>
+              </a:ext>
+            </a:extLst>
+          </p:cNvPr>
+          <p:cNvSpPr>
+            <a:spLocks noGrp="1"/>
+          </p:cNvSpPr>
+          <p:nvPr>
+            <p:ph type="title"/>
+          </p:nvPr>
+        </p:nvSpPr>
+        <p:spPr/>
+        <p:txBody>
+          <a:bodyPr/>
+          <a:lstStyle/>
+          <a:p>
+            <a:r>
+              <a:rPr lang="ko-KR" altLang="en-US" dirty="0"/>
+              <a:t>절대적이며 객관적인 기준에 의한 빈곤선</a:t>
+            </a:r>
+          </a:p>
+        </p:txBody>
+      </p:sp>
+      <p:sp>
+        <p:nvSpPr>
+          <p:cNvPr id="4" name="슬라이드 번호 개체 틀 3">
+            <a:extLst>
+              <a:ext uri="{FF2B5EF4-FFF2-40B4-BE49-F238E27FC236}">
+                <a16:creationId xmlns:a16="http://schemas.microsoft.com/office/drawing/2014/main" id="{A24A986E-DF44-BDE3-E605-16C01402C21B}"/>
+              </a:ext>
+            </a:extLst>
+          </p:cNvPr>
+          <p:cNvSpPr>
+            <a:spLocks noGrp="1"/>
+          </p:cNvSpPr>
+          <p:nvPr>
+            <p:ph type="sldNum" sz="quarter" idx="12"/>
+          </p:nvPr>
+        </p:nvSpPr>
+        <p:spPr/>
+        <p:txBody>
+          <a:bodyPr/>
+          <a:lstStyle/>
+          <a:p>
+            <a:fld id="{109C872D-39A9-4065-8BF3-6A613116E2A1}" type="slidenum">
+              <a:rPr lang="ko-KR" altLang="en-US" smtClean="0"/>
+              <a:t>25</a:t>
+            </a:fld>
+            <a:endParaRPr lang="ko-KR" altLang="en-US"/>
+          </a:p>
+        </p:txBody>
+      </p:sp>
+      <p:sp>
+        <p:nvSpPr>
+          <p:cNvPr id="3" name="TextBox 2">
+            <a:extLst>
+              <a:ext uri="{FF2B5EF4-FFF2-40B4-BE49-F238E27FC236}">
+                <a16:creationId xmlns:a16="http://schemas.microsoft.com/office/drawing/2014/main" id="{6201900F-75AD-9573-DEC2-0E918EEEE2B1}"/>
+              </a:ext>
+            </a:extLst>
+          </p:cNvPr>
+          <p:cNvSpPr txBox="1"/>
+          <p:nvPr/>
+        </p:nvSpPr>
+        <p:spPr>
+          <a:xfrm>
+            <a:off x="288790" y="958844"/>
+            <a:ext cx="11250267" cy="5215338"/>
+          </a:xfrm>
+          <a:prstGeom prst="rect">
+            <a:avLst/>
+          </a:prstGeom>
+          <a:noFill/>
+        </p:spPr>
+        <p:txBody>
+          <a:bodyPr wrap="square" rtlCol="0" anchor="t">
+            <a:spAutoFit/>
+          </a:bodyPr>
+          <a:lstStyle/>
+          <a:p>
+            <a:pPr marL="377825" indent="-285750">
+              <a:lnSpc>
+                <a:spcPct val="150000"/>
+              </a:lnSpc>
+              <a:buFont typeface="Arial" panose="020B0604020202020204" pitchFamily="34" charset="0"/>
+              <a:buChar char="•"/>
+            </a:pPr>
+            <a:r>
+              <a:rPr lang="ko-KR" altLang="en-US" sz="1600" spc="-50" dirty="0"/>
+              <a:t>영국의 </a:t>
+            </a:r>
+            <a:r>
+              <a:rPr lang="ko-KR" altLang="en-US" sz="1600" spc="-50" dirty="0" err="1"/>
+              <a:t>라운트리</a:t>
+            </a:r>
+            <a:r>
+              <a:rPr lang="ko-KR" altLang="en-US" sz="1600" spc="-50" dirty="0"/>
+              <a:t> </a:t>
+            </a:r>
+            <a:r>
+              <a:rPr lang="en-US" altLang="ko-KR" sz="1600" spc="-50" dirty="0"/>
+              <a:t>(S. Rowntree) </a:t>
+            </a:r>
+            <a:r>
+              <a:rPr lang="ko-KR" altLang="en-US" sz="1600" spc="-50" dirty="0"/>
+              <a:t>학자는 </a:t>
+            </a:r>
+            <a:r>
+              <a:rPr lang="en-US" altLang="ko-KR" sz="1600" spc="-50" dirty="0"/>
+              <a:t>1899</a:t>
+            </a:r>
+            <a:r>
+              <a:rPr lang="ko-KR" altLang="en-US" sz="1600" spc="-50" dirty="0"/>
+              <a:t>년 요크</a:t>
+            </a:r>
+            <a:r>
+              <a:rPr lang="en-US" altLang="ko-KR" sz="1600" spc="-50" dirty="0"/>
+              <a:t>(York) </a:t>
+            </a:r>
+            <a:r>
+              <a:rPr lang="ko-KR" altLang="en-US" sz="1600" spc="-50" dirty="0"/>
+              <a:t>지역 주민 대상으로 최소한의 생활에 필요한 소득을 조사하였다</a:t>
+            </a:r>
+            <a:r>
+              <a:rPr lang="en-US" altLang="ko-KR" sz="1600" spc="-50" dirty="0"/>
+              <a:t>.</a:t>
+            </a:r>
+          </a:p>
+          <a:p>
+            <a:pPr marL="835025" lvl="1" indent="-285750">
+              <a:lnSpc>
+                <a:spcPct val="150000"/>
+              </a:lnSpc>
+              <a:buFont typeface="Wingdings" panose="05000000000000000000" pitchFamily="2" charset="2"/>
+              <a:buChar char="ü"/>
+            </a:pPr>
+            <a:r>
+              <a:rPr lang="ko-KR" altLang="en-US" sz="1600" spc="-50" dirty="0"/>
+              <a:t>주택임대료 </a:t>
+            </a:r>
+            <a:r>
+              <a:rPr lang="en-US" altLang="ko-KR" sz="1600" spc="-50" dirty="0"/>
+              <a:t>(17</a:t>
+            </a:r>
+            <a:r>
+              <a:rPr lang="ko-KR" altLang="en-US" sz="1600" spc="-50" dirty="0"/>
+              <a:t>실링 </a:t>
+            </a:r>
+            <a:r>
+              <a:rPr lang="en-US" altLang="ko-KR" sz="1600" spc="-50" dirty="0"/>
+              <a:t>8</a:t>
+            </a:r>
+            <a:r>
+              <a:rPr lang="ko-KR" altLang="en-US" sz="1600" spc="-50" dirty="0"/>
+              <a:t>펜스</a:t>
+            </a:r>
+            <a:r>
+              <a:rPr lang="en-US" altLang="ko-KR" sz="1600" spc="-50" dirty="0"/>
+              <a:t>), </a:t>
+            </a:r>
+            <a:r>
+              <a:rPr lang="ko-KR" altLang="en-US" sz="1600" spc="-50" dirty="0"/>
+              <a:t>음식 </a:t>
+            </a:r>
+            <a:r>
+              <a:rPr lang="en-US" altLang="ko-KR" sz="1600" spc="-50" dirty="0"/>
+              <a:t>(12</a:t>
+            </a:r>
+            <a:r>
+              <a:rPr lang="ko-KR" altLang="en-US" sz="1600" spc="-50" dirty="0"/>
+              <a:t>실링 </a:t>
+            </a:r>
+            <a:r>
+              <a:rPr lang="en-US" altLang="ko-KR" sz="1600" spc="-50" dirty="0"/>
+              <a:t>9</a:t>
+            </a:r>
+            <a:r>
+              <a:rPr lang="ko-KR" altLang="en-US" sz="1600" spc="-50" dirty="0"/>
+              <a:t>펜스</a:t>
+            </a:r>
+            <a:r>
+              <a:rPr lang="en-US" altLang="ko-KR" sz="1600" spc="-50" dirty="0"/>
+              <a:t>), </a:t>
+            </a:r>
+            <a:r>
+              <a:rPr lang="ko-KR" altLang="en-US" sz="1600" spc="-50" dirty="0"/>
+              <a:t>옷 </a:t>
+            </a:r>
+            <a:r>
+              <a:rPr lang="en-US" altLang="ko-KR" sz="1600" spc="-50" dirty="0"/>
+              <a:t>(2</a:t>
+            </a:r>
+            <a:r>
+              <a:rPr lang="ko-KR" altLang="en-US" sz="1600" spc="-50" dirty="0"/>
+              <a:t>실링 </a:t>
+            </a:r>
+            <a:r>
+              <a:rPr lang="en-US" altLang="ko-KR" sz="1600" spc="-50" dirty="0"/>
+              <a:t>3</a:t>
+            </a:r>
+            <a:r>
+              <a:rPr lang="ko-KR" altLang="en-US" sz="1600" spc="-50" dirty="0"/>
+              <a:t>펜스</a:t>
+            </a:r>
+            <a:r>
+              <a:rPr lang="en-US" altLang="ko-KR" sz="1600" spc="-50" dirty="0"/>
+              <a:t>), </a:t>
+            </a:r>
+            <a:r>
+              <a:rPr lang="ko-KR" altLang="en-US" sz="1600" spc="-50" dirty="0"/>
+              <a:t>연료비 </a:t>
+            </a:r>
+            <a:r>
+              <a:rPr lang="en-US" altLang="ko-KR" sz="1600" spc="-50" dirty="0"/>
+              <a:t>(1</a:t>
+            </a:r>
+            <a:r>
+              <a:rPr lang="ko-KR" altLang="en-US" sz="1600" spc="-50" dirty="0"/>
+              <a:t>실링 </a:t>
+            </a:r>
+            <a:r>
+              <a:rPr lang="en-US" altLang="ko-KR" sz="1600" spc="-50" dirty="0"/>
+              <a:t>10</a:t>
+            </a:r>
+            <a:r>
+              <a:rPr lang="ko-KR" altLang="en-US" sz="1600" spc="-50" dirty="0"/>
+              <a:t>펜스</a:t>
+            </a:r>
+            <a:r>
+              <a:rPr lang="en-US" altLang="ko-KR" sz="1600" spc="-50" dirty="0"/>
+              <a:t>), </a:t>
+            </a:r>
+            <a:r>
+              <a:rPr lang="ko-KR" altLang="en-US" sz="1600" spc="-50" dirty="0"/>
+              <a:t>기타 </a:t>
+            </a:r>
+            <a:r>
+              <a:rPr lang="en-US" altLang="ko-KR" sz="1600" spc="-50" dirty="0"/>
+              <a:t>(10</a:t>
+            </a:r>
+            <a:r>
+              <a:rPr lang="ko-KR" altLang="en-US" sz="1600" spc="-50" dirty="0"/>
+              <a:t>펜스</a:t>
+            </a:r>
+            <a:r>
+              <a:rPr lang="en-US" altLang="ko-KR" sz="1600" spc="-50" dirty="0"/>
+              <a:t>)</a:t>
+            </a:r>
+            <a:r>
+              <a:rPr lang="ko-KR" altLang="en-US" sz="1600" spc="-50" dirty="0"/>
+              <a:t> 항목으로 조사하였다</a:t>
+            </a:r>
+            <a:r>
+              <a:rPr lang="en-US" altLang="ko-KR" sz="1600" spc="-50" dirty="0"/>
+              <a:t>.</a:t>
+            </a:r>
+          </a:p>
+          <a:p>
+            <a:pPr marL="835025" lvl="1" indent="-285750">
+              <a:lnSpc>
+                <a:spcPct val="150000"/>
+              </a:lnSpc>
+              <a:buFont typeface="Wingdings" panose="05000000000000000000" pitchFamily="2" charset="2"/>
+              <a:buChar char="ü"/>
+            </a:pPr>
+            <a:r>
+              <a:rPr lang="ko-KR" altLang="en-US" sz="1600" spc="-50" dirty="0"/>
+              <a:t>이러한 방식을 우리는 </a:t>
+            </a:r>
+            <a:r>
+              <a:rPr lang="ko-KR" altLang="en-US" sz="1600" b="1" spc="-50" dirty="0" err="1"/>
+              <a:t>라운트리</a:t>
+            </a:r>
+            <a:r>
+              <a:rPr lang="ko-KR" altLang="en-US" sz="1600" b="1" spc="-50" dirty="0"/>
+              <a:t> 방식</a:t>
+            </a:r>
+            <a:r>
+              <a:rPr lang="ko-KR" altLang="en-US" sz="1600" spc="-50" dirty="0"/>
+              <a:t>이라고 부르며</a:t>
+            </a:r>
+            <a:r>
+              <a:rPr lang="en-US" altLang="ko-KR" sz="1600" spc="-50" dirty="0"/>
+              <a:t>, </a:t>
+            </a:r>
+            <a:r>
+              <a:rPr lang="ko-KR" altLang="en-US" sz="1600" spc="-50" dirty="0" err="1"/>
+              <a:t>라운트리</a:t>
+            </a:r>
+            <a:r>
+              <a:rPr lang="ko-KR" altLang="en-US" sz="1600" spc="-50" dirty="0"/>
+              <a:t> 이후로</a:t>
+            </a:r>
+            <a:r>
+              <a:rPr lang="en-US" altLang="ko-KR" sz="1600" spc="-50" dirty="0"/>
+              <a:t>, </a:t>
+            </a:r>
+            <a:r>
+              <a:rPr lang="ko-KR" altLang="en-US" sz="1600" spc="-50" dirty="0"/>
+              <a:t>최소한의 의식주라는 관점에서 빈곤선을 산출해왔다</a:t>
+            </a:r>
+            <a:r>
+              <a:rPr lang="en-US" altLang="ko-KR" sz="1600" spc="-50" dirty="0"/>
+              <a:t>.</a:t>
+            </a:r>
+          </a:p>
+          <a:p>
+            <a:pPr marL="835025" lvl="1" indent="-285750">
+              <a:lnSpc>
+                <a:spcPct val="150000"/>
+              </a:lnSpc>
+              <a:buFont typeface="Wingdings" panose="05000000000000000000" pitchFamily="2" charset="2"/>
+              <a:buChar char="ü"/>
+            </a:pPr>
+            <a:r>
+              <a:rPr lang="ko-KR" altLang="en-US" sz="1600" spc="-50" dirty="0"/>
+              <a:t>절대적이고</a:t>
+            </a:r>
+            <a:r>
+              <a:rPr lang="en-US" altLang="ko-KR" sz="1600" spc="-50" dirty="0"/>
+              <a:t>, </a:t>
+            </a:r>
+            <a:r>
+              <a:rPr lang="ko-KR" altLang="en-US" sz="1600" spc="-50" dirty="0"/>
+              <a:t>객관적인 기준에 의해 빈곤을 보고 있다</a:t>
+            </a:r>
+            <a:r>
+              <a:rPr lang="en-US" altLang="ko-KR" sz="1600" spc="-50" dirty="0"/>
+              <a:t>.</a:t>
+            </a:r>
+          </a:p>
+          <a:p>
+            <a:pPr marL="377825" indent="-285750">
+              <a:lnSpc>
+                <a:spcPct val="150000"/>
+              </a:lnSpc>
+              <a:buFont typeface="Arial" panose="020B0604020202020204" pitchFamily="34" charset="0"/>
+              <a:buChar char="•"/>
+            </a:pPr>
+            <a:r>
+              <a:rPr lang="ko-KR" altLang="en-US" sz="1600" spc="-50" dirty="0"/>
+              <a:t>이 방법이 갖는 문제점은 기본적 필요라는 것이 구체적으로 무엇을 의미하는지 분명하지 않다는 데 있다</a:t>
+            </a:r>
+            <a:r>
+              <a:rPr lang="en-US" altLang="ko-KR" sz="1600" spc="-50" dirty="0"/>
+              <a:t>.</a:t>
+            </a:r>
+          </a:p>
+          <a:p>
+            <a:pPr marL="835025" lvl="1" indent="-285750">
+              <a:lnSpc>
+                <a:spcPct val="150000"/>
+              </a:lnSpc>
+              <a:buFont typeface="Wingdings" panose="05000000000000000000" pitchFamily="2" charset="2"/>
+              <a:buChar char="ü"/>
+            </a:pPr>
+            <a:r>
+              <a:rPr lang="ko-KR" altLang="en-US" sz="1600" spc="-50" dirty="0"/>
+              <a:t>인간이 생물적으로 살아남는 데 필요한 자원은 물론이며</a:t>
+            </a:r>
+            <a:r>
+              <a:rPr lang="en-US" altLang="ko-KR" sz="1600" spc="-50" dirty="0"/>
+              <a:t>, </a:t>
+            </a:r>
+            <a:r>
+              <a:rPr lang="ko-KR" altLang="en-US" sz="1600" spc="-50" dirty="0"/>
+              <a:t>사회적 생존을 위해 필요한 자원도 포함되어야 한다</a:t>
+            </a:r>
+            <a:r>
+              <a:rPr lang="en-US" altLang="ko-KR" sz="1600" spc="-50" dirty="0"/>
+              <a:t>.</a:t>
+            </a:r>
+          </a:p>
+          <a:p>
+            <a:pPr marL="1292225" lvl="2" indent="-285750">
+              <a:lnSpc>
+                <a:spcPct val="150000"/>
+              </a:lnSpc>
+              <a:buFont typeface="Wingdings" panose="05000000000000000000" pitchFamily="2" charset="2"/>
+              <a:buChar char="Ø"/>
+            </a:pPr>
+            <a:r>
+              <a:rPr lang="ko-KR" altLang="en-US" sz="1600" spc="-50" dirty="0"/>
+              <a:t>간신히 굶지 않고</a:t>
+            </a:r>
+            <a:r>
+              <a:rPr lang="en-US" altLang="ko-KR" sz="1600" spc="-50" dirty="0"/>
+              <a:t>, </a:t>
+            </a:r>
+            <a:r>
+              <a:rPr lang="ko-KR" altLang="en-US" sz="1600" spc="-50" dirty="0"/>
+              <a:t>얼어 죽지 않을 만큼만 살아가고 있는 사람은 거의 죽은 사람이나 다름이 없다고 봐야 한다</a:t>
+            </a:r>
+            <a:r>
+              <a:rPr lang="en-US" altLang="ko-KR" sz="1600" spc="-50" dirty="0"/>
+              <a:t>.</a:t>
+            </a:r>
+          </a:p>
+          <a:p>
+            <a:pPr marL="835025" lvl="1" indent="-285750">
+              <a:lnSpc>
+                <a:spcPct val="150000"/>
+              </a:lnSpc>
+              <a:buFont typeface="Wingdings" panose="05000000000000000000" pitchFamily="2" charset="2"/>
+              <a:buChar char="ü"/>
+            </a:pPr>
+            <a:r>
+              <a:rPr lang="ko-KR" altLang="en-US" sz="1600" spc="-50" dirty="0"/>
+              <a:t>사회적 생존을 위해 필요한 자원을 구체적으로 알아내는 것은 주관적이며</a:t>
+            </a:r>
+            <a:r>
+              <a:rPr lang="en-US" altLang="ko-KR" sz="1600" spc="-50" dirty="0"/>
+              <a:t>,</a:t>
+            </a:r>
+            <a:r>
+              <a:rPr lang="ko-KR" altLang="en-US" sz="1600" spc="-50" dirty="0"/>
+              <a:t> 대단히 힘들다</a:t>
+            </a:r>
+            <a:r>
+              <a:rPr lang="en-US" altLang="ko-KR" sz="1600" spc="-50" dirty="0"/>
+              <a:t>.</a:t>
+            </a:r>
+          </a:p>
+          <a:p>
+            <a:pPr marL="377825" indent="-285750">
+              <a:lnSpc>
+                <a:spcPct val="150000"/>
+              </a:lnSpc>
+              <a:buFont typeface="Arial" panose="020B0604020202020204" pitchFamily="34" charset="0"/>
+              <a:buChar char="•"/>
+            </a:pPr>
+            <a:r>
+              <a:rPr lang="ko-KR" altLang="en-US" sz="1600" spc="-50" dirty="0"/>
+              <a:t>미국의 사회보장청은 다음과 같은 방법으로 이 문제를 피해 가고 있다</a:t>
+            </a:r>
+            <a:r>
+              <a:rPr lang="en-US" altLang="ko-KR" sz="1600" spc="-50" dirty="0"/>
+              <a:t>.</a:t>
+            </a:r>
+          </a:p>
+          <a:p>
+            <a:pPr marL="835025" lvl="1" indent="-285750">
+              <a:lnSpc>
+                <a:spcPct val="150000"/>
+              </a:lnSpc>
+              <a:buFont typeface="Wingdings" panose="05000000000000000000" pitchFamily="2" charset="2"/>
+              <a:buChar char="ü"/>
+            </a:pPr>
+            <a:r>
+              <a:rPr lang="ko-KR" altLang="en-US" sz="1600" spc="-50" dirty="0"/>
+              <a:t>우선</a:t>
+            </a:r>
+            <a:r>
+              <a:rPr lang="en-US" altLang="ko-KR" sz="1600" spc="-50" dirty="0"/>
+              <a:t>, </a:t>
+            </a:r>
+            <a:r>
+              <a:rPr lang="ko-KR" altLang="en-US" sz="1600" spc="-50" dirty="0"/>
+              <a:t>미국의 일반적인 저소득층이 전 지출의 </a:t>
+            </a:r>
+            <a:r>
+              <a:rPr lang="en-US" altLang="ko-KR" sz="1600" spc="-50" dirty="0"/>
+              <a:t>1/3</a:t>
+            </a:r>
+            <a:r>
+              <a:rPr lang="ko-KR" altLang="en-US" sz="1600" spc="-50" dirty="0"/>
+              <a:t>을 식품 구입에 사용하고 있다는 것이 통계적으로 밝혀져 있다</a:t>
+            </a:r>
+            <a:r>
+              <a:rPr lang="en-US" altLang="ko-KR" sz="1600" spc="-50" dirty="0"/>
+              <a:t>.</a:t>
+            </a:r>
+          </a:p>
+          <a:p>
+            <a:pPr marL="835025" lvl="1" indent="-285750">
+              <a:lnSpc>
+                <a:spcPct val="150000"/>
+              </a:lnSpc>
+              <a:buFont typeface="Wingdings" panose="05000000000000000000" pitchFamily="2" charset="2"/>
+              <a:buChar char="ü"/>
+            </a:pPr>
+            <a:r>
+              <a:rPr lang="ko-KR" altLang="en-US" sz="1600" spc="-50" dirty="0"/>
+              <a:t>이 사실을 통해 식품과 관련된 최저생계비를 산출한 후에 </a:t>
+            </a:r>
+            <a:r>
+              <a:rPr lang="en-US" altLang="ko-KR" sz="1600" spc="-50" dirty="0"/>
+              <a:t>3</a:t>
+            </a:r>
+            <a:r>
+              <a:rPr lang="ko-KR" altLang="en-US" sz="1600" spc="-50" dirty="0"/>
+              <a:t>을 곱한 금액을 전체 최저생계비로 잡고 있다</a:t>
+            </a:r>
+            <a:r>
+              <a:rPr lang="en-US" altLang="ko-KR" sz="1600" spc="-50" dirty="0"/>
+              <a:t>.</a:t>
+            </a:r>
+          </a:p>
+          <a:p>
+            <a:pPr marL="835025" lvl="1" indent="-285750">
+              <a:lnSpc>
+                <a:spcPct val="150000"/>
+              </a:lnSpc>
+              <a:buFont typeface="Wingdings" panose="05000000000000000000" pitchFamily="2" charset="2"/>
+              <a:buChar char="ü"/>
+            </a:pPr>
+            <a:r>
+              <a:rPr lang="ko-KR" altLang="en-US" sz="1600" spc="-50" dirty="0"/>
+              <a:t>사회적 생존에 필요한 지출을 직접 계산하는 것이 아니고</a:t>
+            </a:r>
+            <a:r>
+              <a:rPr lang="en-US" altLang="ko-KR" sz="1600" spc="-50" dirty="0"/>
+              <a:t>, </a:t>
+            </a:r>
+            <a:r>
+              <a:rPr lang="ko-KR" altLang="en-US" sz="1600" spc="-50" dirty="0"/>
+              <a:t>저소득층의 지출양식을 통해 간접적으로 유추하는 것이다</a:t>
+            </a:r>
+            <a:r>
+              <a:rPr lang="en-US" altLang="ko-KR" sz="1600" spc="-50" dirty="0"/>
+              <a:t>.</a:t>
+            </a:r>
+          </a:p>
+        </p:txBody>
+      </p:sp>
+    </p:spTree>
+    <p:extLst>
+      <p:ext uri="{BB962C8B-B14F-4D97-AF65-F5344CB8AC3E}">
+        <p14:creationId xmlns:p14="http://schemas.microsoft.com/office/powerpoint/2010/main" val="3924228272"/>
+      </p:ext>
+    </p:extLst>
+  </p:cSld>
+  <p:clrMapOvr>
+    <a:masterClrMapping/>
+  </p:clrMapOvr>
+</p:sld>
+</file>
+
+<file path=ppt/slides/slide26.xml><?xml version="1.0" encoding="utf-8"?>
+<p:sld xmlns:a="http://schemas.openxmlformats.org/drawingml/2006/main" xmlns:r="http://schemas.openxmlformats.org/officeDocument/2006/relationships" xmlns:p="http://schemas.openxmlformats.org/presentationml/2006/main">
+  <p:cSld>
+    <p:spTree>
+      <p:nvGrpSpPr>
+        <p:cNvPr id="1" name="">
+          <a:extLst>
+            <a:ext uri="{FF2B5EF4-FFF2-40B4-BE49-F238E27FC236}">
+              <a16:creationId xmlns:a16="http://schemas.microsoft.com/office/drawing/2014/main" id="{3BBB8E02-1711-0AC3-75F4-330243F90E07}"/>
+            </a:ext>
+          </a:extLst>
+        </p:cNvPr>
+        <p:cNvGrpSpPr/>
+        <p:nvPr/>
+      </p:nvGrpSpPr>
+      <p:grpSpPr>
+        <a:xfrm>
+          <a:off x="0" y="0"/>
+          <a:ext cx="0" cy="0"/>
+          <a:chOff x="0" y="0"/>
+          <a:chExt cx="0" cy="0"/>
+        </a:xfrm>
+      </p:grpSpPr>
+      <p:sp>
+        <p:nvSpPr>
+          <p:cNvPr id="2" name="제목 1">
+            <a:extLst>
+              <a:ext uri="{FF2B5EF4-FFF2-40B4-BE49-F238E27FC236}">
+                <a16:creationId xmlns:a16="http://schemas.microsoft.com/office/drawing/2014/main" id="{F0C9BA87-D0E3-CF8A-2A20-700F540D00AA}"/>
+              </a:ext>
+            </a:extLst>
+          </p:cNvPr>
+          <p:cNvSpPr>
+            <a:spLocks noGrp="1"/>
+          </p:cNvSpPr>
+          <p:nvPr>
+            <p:ph type="title"/>
+          </p:nvPr>
+        </p:nvSpPr>
+        <p:spPr/>
+        <p:txBody>
+          <a:bodyPr/>
+          <a:lstStyle/>
+          <a:p>
+            <a:r>
+              <a:rPr lang="ko-KR" altLang="en-US" dirty="0"/>
+              <a:t>상대적이며 객관적인 기준에 의한 빈곤선</a:t>
+            </a:r>
+          </a:p>
+        </p:txBody>
+      </p:sp>
+      <p:sp>
+        <p:nvSpPr>
+          <p:cNvPr id="4" name="슬라이드 번호 개체 틀 3">
+            <a:extLst>
+              <a:ext uri="{FF2B5EF4-FFF2-40B4-BE49-F238E27FC236}">
+                <a16:creationId xmlns:a16="http://schemas.microsoft.com/office/drawing/2014/main" id="{09C30D31-1353-1854-0BF0-A5E47DB202FC}"/>
+              </a:ext>
+            </a:extLst>
+          </p:cNvPr>
+          <p:cNvSpPr>
+            <a:spLocks noGrp="1"/>
+          </p:cNvSpPr>
+          <p:nvPr>
+            <p:ph type="sldNum" sz="quarter" idx="12"/>
+          </p:nvPr>
+        </p:nvSpPr>
+        <p:spPr/>
+        <p:txBody>
+          <a:bodyPr/>
+          <a:lstStyle/>
+          <a:p>
+            <a:fld id="{109C872D-39A9-4065-8BF3-6A613116E2A1}" type="slidenum">
+              <a:rPr lang="ko-KR" altLang="en-US" smtClean="0"/>
+              <a:t>26</a:t>
+            </a:fld>
+            <a:endParaRPr lang="ko-KR" altLang="en-US"/>
+          </a:p>
+        </p:txBody>
+      </p:sp>
+      <p:sp>
+        <p:nvSpPr>
+          <p:cNvPr id="3" name="TextBox 2">
+            <a:extLst>
+              <a:ext uri="{FF2B5EF4-FFF2-40B4-BE49-F238E27FC236}">
+                <a16:creationId xmlns:a16="http://schemas.microsoft.com/office/drawing/2014/main" id="{473956C0-19BF-CFE5-8313-C8CF28C3DF51}"/>
+              </a:ext>
+            </a:extLst>
+          </p:cNvPr>
+          <p:cNvSpPr txBox="1"/>
+          <p:nvPr/>
+        </p:nvSpPr>
+        <p:spPr>
+          <a:xfrm>
+            <a:off x="288790" y="958844"/>
+            <a:ext cx="11250267" cy="2260683"/>
+          </a:xfrm>
+          <a:prstGeom prst="rect">
+            <a:avLst/>
+          </a:prstGeom>
+          <a:noFill/>
+        </p:spPr>
+        <p:txBody>
+          <a:bodyPr wrap="square" rtlCol="0" anchor="t">
+            <a:spAutoFit/>
+          </a:bodyPr>
+          <a:lstStyle/>
+          <a:p>
+            <a:pPr marL="377825" indent="-285750">
+              <a:lnSpc>
+                <a:spcPct val="150000"/>
+              </a:lnSpc>
+              <a:buFont typeface="Arial" panose="020B0604020202020204" pitchFamily="34" charset="0"/>
+              <a:buChar char="•"/>
+            </a:pPr>
+            <a:r>
+              <a:rPr lang="ko-KR" altLang="en-US" sz="1600" spc="-50" dirty="0"/>
+              <a:t>빈곤을 절대적인 것이 아니라 상대적인 것으로 파악해야 한다는 입장에서 보면</a:t>
+            </a:r>
+            <a:r>
+              <a:rPr lang="en-US" altLang="ko-KR" sz="1600" spc="-50" dirty="0"/>
+              <a:t>, </a:t>
+            </a:r>
+            <a:r>
+              <a:rPr lang="ko-KR" altLang="en-US" sz="1600" spc="-50" dirty="0"/>
+              <a:t>그 사회의 평균적인 생활수준과 관련해 빈곤을 정의할 수 있다</a:t>
+            </a:r>
+            <a:r>
+              <a:rPr lang="en-US" altLang="ko-KR" sz="1600" spc="-50" dirty="0"/>
+              <a:t>. </a:t>
+            </a:r>
+            <a:r>
+              <a:rPr lang="ko-KR" altLang="en-US" sz="1600" spc="-50" dirty="0"/>
+              <a:t>여러 방법이 있겠지만 아래와 같은 방법이 대표적으로 쓰이고 있다</a:t>
+            </a:r>
+            <a:r>
+              <a:rPr lang="en-US" altLang="ko-KR" sz="1600" spc="-50" dirty="0"/>
+              <a:t>.</a:t>
+            </a:r>
+          </a:p>
+          <a:p>
+            <a:pPr marL="835025" lvl="1" indent="-285750">
+              <a:lnSpc>
+                <a:spcPct val="150000"/>
+              </a:lnSpc>
+              <a:buFont typeface="Wingdings" panose="05000000000000000000" pitchFamily="2" charset="2"/>
+              <a:buChar char="ü"/>
+            </a:pPr>
+            <a:r>
+              <a:rPr lang="ko-KR" altLang="en-US" sz="1600" spc="-50" dirty="0"/>
+              <a:t>평균소득 혹은 중위소득의 일정비율을 빈곤선으로 잡을 수 있다</a:t>
+            </a:r>
+            <a:r>
+              <a:rPr lang="en-US" altLang="ko-KR" sz="1600" spc="-50" dirty="0"/>
+              <a:t>.</a:t>
+            </a:r>
+          </a:p>
+          <a:p>
+            <a:pPr marL="1292225" lvl="2" indent="-285750">
+              <a:lnSpc>
+                <a:spcPct val="150000"/>
+              </a:lnSpc>
+              <a:buFont typeface="Wingdings" panose="05000000000000000000" pitchFamily="2" charset="2"/>
+              <a:buChar char="Ø"/>
+            </a:pPr>
+            <a:r>
+              <a:rPr lang="ko-KR" altLang="en-US" sz="1600" spc="-50" dirty="0"/>
+              <a:t>예를 들면 그 사회의 중위소득이 얼마인지 알아내고 그것의 </a:t>
+            </a:r>
+            <a:r>
+              <a:rPr lang="en-US" altLang="ko-KR" sz="1600" spc="-50" dirty="0"/>
+              <a:t>50% </a:t>
+            </a:r>
+            <a:r>
+              <a:rPr lang="ko-KR" altLang="en-US" sz="1600" spc="-50" dirty="0"/>
+              <a:t>혹은 </a:t>
+            </a:r>
+            <a:r>
+              <a:rPr lang="en-US" altLang="ko-KR" sz="1600" spc="-50" dirty="0"/>
+              <a:t>30% </a:t>
+            </a:r>
+            <a:r>
+              <a:rPr lang="ko-KR" altLang="en-US" sz="1600" spc="-50" dirty="0"/>
+              <a:t>수준을 빈곤선으로 설정할 수 있다</a:t>
+            </a:r>
+            <a:r>
+              <a:rPr lang="en-US" altLang="ko-KR" sz="1600" spc="-50" dirty="0"/>
+              <a:t>.</a:t>
+            </a:r>
+          </a:p>
+          <a:p>
+            <a:pPr marL="835025" lvl="1" indent="-285750">
+              <a:lnSpc>
+                <a:spcPct val="150000"/>
+              </a:lnSpc>
+              <a:buFont typeface="Wingdings" panose="05000000000000000000" pitchFamily="2" charset="2"/>
+              <a:buChar char="ü"/>
+            </a:pPr>
+            <a:r>
+              <a:rPr lang="ko-KR" altLang="en-US" sz="1600" spc="-50" dirty="0"/>
+              <a:t>사회 구성원을 소득순으로 나열한 뒤에</a:t>
+            </a:r>
+            <a:r>
+              <a:rPr lang="en-US" altLang="ko-KR" sz="1600" spc="-50" dirty="0"/>
+              <a:t>, </a:t>
+            </a:r>
+            <a:r>
+              <a:rPr lang="ko-KR" altLang="en-US" sz="1600" spc="-50" dirty="0"/>
+              <a:t>소득 수준이 낮은 몇</a:t>
+            </a:r>
+            <a:r>
+              <a:rPr lang="en-US" altLang="ko-KR" sz="1600" spc="-50" dirty="0"/>
+              <a:t>%</a:t>
+            </a:r>
+            <a:r>
+              <a:rPr lang="ko-KR" altLang="en-US" sz="1600" spc="-50" dirty="0"/>
+              <a:t>의 사람을 빈곤층으로 간주하는 것이다</a:t>
+            </a:r>
+            <a:r>
+              <a:rPr lang="en-US" altLang="ko-KR" sz="1600" spc="-50" dirty="0"/>
+              <a:t>.</a:t>
+            </a:r>
+          </a:p>
+          <a:p>
+            <a:pPr marL="1292225" lvl="2" indent="-285750">
+              <a:lnSpc>
+                <a:spcPct val="150000"/>
+              </a:lnSpc>
+              <a:buFont typeface="Wingdings" panose="05000000000000000000" pitchFamily="2" charset="2"/>
+              <a:buChar char="Ø"/>
+            </a:pPr>
+            <a:r>
+              <a:rPr lang="ko-KR" altLang="en-US" sz="1600" spc="-50" dirty="0"/>
+              <a:t>예를 들면 소득이 낮은 </a:t>
+            </a:r>
+            <a:r>
+              <a:rPr lang="en-US" altLang="ko-KR" sz="1600" spc="-50" dirty="0"/>
+              <a:t>20%</a:t>
+            </a:r>
+            <a:r>
+              <a:rPr lang="ko-KR" altLang="en-US" sz="1600" spc="-50" dirty="0"/>
+              <a:t>의 사람들을 빈곤층이라고 간주하는 것이다</a:t>
+            </a:r>
+            <a:r>
+              <a:rPr lang="en-US" altLang="ko-KR" sz="1600" spc="-50" dirty="0"/>
+              <a:t>.</a:t>
+            </a:r>
+          </a:p>
+        </p:txBody>
+      </p:sp>
+    </p:spTree>
+    <p:extLst>
+      <p:ext uri="{BB962C8B-B14F-4D97-AF65-F5344CB8AC3E}">
+        <p14:creationId xmlns:p14="http://schemas.microsoft.com/office/powerpoint/2010/main" val="4016974101"/>
+      </p:ext>
+    </p:extLst>
+  </p:cSld>
+  <p:clrMapOvr>
+    <a:masterClrMapping/>
+  </p:clrMapOvr>
+</p:sld>
+</file>
+
+<file path=ppt/slides/slide27.xml><?xml version="1.0" encoding="utf-8"?>
+<p:sld xmlns:a="http://schemas.openxmlformats.org/drawingml/2006/main" xmlns:r="http://schemas.openxmlformats.org/officeDocument/2006/relationships" xmlns:p="http://schemas.openxmlformats.org/presentationml/2006/main">
+  <p:cSld>
+    <p:spTree>
+      <p:nvGrpSpPr>
+        <p:cNvPr id="1" name="">
+          <a:extLst>
+            <a:ext uri="{FF2B5EF4-FFF2-40B4-BE49-F238E27FC236}">
+              <a16:creationId xmlns:a16="http://schemas.microsoft.com/office/drawing/2014/main" id="{90BDE100-0D22-B429-B4E0-B7EE94193F04}"/>
+            </a:ext>
+          </a:extLst>
+        </p:cNvPr>
+        <p:cNvGrpSpPr/>
+        <p:nvPr/>
+      </p:nvGrpSpPr>
+      <p:grpSpPr>
+        <a:xfrm>
+          <a:off x="0" y="0"/>
+          <a:ext cx="0" cy="0"/>
+          <a:chOff x="0" y="0"/>
+          <a:chExt cx="0" cy="0"/>
+        </a:xfrm>
+      </p:grpSpPr>
+      <p:sp>
+        <p:nvSpPr>
+          <p:cNvPr id="2" name="제목 1">
+            <a:extLst>
+              <a:ext uri="{FF2B5EF4-FFF2-40B4-BE49-F238E27FC236}">
+                <a16:creationId xmlns:a16="http://schemas.microsoft.com/office/drawing/2014/main" id="{E05DDA49-AA79-1335-F2DD-E23AE20138C9}"/>
+              </a:ext>
+            </a:extLst>
+          </p:cNvPr>
+          <p:cNvSpPr>
+            <a:spLocks noGrp="1"/>
+          </p:cNvSpPr>
+          <p:nvPr>
+            <p:ph type="title"/>
+          </p:nvPr>
+        </p:nvSpPr>
+        <p:spPr/>
+        <p:txBody>
+          <a:bodyPr/>
+          <a:lstStyle/>
+          <a:p>
+            <a:r>
+              <a:rPr lang="ko-KR" altLang="en-US" dirty="0"/>
+              <a:t>주관적인 기준에 의한 빈곤선</a:t>
+            </a:r>
+          </a:p>
+        </p:txBody>
+      </p:sp>
+      <p:sp>
+        <p:nvSpPr>
+          <p:cNvPr id="4" name="슬라이드 번호 개체 틀 3">
+            <a:extLst>
+              <a:ext uri="{FF2B5EF4-FFF2-40B4-BE49-F238E27FC236}">
+                <a16:creationId xmlns:a16="http://schemas.microsoft.com/office/drawing/2014/main" id="{905A065E-F873-545C-EA2E-B640741656D8}"/>
+              </a:ext>
+            </a:extLst>
+          </p:cNvPr>
+          <p:cNvSpPr>
+            <a:spLocks noGrp="1"/>
+          </p:cNvSpPr>
+          <p:nvPr>
+            <p:ph type="sldNum" sz="quarter" idx="12"/>
+          </p:nvPr>
+        </p:nvSpPr>
+        <p:spPr/>
+        <p:txBody>
+          <a:bodyPr/>
+          <a:lstStyle/>
+          <a:p>
+            <a:fld id="{109C872D-39A9-4065-8BF3-6A613116E2A1}" type="slidenum">
+              <a:rPr lang="ko-KR" altLang="en-US" smtClean="0"/>
+              <a:t>27</a:t>
+            </a:fld>
+            <a:endParaRPr lang="ko-KR" altLang="en-US"/>
+          </a:p>
+        </p:txBody>
+      </p:sp>
+      <p:sp>
+        <p:nvSpPr>
+          <p:cNvPr id="3" name="TextBox 2">
+            <a:extLst>
+              <a:ext uri="{FF2B5EF4-FFF2-40B4-BE49-F238E27FC236}">
+                <a16:creationId xmlns:a16="http://schemas.microsoft.com/office/drawing/2014/main" id="{972DA3D3-EA55-E462-DC4C-956DDF6605F6}"/>
+              </a:ext>
+            </a:extLst>
+          </p:cNvPr>
+          <p:cNvSpPr txBox="1"/>
+          <p:nvPr/>
+        </p:nvSpPr>
+        <p:spPr>
+          <a:xfrm>
+            <a:off x="288790" y="958844"/>
+            <a:ext cx="11250267" cy="2630015"/>
+          </a:xfrm>
+          <a:prstGeom prst="rect">
+            <a:avLst/>
+          </a:prstGeom>
+          <a:noFill/>
+        </p:spPr>
+        <p:txBody>
+          <a:bodyPr wrap="square" rtlCol="0" anchor="t">
+            <a:spAutoFit/>
+          </a:bodyPr>
+          <a:lstStyle/>
+          <a:p>
+            <a:pPr marL="377825" indent="-285750">
+              <a:lnSpc>
+                <a:spcPct val="150000"/>
+              </a:lnSpc>
+              <a:buFont typeface="Arial" panose="020B0604020202020204" pitchFamily="34" charset="0"/>
+              <a:buChar char="•"/>
+            </a:pPr>
+            <a:r>
+              <a:rPr lang="ko-KR" altLang="en-US" sz="1600" spc="-50" dirty="0"/>
+              <a:t>지금까지 알아본 객관적인 방법과 달리 주관적인 평가를 토대로 빈곤을 정의할 수도 있다</a:t>
+            </a:r>
+            <a:r>
+              <a:rPr lang="en-US" altLang="ko-KR" sz="1600" spc="-50" dirty="0"/>
+              <a:t>.</a:t>
+            </a:r>
+          </a:p>
+          <a:p>
+            <a:pPr marL="835025" lvl="1" indent="-285750">
+              <a:lnSpc>
+                <a:spcPct val="150000"/>
+              </a:lnSpc>
+              <a:buFont typeface="Wingdings" panose="05000000000000000000" pitchFamily="2" charset="2"/>
+              <a:buChar char="ü"/>
+            </a:pPr>
+            <a:r>
+              <a:rPr lang="ko-KR" altLang="en-US" sz="1600" spc="-50" dirty="0"/>
+              <a:t>가장 대표적인 방법이 설문조사의 결과에 입각하여 빈곤선을 알아내는 방법이다</a:t>
+            </a:r>
+            <a:r>
+              <a:rPr lang="en-US" altLang="ko-KR" sz="1600" spc="-50" dirty="0"/>
+              <a:t>.</a:t>
+            </a:r>
+          </a:p>
+          <a:p>
+            <a:pPr marL="1292225" lvl="2" indent="-285750">
+              <a:lnSpc>
+                <a:spcPct val="150000"/>
+              </a:lnSpc>
+              <a:buFont typeface="Wingdings" panose="05000000000000000000" pitchFamily="2" charset="2"/>
+              <a:buChar char="Ø"/>
+            </a:pPr>
+            <a:r>
+              <a:rPr lang="ko-KR" altLang="en-US" sz="1600" spc="-50" dirty="0"/>
+              <a:t>첫째 유형으로는 제</a:t>
+            </a:r>
+            <a:r>
+              <a:rPr lang="en-US" altLang="ko-KR" sz="1600" spc="-50" dirty="0"/>
+              <a:t>3</a:t>
+            </a:r>
+            <a:r>
+              <a:rPr lang="ko-KR" altLang="en-US" sz="1600" spc="-50" dirty="0"/>
+              <a:t>자적 소견을 묻는 경우로서</a:t>
+            </a:r>
+            <a:r>
+              <a:rPr lang="en-US" altLang="ko-KR" sz="1600" spc="-50" dirty="0"/>
+              <a:t>, “</a:t>
+            </a:r>
+            <a:r>
+              <a:rPr lang="ko-KR" altLang="en-US" sz="1600" spc="-50" dirty="0"/>
+              <a:t>당신이 사는 지역에서 </a:t>
+            </a:r>
+            <a:r>
+              <a:rPr lang="en-US" altLang="ko-KR" sz="1600" spc="-50" dirty="0"/>
+              <a:t>4</a:t>
+            </a:r>
+            <a:r>
+              <a:rPr lang="ko-KR" altLang="en-US" sz="1600" spc="-50" dirty="0"/>
+              <a:t>인 가족이 근근이 살아가기에 필요한 최소한의 소득은 얼마입니까</a:t>
+            </a:r>
+            <a:r>
+              <a:rPr lang="en-US" altLang="ko-KR" sz="1600" spc="-50" dirty="0"/>
+              <a:t>?” </a:t>
+            </a:r>
+            <a:r>
+              <a:rPr lang="ko-KR" altLang="en-US" sz="1600" spc="-50" dirty="0"/>
+              <a:t>라는 식으로 제</a:t>
+            </a:r>
+            <a:r>
+              <a:rPr lang="en-US" altLang="ko-KR" sz="1600" spc="-50" dirty="0"/>
+              <a:t>3</a:t>
+            </a:r>
+            <a:r>
+              <a:rPr lang="ko-KR" altLang="en-US" sz="1600" spc="-50" dirty="0"/>
+              <a:t>자적 소견을 묻는 경우다</a:t>
+            </a:r>
+            <a:r>
+              <a:rPr lang="en-US" altLang="ko-KR" sz="1600" spc="-50" dirty="0"/>
+              <a:t>.</a:t>
+            </a:r>
+          </a:p>
+          <a:p>
+            <a:pPr marL="1292225" lvl="2" indent="-285750">
+              <a:lnSpc>
+                <a:spcPct val="150000"/>
+              </a:lnSpc>
+              <a:buFont typeface="Wingdings" panose="05000000000000000000" pitchFamily="2" charset="2"/>
+              <a:buChar char="Ø"/>
+            </a:pPr>
+            <a:r>
+              <a:rPr lang="ko-KR" altLang="en-US" sz="1600" spc="-50" dirty="0"/>
+              <a:t>둘째 유형으로는 사람들에게 자신의 여건에 입각해</a:t>
+            </a:r>
+            <a:r>
+              <a:rPr lang="en-US" altLang="ko-KR" sz="1600" spc="-50" dirty="0"/>
+              <a:t>, </a:t>
+            </a:r>
+            <a:r>
+              <a:rPr lang="ko-KR" altLang="en-US" sz="1600" spc="-50" dirty="0"/>
+              <a:t>최소한으로 필요한 소득이 얼마인지 묻는 방식이다</a:t>
+            </a:r>
+            <a:r>
+              <a:rPr lang="en-US" altLang="ko-KR" sz="1600" spc="-50" dirty="0"/>
+              <a:t>. (</a:t>
+            </a:r>
+            <a:r>
+              <a:rPr lang="ko-KR" altLang="en-US" sz="1600" spc="-50" dirty="0" err="1"/>
+              <a:t>라이덴</a:t>
+            </a:r>
+            <a:r>
+              <a:rPr lang="ko-KR" altLang="en-US" sz="1600" spc="-50" dirty="0"/>
+              <a:t> 대학교에서 개발하여 </a:t>
+            </a:r>
+            <a:r>
+              <a:rPr lang="ko-KR" altLang="en-US" sz="1600" spc="-50" dirty="0" err="1"/>
+              <a:t>라이덴</a:t>
+            </a:r>
+            <a:r>
+              <a:rPr lang="ko-KR" altLang="en-US" sz="1600" spc="-50" dirty="0"/>
+              <a:t> 방식이라고 부르기도 한다</a:t>
+            </a:r>
+            <a:r>
+              <a:rPr lang="en-US" altLang="ko-KR" sz="1600" spc="-50" dirty="0"/>
+              <a:t>.</a:t>
+            </a:r>
+          </a:p>
+          <a:p>
+            <a:pPr marL="1292225" lvl="2" indent="-285750">
+              <a:lnSpc>
+                <a:spcPct val="150000"/>
+              </a:lnSpc>
+              <a:buFont typeface="Wingdings" panose="05000000000000000000" pitchFamily="2" charset="2"/>
+              <a:buChar char="Ø"/>
+            </a:pPr>
+            <a:endParaRPr lang="en-US" altLang="ko-KR" sz="1600" spc="-50" dirty="0"/>
+          </a:p>
+        </p:txBody>
+      </p:sp>
+    </p:spTree>
+    <p:extLst>
+      <p:ext uri="{BB962C8B-B14F-4D97-AF65-F5344CB8AC3E}">
+        <p14:creationId xmlns:p14="http://schemas.microsoft.com/office/powerpoint/2010/main" val="1563459701"/>
+      </p:ext>
+    </p:extLst>
+  </p:cSld>
+  <p:clrMapOvr>
+    <a:masterClrMapping/>
+  </p:clrMapOvr>
+</p:sld>
+</file>
+
+<file path=ppt/slides/slide28.xml><?xml version="1.0" encoding="utf-8"?>
+<p:sld xmlns:a="http://schemas.openxmlformats.org/drawingml/2006/main" xmlns:r="http://schemas.openxmlformats.org/officeDocument/2006/relationships" xmlns:p="http://schemas.openxmlformats.org/presentationml/2006/main">
+  <p:cSld>
+    <p:spTree>
+      <p:nvGrpSpPr>
+        <p:cNvPr id="1" name="">
+          <a:extLst>
+            <a:ext uri="{FF2B5EF4-FFF2-40B4-BE49-F238E27FC236}">
+              <a16:creationId xmlns:a16="http://schemas.microsoft.com/office/drawing/2014/main" id="{8CE0678B-2C54-F543-2A64-B6197C364E5C}"/>
+            </a:ext>
+          </a:extLst>
+        </p:cNvPr>
+        <p:cNvGrpSpPr/>
+        <p:nvPr/>
+      </p:nvGrpSpPr>
+      <p:grpSpPr>
+        <a:xfrm>
+          <a:off x="0" y="0"/>
+          <a:ext cx="0" cy="0"/>
+          <a:chOff x="0" y="0"/>
+          <a:chExt cx="0" cy="0"/>
+        </a:xfrm>
+      </p:grpSpPr>
+      <p:sp>
+        <p:nvSpPr>
+          <p:cNvPr id="2" name="제목 1">
+            <a:extLst>
+              <a:ext uri="{FF2B5EF4-FFF2-40B4-BE49-F238E27FC236}">
+                <a16:creationId xmlns:a16="http://schemas.microsoft.com/office/drawing/2014/main" id="{48CFB745-5DE7-23ED-764A-03F2033A302F}"/>
+              </a:ext>
+            </a:extLst>
+          </p:cNvPr>
+          <p:cNvSpPr>
+            <a:spLocks noGrp="1"/>
+          </p:cNvSpPr>
+          <p:nvPr>
+            <p:ph type="title"/>
+          </p:nvPr>
+        </p:nvSpPr>
+        <p:spPr/>
+        <p:txBody>
+          <a:bodyPr/>
+          <a:lstStyle/>
+          <a:p>
+            <a:r>
+              <a:rPr lang="ko-KR" altLang="en-US" dirty="0"/>
+              <a:t>정책적인 빈곤선</a:t>
+            </a:r>
+          </a:p>
+        </p:txBody>
+      </p:sp>
+      <p:sp>
+        <p:nvSpPr>
+          <p:cNvPr id="4" name="슬라이드 번호 개체 틀 3">
+            <a:extLst>
+              <a:ext uri="{FF2B5EF4-FFF2-40B4-BE49-F238E27FC236}">
+                <a16:creationId xmlns:a16="http://schemas.microsoft.com/office/drawing/2014/main" id="{12D00A29-5F89-C886-A807-AC70C3ADF4B5}"/>
+              </a:ext>
+            </a:extLst>
+          </p:cNvPr>
+          <p:cNvSpPr>
+            <a:spLocks noGrp="1"/>
+          </p:cNvSpPr>
+          <p:nvPr>
+            <p:ph type="sldNum" sz="quarter" idx="12"/>
+          </p:nvPr>
+        </p:nvSpPr>
+        <p:spPr/>
+        <p:txBody>
+          <a:bodyPr/>
+          <a:lstStyle/>
+          <a:p>
+            <a:fld id="{109C872D-39A9-4065-8BF3-6A613116E2A1}" type="slidenum">
+              <a:rPr lang="ko-KR" altLang="en-US" smtClean="0"/>
+              <a:t>28</a:t>
+            </a:fld>
+            <a:endParaRPr lang="ko-KR" altLang="en-US"/>
+          </a:p>
+        </p:txBody>
+      </p:sp>
+      <p:sp>
+        <p:nvSpPr>
+          <p:cNvPr id="3" name="TextBox 2">
+            <a:extLst>
+              <a:ext uri="{FF2B5EF4-FFF2-40B4-BE49-F238E27FC236}">
+                <a16:creationId xmlns:a16="http://schemas.microsoft.com/office/drawing/2014/main" id="{B6225294-83CB-18CF-D0BF-3229553C8AA7}"/>
+              </a:ext>
+            </a:extLst>
+          </p:cNvPr>
+          <p:cNvSpPr txBox="1"/>
+          <p:nvPr/>
+        </p:nvSpPr>
+        <p:spPr>
+          <a:xfrm>
+            <a:off x="288790" y="958844"/>
+            <a:ext cx="11250267" cy="3368679"/>
+          </a:xfrm>
+          <a:prstGeom prst="rect">
+            <a:avLst/>
+          </a:prstGeom>
+          <a:noFill/>
+        </p:spPr>
+        <p:txBody>
+          <a:bodyPr wrap="square" rtlCol="0" anchor="t">
+            <a:spAutoFit/>
+          </a:bodyPr>
+          <a:lstStyle/>
+          <a:p>
+            <a:pPr marL="377825" indent="-285750">
+              <a:lnSpc>
+                <a:spcPct val="150000"/>
+              </a:lnSpc>
+              <a:buFont typeface="Arial" panose="020B0604020202020204" pitchFamily="34" charset="0"/>
+              <a:buChar char="•"/>
+            </a:pPr>
+            <a:r>
+              <a:rPr lang="ko-KR" altLang="en-US" sz="1600" spc="-50" dirty="0"/>
+              <a:t>앞서 순수한 이론적 관점에서 빈곤을 정의하려는 접근법과 달리 정책적 접근법을 활용할 수 있다</a:t>
+            </a:r>
+            <a:r>
+              <a:rPr lang="en-US" altLang="ko-KR" sz="1600" spc="-50" dirty="0"/>
+              <a:t>.</a:t>
+            </a:r>
+          </a:p>
+          <a:p>
+            <a:pPr marL="835025" lvl="1" indent="-285750">
+              <a:lnSpc>
+                <a:spcPct val="150000"/>
+              </a:lnSpc>
+              <a:buFont typeface="Wingdings" panose="05000000000000000000" pitchFamily="2" charset="2"/>
+              <a:buChar char="ü"/>
+            </a:pPr>
+            <a:r>
+              <a:rPr lang="ko-KR" altLang="en-US" sz="1600" spc="-50" dirty="0"/>
+              <a:t>사회의 전반적인 경제적 능력과 그 사회에서 빈곤을 퇴치하려고 하는 의지라는 두 요소에 기초하여 적절한 빈곤선을 선택하는 것이다</a:t>
+            </a:r>
+            <a:r>
+              <a:rPr lang="en-US" altLang="ko-KR" sz="1600" spc="-50" dirty="0"/>
+              <a:t>.</a:t>
+            </a:r>
+          </a:p>
+          <a:p>
+            <a:pPr marL="377825" indent="-285750">
+              <a:lnSpc>
+                <a:spcPct val="150000"/>
+              </a:lnSpc>
+              <a:buFont typeface="Arial" panose="020B0604020202020204" pitchFamily="34" charset="0"/>
+              <a:buChar char="•"/>
+            </a:pPr>
+            <a:r>
+              <a:rPr lang="ko-KR" altLang="en-US" sz="1600" spc="-50" dirty="0"/>
+              <a:t>우리나라의 경우 앞서 설명한 </a:t>
+            </a:r>
+            <a:r>
+              <a:rPr lang="ko-KR" altLang="en-US" sz="1600" spc="-50" dirty="0" err="1"/>
+              <a:t>국민기초생활보장제도를</a:t>
+            </a:r>
+            <a:r>
+              <a:rPr lang="ko-KR" altLang="en-US" sz="1600" spc="-50" dirty="0"/>
+              <a:t> 예로 들면</a:t>
+            </a:r>
+            <a:r>
+              <a:rPr lang="en-US" altLang="ko-KR" sz="1600" spc="-50" dirty="0"/>
+              <a:t>, 2025</a:t>
+            </a:r>
+            <a:r>
+              <a:rPr lang="ko-KR" altLang="en-US" sz="1600" spc="-50" dirty="0"/>
+              <a:t>년 생계급여를 지급 받기 위한 기준소득은 </a:t>
+            </a:r>
+            <a:r>
+              <a:rPr lang="en-US" altLang="ko-KR" sz="1600" spc="-50" dirty="0"/>
+              <a:t>4</a:t>
+            </a:r>
+            <a:r>
+              <a:rPr lang="ko-KR" altLang="en-US" sz="1600" spc="-50" dirty="0"/>
+              <a:t>인 가구 기준 월 </a:t>
+            </a:r>
+            <a:r>
+              <a:rPr lang="en-US" altLang="ko-KR" sz="1600" spc="-50" dirty="0"/>
+              <a:t>195</a:t>
+            </a:r>
+            <a:r>
+              <a:rPr lang="ko-KR" altLang="en-US" sz="1600" spc="-50" dirty="0"/>
+              <a:t>만원이다</a:t>
+            </a:r>
+            <a:r>
+              <a:rPr lang="en-US" altLang="ko-KR" sz="1600" spc="-50" dirty="0"/>
+              <a:t>.</a:t>
+            </a:r>
+          </a:p>
+          <a:p>
+            <a:pPr marL="835025" lvl="1" indent="-285750">
+              <a:lnSpc>
+                <a:spcPct val="150000"/>
+              </a:lnSpc>
+              <a:buFont typeface="Wingdings" panose="05000000000000000000" pitchFamily="2" charset="2"/>
+              <a:buChar char="ü"/>
+            </a:pPr>
+            <a:r>
+              <a:rPr lang="ko-KR" altLang="en-US" sz="1600" spc="-50" dirty="0"/>
+              <a:t>이 금액이 합리적인 빈곤선의 기준이라고 볼 수 있는지에 대한 의문의 여지는 많이 있다</a:t>
+            </a:r>
+            <a:r>
+              <a:rPr lang="en-US" altLang="ko-KR" sz="1600" spc="-50" dirty="0"/>
+              <a:t>.</a:t>
+            </a:r>
+          </a:p>
+          <a:p>
+            <a:pPr marL="1292225" lvl="2" indent="-285750">
+              <a:lnSpc>
+                <a:spcPct val="150000"/>
+              </a:lnSpc>
+              <a:buFont typeface="Wingdings" panose="05000000000000000000" pitchFamily="2" charset="2"/>
+              <a:buChar char="Ø"/>
+            </a:pPr>
+            <a:r>
+              <a:rPr lang="ko-KR" altLang="en-US" sz="1600" spc="-50" dirty="0"/>
+              <a:t>이 금액으로는 최소한의 생계유지가 불가능하다고 지적하는 것이다</a:t>
+            </a:r>
+            <a:r>
+              <a:rPr lang="en-US" altLang="ko-KR" sz="1600" spc="-50" dirty="0"/>
+              <a:t>.</a:t>
+            </a:r>
+          </a:p>
+          <a:p>
+            <a:pPr marL="835025" lvl="1" indent="-285750">
+              <a:lnSpc>
+                <a:spcPct val="150000"/>
+              </a:lnSpc>
+              <a:buFont typeface="Wingdings" panose="05000000000000000000" pitchFamily="2" charset="2"/>
+              <a:buChar char="ü"/>
+            </a:pPr>
+            <a:r>
+              <a:rPr lang="ko-KR" altLang="en-US" sz="1600" spc="-50" dirty="0"/>
+              <a:t>정부도 그런 상황에 대한 지적을 모르는 것이 아니지만</a:t>
+            </a:r>
+            <a:r>
+              <a:rPr lang="en-US" altLang="ko-KR" sz="1600" spc="-50" dirty="0"/>
+              <a:t>, </a:t>
+            </a:r>
+            <a:r>
+              <a:rPr lang="ko-KR" altLang="en-US" sz="1600" spc="-50" dirty="0"/>
+              <a:t>예산상의 제약 때문에 현실적인 수준으로 올리지 못할 수 있다</a:t>
+            </a:r>
+            <a:r>
+              <a:rPr lang="en-US" altLang="ko-KR" sz="1600" spc="-50" dirty="0"/>
+              <a:t>.</a:t>
+            </a:r>
+          </a:p>
+        </p:txBody>
+      </p:sp>
+    </p:spTree>
+    <p:extLst>
+      <p:ext uri="{BB962C8B-B14F-4D97-AF65-F5344CB8AC3E}">
+        <p14:creationId xmlns:p14="http://schemas.microsoft.com/office/powerpoint/2010/main" val="3912252466"/>
+      </p:ext>
+    </p:extLst>
+  </p:cSld>
+  <p:clrMapOvr>
+    <a:masterClrMapping/>
+  </p:clrMapOvr>
+</p:sld>
+</file>
+
+<file path=ppt/slides/slide29.xml><?xml version="1.0" encoding="utf-8"?>
 <p:sld xmlns:a="http://schemas.openxmlformats.org/drawingml/2006/main" xmlns:r="http://schemas.openxmlformats.org/officeDocument/2006/relationships" xmlns:p="http://schemas.openxmlformats.org/presentationml/2006/main">
   <p:cSld>
     <p:spTree>
@@ -13224,7 +15746,7 @@
           <a:p>
             <a:fld id="{109C872D-39A9-4065-8BF3-6A613116E2A1}" type="slidenum">
               <a:rPr lang="ko-KR" altLang="en-US" smtClean="0"/>
-              <a:t>22</a:t>
+              <a:t>29</a:t>
             </a:fld>
             <a:endParaRPr lang="ko-KR" altLang="en-US"/>
           </a:p>
@@ -13279,2035 +15801,6 @@
     <p:extLst>
       <p:ext uri="{BB962C8B-B14F-4D97-AF65-F5344CB8AC3E}">
         <p14:creationId xmlns:p14="http://schemas.microsoft.com/office/powerpoint/2010/main" val="715861017"/>
-      </p:ext>
-    </p:extLst>
-  </p:cSld>
-  <p:clrMapOvr>
-    <a:masterClrMapping/>
-  </p:clrMapOvr>
-</p:sld>
-</file>
-
-<file path=ppt/slides/slide23.xml><?xml version="1.0" encoding="utf-8"?>
-<p:sld xmlns:a="http://schemas.openxmlformats.org/drawingml/2006/main" xmlns:r="http://schemas.openxmlformats.org/officeDocument/2006/relationships" xmlns:p="http://schemas.openxmlformats.org/presentationml/2006/main">
-  <p:cSld>
-    <p:spTree>
-      <p:nvGrpSpPr>
-        <p:cNvPr id="1" name="">
-          <a:extLst>
-            <a:ext uri="{FF2B5EF4-FFF2-40B4-BE49-F238E27FC236}">
-              <a16:creationId xmlns:a16="http://schemas.microsoft.com/office/drawing/2014/main" id="{435D2EA7-4229-BBF1-13E2-7702F9EE4B41}"/>
-            </a:ext>
-          </a:extLst>
-        </p:cNvPr>
-        <p:cNvGrpSpPr/>
-        <p:nvPr/>
-      </p:nvGrpSpPr>
-      <p:grpSpPr>
-        <a:xfrm>
-          <a:off x="0" y="0"/>
-          <a:ext cx="0" cy="0"/>
-          <a:chOff x="0" y="0"/>
-          <a:chExt cx="0" cy="0"/>
-        </a:xfrm>
-      </p:grpSpPr>
-      <p:sp>
-        <p:nvSpPr>
-          <p:cNvPr id="2" name="제목 1">
-            <a:extLst>
-              <a:ext uri="{FF2B5EF4-FFF2-40B4-BE49-F238E27FC236}">
-                <a16:creationId xmlns:a16="http://schemas.microsoft.com/office/drawing/2014/main" id="{84111D50-F124-C960-548B-67808DD34697}"/>
-              </a:ext>
-            </a:extLst>
-          </p:cNvPr>
-          <p:cNvSpPr>
-            <a:spLocks noGrp="1"/>
-          </p:cNvSpPr>
-          <p:nvPr>
-            <p:ph type="title"/>
-          </p:nvPr>
-        </p:nvSpPr>
-        <p:spPr/>
-        <p:txBody>
-          <a:bodyPr/>
-          <a:lstStyle/>
-          <a:p>
-            <a:r>
-              <a:rPr lang="ko-KR" altLang="en-US" dirty="0"/>
-              <a:t>평등주의적 정의관</a:t>
-            </a:r>
-          </a:p>
-        </p:txBody>
-      </p:sp>
-      <p:sp>
-        <p:nvSpPr>
-          <p:cNvPr id="4" name="슬라이드 번호 개체 틀 3">
-            <a:extLst>
-              <a:ext uri="{FF2B5EF4-FFF2-40B4-BE49-F238E27FC236}">
-                <a16:creationId xmlns:a16="http://schemas.microsoft.com/office/drawing/2014/main" id="{F2C65300-1DF5-992E-4A09-CA6213FF9D5F}"/>
-              </a:ext>
-            </a:extLst>
-          </p:cNvPr>
-          <p:cNvSpPr>
-            <a:spLocks noGrp="1"/>
-          </p:cNvSpPr>
-          <p:nvPr>
-            <p:ph type="sldNum" sz="quarter" idx="12"/>
-          </p:nvPr>
-        </p:nvSpPr>
-        <p:spPr/>
-        <p:txBody>
-          <a:bodyPr/>
-          <a:lstStyle/>
-          <a:p>
-            <a:fld id="{109C872D-39A9-4065-8BF3-6A613116E2A1}" type="slidenum">
-              <a:rPr lang="ko-KR" altLang="en-US" smtClean="0"/>
-              <a:t>23</a:t>
-            </a:fld>
-            <a:endParaRPr lang="ko-KR" altLang="en-US"/>
-          </a:p>
-        </p:txBody>
-      </p:sp>
-      <p:sp>
-        <p:nvSpPr>
-          <p:cNvPr id="5" name="TextBox 4">
-            <a:extLst>
-              <a:ext uri="{FF2B5EF4-FFF2-40B4-BE49-F238E27FC236}">
-                <a16:creationId xmlns:a16="http://schemas.microsoft.com/office/drawing/2014/main" id="{BA4BD75F-08BC-CBF7-41F9-257306F669A6}"/>
-              </a:ext>
-            </a:extLst>
-          </p:cNvPr>
-          <p:cNvSpPr txBox="1"/>
-          <p:nvPr/>
-        </p:nvSpPr>
-        <p:spPr>
-          <a:xfrm>
-            <a:off x="288790" y="958844"/>
-            <a:ext cx="11250267" cy="5584670"/>
-          </a:xfrm>
-          <a:prstGeom prst="rect">
-            <a:avLst/>
-          </a:prstGeom>
-          <a:noFill/>
-        </p:spPr>
-        <p:txBody>
-          <a:bodyPr wrap="square" rtlCol="0" anchor="t">
-            <a:spAutoFit/>
-          </a:bodyPr>
-          <a:lstStyle/>
-          <a:p>
-            <a:pPr marL="377825" indent="-285750">
-              <a:lnSpc>
-                <a:spcPct val="150000"/>
-              </a:lnSpc>
-              <a:buFont typeface="Arial" panose="020B0604020202020204" pitchFamily="34" charset="0"/>
-              <a:buChar char="•"/>
-            </a:pPr>
-            <a:r>
-              <a:rPr lang="ko-KR" altLang="en-US" sz="1600" spc="-50" dirty="0"/>
-              <a:t>평등주의는 모든 사람이 똑같은 도덕적 가치를 갖고 이 세상에 태어났다는 점을 그 출발점으로 삼고 있다</a:t>
-            </a:r>
-            <a:r>
-              <a:rPr lang="en-US" altLang="ko-KR" sz="1600" spc="-50" dirty="0"/>
-              <a:t>.</a:t>
-            </a:r>
-          </a:p>
-          <a:p>
-            <a:pPr marL="835025" lvl="1" indent="-285750">
-              <a:lnSpc>
-                <a:spcPct val="150000"/>
-              </a:lnSpc>
-              <a:buFont typeface="Wingdings" panose="05000000000000000000" pitchFamily="2" charset="2"/>
-              <a:buChar char="ü"/>
-            </a:pPr>
-            <a:r>
-              <a:rPr lang="ko-KR" altLang="en-US" sz="1600" spc="-50" dirty="0"/>
-              <a:t>이를 토대로 모든 사람이 물질적 가치</a:t>
-            </a:r>
-            <a:r>
-              <a:rPr lang="en-US" altLang="ko-KR" sz="1600" spc="-50" dirty="0"/>
-              <a:t> (</a:t>
-            </a:r>
-            <a:r>
-              <a:rPr lang="ko-KR" altLang="en-US" sz="1600" spc="-50" dirty="0"/>
-              <a:t>재산과 소득</a:t>
-            </a:r>
-            <a:r>
-              <a:rPr lang="en-US" altLang="ko-KR" sz="1600" spc="-50" dirty="0"/>
-              <a:t>)</a:t>
-            </a:r>
-            <a:r>
-              <a:rPr lang="ko-KR" altLang="en-US" sz="1600" spc="-50" dirty="0"/>
-              <a:t>를 고루 나눠 가진 상태를 뜻한다는 결론을 도출한다</a:t>
-            </a:r>
-            <a:r>
-              <a:rPr lang="en-US" altLang="ko-KR" sz="1600" spc="-50" dirty="0"/>
-              <a:t>.</a:t>
-            </a:r>
-          </a:p>
-          <a:p>
-            <a:pPr marL="377825" indent="-285750">
-              <a:lnSpc>
-                <a:spcPct val="150000"/>
-              </a:lnSpc>
-              <a:buFont typeface="Arial" panose="020B0604020202020204" pitchFamily="34" charset="0"/>
-              <a:buChar char="•"/>
-            </a:pPr>
-            <a:r>
-              <a:rPr lang="ko-KR" altLang="en-US" sz="1600" spc="-50" dirty="0"/>
-              <a:t>그러나 모든 사람이 똑같은 도덕적 가치를 갖고 이세상에 태어났다고 해서</a:t>
-            </a:r>
-            <a:r>
-              <a:rPr lang="en-US" altLang="ko-KR" sz="1600" spc="-50" dirty="0"/>
-              <a:t>, </a:t>
-            </a:r>
-            <a:r>
-              <a:rPr lang="ko-KR" altLang="en-US" sz="1600" spc="-50" dirty="0"/>
-              <a:t>이들이 물질적 가치도 똑같이 나눠 가져야 한다는 결론이 필연적으로 도출되지는 않는다</a:t>
-            </a:r>
-            <a:r>
-              <a:rPr lang="en-US" altLang="ko-KR" sz="1600" spc="-50" dirty="0"/>
-              <a:t>.</a:t>
-            </a:r>
-          </a:p>
-          <a:p>
-            <a:pPr marL="835025" lvl="1" indent="-285750">
-              <a:lnSpc>
-                <a:spcPct val="150000"/>
-              </a:lnSpc>
-              <a:buFont typeface="Wingdings" panose="05000000000000000000" pitchFamily="2" charset="2"/>
-              <a:buChar char="ü"/>
-            </a:pPr>
-            <a:r>
-              <a:rPr lang="ko-KR" altLang="en-US" sz="1600" spc="-50" dirty="0"/>
-              <a:t>앞서 말한 것처럼 여러 요건들이 함께 충족이 되어야 정의로운 분배가 달성되므로</a:t>
-            </a:r>
-            <a:r>
-              <a:rPr lang="en-US" altLang="ko-KR" sz="1600" spc="-50" dirty="0"/>
-              <a:t>, </a:t>
-            </a:r>
-            <a:r>
-              <a:rPr lang="ko-KR" altLang="en-US" sz="1600" spc="-50" dirty="0"/>
-              <a:t>모두가 똑같은 몫을 가진 분배가 정의로운 분배를 뜻한다고 말하기는 힘들다</a:t>
-            </a:r>
-            <a:r>
-              <a:rPr lang="en-US" altLang="ko-KR" sz="1600" spc="-50" dirty="0"/>
-              <a:t>.</a:t>
-            </a:r>
-          </a:p>
-          <a:p>
-            <a:pPr marL="835025" lvl="1" indent="-285750">
-              <a:lnSpc>
-                <a:spcPct val="150000"/>
-              </a:lnSpc>
-              <a:buFont typeface="Wingdings" panose="05000000000000000000" pitchFamily="2" charset="2"/>
-              <a:buChar char="ü"/>
-            </a:pPr>
-            <a:r>
-              <a:rPr lang="ko-KR" altLang="en-US" sz="1600" spc="-50" dirty="0"/>
-              <a:t>평등주의의 큰 문제점은 평등한 분배를 추구하는 과정에서 개인의 정당한 권리가 침해될 가능성이 있다는 점이다</a:t>
-            </a:r>
-            <a:r>
-              <a:rPr lang="en-US" altLang="ko-KR" sz="1600" spc="-50" dirty="0"/>
-              <a:t>.</a:t>
-            </a:r>
-          </a:p>
-          <a:p>
-            <a:pPr marL="835025" lvl="1" indent="-285750">
-              <a:lnSpc>
-                <a:spcPct val="150000"/>
-              </a:lnSpc>
-              <a:buFont typeface="Wingdings" panose="05000000000000000000" pitchFamily="2" charset="2"/>
-              <a:buChar char="ü"/>
-            </a:pPr>
-            <a:r>
-              <a:rPr lang="ko-KR" altLang="en-US" sz="1600" spc="-50" dirty="0"/>
-              <a:t>또 평등성에 대한 요구는 자유와 </a:t>
-            </a:r>
-            <a:r>
-              <a:rPr lang="ko-KR" altLang="en-US" sz="1600" spc="-50" dirty="0" err="1"/>
-              <a:t>상출될</a:t>
-            </a:r>
-            <a:r>
-              <a:rPr lang="ko-KR" altLang="en-US" sz="1600" spc="-50" dirty="0"/>
-              <a:t> 가능성이 있다</a:t>
-            </a:r>
-            <a:r>
-              <a:rPr lang="en-US" altLang="ko-KR" sz="1600" spc="-50" dirty="0"/>
-              <a:t>.</a:t>
-            </a:r>
-          </a:p>
-          <a:p>
-            <a:pPr marL="377825" indent="-285750">
-              <a:lnSpc>
-                <a:spcPct val="150000"/>
-              </a:lnSpc>
-              <a:buFont typeface="Arial" panose="020B0604020202020204" pitchFamily="34" charset="0"/>
-              <a:buChar char="•"/>
-            </a:pPr>
-            <a:r>
-              <a:rPr lang="ko-KR" altLang="en-US" sz="1600" spc="-50" dirty="0"/>
-              <a:t>그렇다면 평등한 분배라는 것은 구체적으로 무엇을 뜻하는지 생각해보자</a:t>
-            </a:r>
-            <a:r>
-              <a:rPr lang="en-US" altLang="ko-KR" sz="1600" spc="-50" dirty="0"/>
-              <a:t>.</a:t>
-            </a:r>
-          </a:p>
-          <a:p>
-            <a:pPr marL="835025" lvl="1" indent="-285750">
-              <a:lnSpc>
-                <a:spcPct val="150000"/>
-              </a:lnSpc>
-              <a:buFont typeface="Wingdings" panose="05000000000000000000" pitchFamily="2" charset="2"/>
-              <a:buChar char="ü"/>
-            </a:pPr>
-            <a:r>
-              <a:rPr lang="ko-KR" altLang="en-US" sz="1600" spc="-50" dirty="0"/>
-              <a:t>극단적으로 모든 사람이 같은 양의 자원을 갖는 상태를 생각해 볼 수 있는데</a:t>
-            </a:r>
-            <a:r>
-              <a:rPr lang="en-US" altLang="ko-KR" sz="1600" spc="-50" dirty="0"/>
-              <a:t>, </a:t>
-            </a:r>
-            <a:r>
-              <a:rPr lang="ko-KR" altLang="en-US" sz="1600" spc="-50" dirty="0"/>
-              <a:t>그런 상태가 현실에서 가능한 것인지는 </a:t>
-            </a:r>
-            <a:r>
-              <a:rPr lang="ko-KR" altLang="en-US" sz="1600" spc="-50" dirty="0" err="1"/>
-              <a:t>제쳐두고라도</a:t>
-            </a:r>
-            <a:r>
-              <a:rPr lang="en-US" altLang="ko-KR" sz="1600" spc="-50" dirty="0"/>
-              <a:t>, </a:t>
-            </a:r>
-            <a:r>
-              <a:rPr lang="ko-KR" altLang="en-US" sz="1600" spc="-50" dirty="0"/>
-              <a:t>그것이 바람직한 일인지 의심하지 않을 수 없다</a:t>
-            </a:r>
-            <a:r>
-              <a:rPr lang="en-US" altLang="ko-KR" sz="1600" spc="-50" dirty="0"/>
-              <a:t>.</a:t>
-            </a:r>
-          </a:p>
-          <a:p>
-            <a:pPr marL="377825" indent="-285750">
-              <a:lnSpc>
-                <a:spcPct val="150000"/>
-              </a:lnSpc>
-              <a:buFont typeface="Arial" panose="020B0604020202020204" pitchFamily="34" charset="0"/>
-              <a:buChar char="•"/>
-            </a:pPr>
-            <a:r>
-              <a:rPr lang="ko-KR" altLang="en-US" sz="1600" spc="-50" dirty="0"/>
-              <a:t>평등한 분배라는 것이 보다 설득력을 갖기 위해서는 탄력적인 해석이 필요하다</a:t>
-            </a:r>
-            <a:r>
-              <a:rPr lang="en-US" altLang="ko-KR" sz="1600" spc="-50" dirty="0"/>
-              <a:t>.</a:t>
-            </a:r>
-          </a:p>
-          <a:p>
-            <a:pPr marL="835025" lvl="1" indent="-285750">
-              <a:lnSpc>
-                <a:spcPct val="150000"/>
-              </a:lnSpc>
-              <a:buFont typeface="Wingdings" panose="05000000000000000000" pitchFamily="2" charset="2"/>
-              <a:buChar char="ü"/>
-            </a:pPr>
-            <a:r>
-              <a:rPr lang="ko-KR" altLang="en-US" sz="1600" spc="-50" dirty="0"/>
-              <a:t>예컨대 모든 사람이</a:t>
-            </a:r>
-            <a:r>
-              <a:rPr lang="en-US" altLang="ko-KR" sz="1600" spc="-50" dirty="0"/>
-              <a:t> ‘</a:t>
-            </a:r>
-            <a:r>
-              <a:rPr lang="ko-KR" altLang="en-US" sz="1600" spc="-50" dirty="0"/>
-              <a:t>최소한의 생활수준에 대해 동등한 권리를 갖는다</a:t>
-            </a:r>
-            <a:r>
-              <a:rPr lang="en-US" altLang="ko-KR" sz="1600" spc="-50" dirty="0"/>
-              <a:t>‘ </a:t>
-            </a:r>
-            <a:r>
-              <a:rPr lang="ko-KR" altLang="en-US" sz="1600" spc="-50" dirty="0"/>
-              <a:t>혹은 </a:t>
-            </a:r>
-            <a:r>
-              <a:rPr lang="en-US" altLang="ko-KR" sz="1600" spc="-50" dirty="0"/>
-              <a:t>‘</a:t>
-            </a:r>
-            <a:r>
-              <a:rPr lang="ko-KR" altLang="en-US" sz="1600" spc="-50" dirty="0"/>
-              <a:t>모든 사람이 동등한 기회를 갖는다</a:t>
-            </a:r>
-            <a:r>
-              <a:rPr lang="en-US" altLang="ko-KR" sz="1600" spc="-50" dirty="0"/>
-              <a:t>‘ </a:t>
-            </a:r>
-            <a:r>
-              <a:rPr lang="ko-KR" altLang="en-US" sz="1600" spc="-50" dirty="0"/>
-              <a:t>로 해석할 수 있다면 보다 설득력이 있다</a:t>
-            </a:r>
-            <a:r>
-              <a:rPr lang="en-US" altLang="ko-KR" sz="1600" spc="-50" dirty="0"/>
-              <a:t>.</a:t>
-            </a:r>
-          </a:p>
-          <a:p>
-            <a:pPr marL="377825" indent="-285750">
-              <a:lnSpc>
-                <a:spcPct val="150000"/>
-              </a:lnSpc>
-              <a:buFont typeface="Arial" panose="020B0604020202020204" pitchFamily="34" charset="0"/>
-              <a:buChar char="•"/>
-            </a:pPr>
-            <a:r>
-              <a:rPr lang="ko-KR" altLang="en-US" sz="1600" spc="-50" dirty="0"/>
-              <a:t>평등주의는 강한 직관적 호소력을 갖지만</a:t>
-            </a:r>
-            <a:r>
-              <a:rPr lang="en-US" altLang="ko-KR" sz="1600" spc="-50" dirty="0"/>
-              <a:t>, </a:t>
-            </a:r>
-            <a:r>
-              <a:rPr lang="ko-KR" altLang="en-US" sz="1600" spc="-50" dirty="0"/>
-              <a:t>평등주의 논리를 살펴보면 따져볼 것들이 많다</a:t>
-            </a:r>
-            <a:r>
-              <a:rPr lang="en-US" altLang="ko-KR" sz="1600" spc="-50" dirty="0"/>
-              <a:t>.</a:t>
-            </a:r>
-          </a:p>
-        </p:txBody>
-      </p:sp>
-    </p:spTree>
-    <p:extLst>
-      <p:ext uri="{BB962C8B-B14F-4D97-AF65-F5344CB8AC3E}">
-        <p14:creationId xmlns:p14="http://schemas.microsoft.com/office/powerpoint/2010/main" val="2437512343"/>
-      </p:ext>
-    </p:extLst>
-  </p:cSld>
-  <p:clrMapOvr>
-    <a:masterClrMapping/>
-  </p:clrMapOvr>
-</p:sld>
-</file>
-
-<file path=ppt/slides/slide24.xml><?xml version="1.0" encoding="utf-8"?>
-<p:sld xmlns:a="http://schemas.openxmlformats.org/drawingml/2006/main" xmlns:r="http://schemas.openxmlformats.org/officeDocument/2006/relationships" xmlns:p="http://schemas.openxmlformats.org/presentationml/2006/main">
-  <p:cSld>
-    <p:spTree>
-      <p:nvGrpSpPr>
-        <p:cNvPr id="1" name="">
-          <a:extLst>
-            <a:ext uri="{FF2B5EF4-FFF2-40B4-BE49-F238E27FC236}">
-              <a16:creationId xmlns:a16="http://schemas.microsoft.com/office/drawing/2014/main" id="{201076F8-7289-0805-0E24-8FB1BC27F7E7}"/>
-            </a:ext>
-          </a:extLst>
-        </p:cNvPr>
-        <p:cNvGrpSpPr/>
-        <p:nvPr/>
-      </p:nvGrpSpPr>
-      <p:grpSpPr>
-        <a:xfrm>
-          <a:off x="0" y="0"/>
-          <a:ext cx="0" cy="0"/>
-          <a:chOff x="0" y="0"/>
-          <a:chExt cx="0" cy="0"/>
-        </a:xfrm>
-      </p:grpSpPr>
-      <p:sp>
-        <p:nvSpPr>
-          <p:cNvPr id="2" name="제목 1">
-            <a:extLst>
-              <a:ext uri="{FF2B5EF4-FFF2-40B4-BE49-F238E27FC236}">
-                <a16:creationId xmlns:a16="http://schemas.microsoft.com/office/drawing/2014/main" id="{1FCDB55E-4EF8-9A5A-4B0C-AE7128D00E8D}"/>
-              </a:ext>
-            </a:extLst>
-          </p:cNvPr>
-          <p:cNvSpPr>
-            <a:spLocks noGrp="1"/>
-          </p:cNvSpPr>
-          <p:nvPr>
-            <p:ph type="title"/>
-          </p:nvPr>
-        </p:nvSpPr>
-        <p:spPr/>
-        <p:txBody>
-          <a:bodyPr/>
-          <a:lstStyle/>
-          <a:p>
-            <a:r>
-              <a:rPr lang="ko-KR" altLang="en-US" dirty="0" err="1"/>
-              <a:t>자유론적</a:t>
-            </a:r>
-            <a:r>
-              <a:rPr lang="ko-KR" altLang="en-US" dirty="0"/>
-              <a:t> 정의관</a:t>
-            </a:r>
-          </a:p>
-        </p:txBody>
-      </p:sp>
-      <p:sp>
-        <p:nvSpPr>
-          <p:cNvPr id="4" name="슬라이드 번호 개체 틀 3">
-            <a:extLst>
-              <a:ext uri="{FF2B5EF4-FFF2-40B4-BE49-F238E27FC236}">
-                <a16:creationId xmlns:a16="http://schemas.microsoft.com/office/drawing/2014/main" id="{7A11BEA9-6E8D-F8F2-2298-0E9D5931AC9D}"/>
-              </a:ext>
-            </a:extLst>
-          </p:cNvPr>
-          <p:cNvSpPr>
-            <a:spLocks noGrp="1"/>
-          </p:cNvSpPr>
-          <p:nvPr>
-            <p:ph type="sldNum" sz="quarter" idx="12"/>
-          </p:nvPr>
-        </p:nvSpPr>
-        <p:spPr/>
-        <p:txBody>
-          <a:bodyPr/>
-          <a:lstStyle/>
-          <a:p>
-            <a:fld id="{109C872D-39A9-4065-8BF3-6A613116E2A1}" type="slidenum">
-              <a:rPr lang="ko-KR" altLang="en-US" smtClean="0"/>
-              <a:t>24</a:t>
-            </a:fld>
-            <a:endParaRPr lang="ko-KR" altLang="en-US"/>
-          </a:p>
-        </p:txBody>
-      </p:sp>
-      <p:sp>
-        <p:nvSpPr>
-          <p:cNvPr id="5" name="TextBox 4">
-            <a:extLst>
-              <a:ext uri="{FF2B5EF4-FFF2-40B4-BE49-F238E27FC236}">
-                <a16:creationId xmlns:a16="http://schemas.microsoft.com/office/drawing/2014/main" id="{CA743C94-3A0E-A64B-5B45-B3BAE71B2C6C}"/>
-              </a:ext>
-            </a:extLst>
-          </p:cNvPr>
-          <p:cNvSpPr txBox="1"/>
-          <p:nvPr/>
-        </p:nvSpPr>
-        <p:spPr>
-          <a:xfrm>
-            <a:off x="288790" y="958844"/>
-            <a:ext cx="11250267" cy="5584670"/>
-          </a:xfrm>
-          <a:prstGeom prst="rect">
-            <a:avLst/>
-          </a:prstGeom>
-          <a:noFill/>
-        </p:spPr>
-        <p:txBody>
-          <a:bodyPr wrap="square" rtlCol="0" anchor="t">
-            <a:spAutoFit/>
-          </a:bodyPr>
-          <a:lstStyle/>
-          <a:p>
-            <a:pPr marL="377825" indent="-285750">
-              <a:lnSpc>
-                <a:spcPct val="150000"/>
-              </a:lnSpc>
-              <a:buFont typeface="Arial" panose="020B0604020202020204" pitchFamily="34" charset="0"/>
-              <a:buChar char="•"/>
-            </a:pPr>
-            <a:r>
-              <a:rPr lang="ko-KR" altLang="en-US" sz="1600" spc="-50" dirty="0" err="1"/>
-              <a:t>자유론적</a:t>
-            </a:r>
-            <a:r>
-              <a:rPr lang="ko-KR" altLang="en-US" sz="1600" spc="-50" dirty="0"/>
-              <a:t> 정의관은 모든 사람이 정당하게 가질 권리가 있는 </a:t>
-            </a:r>
-            <a:r>
-              <a:rPr lang="ko-KR" altLang="en-US" sz="1600" spc="-50" dirty="0" err="1"/>
-              <a:t>것만을</a:t>
-            </a:r>
-            <a:r>
-              <a:rPr lang="ko-KR" altLang="en-US" sz="1600" spc="-50" dirty="0"/>
-              <a:t> 소유한 분배의 상태가 정의롭다고 말한다</a:t>
-            </a:r>
-            <a:r>
-              <a:rPr lang="en-US" altLang="ko-KR" sz="1600" spc="-50" dirty="0"/>
-              <a:t>.</a:t>
-            </a:r>
-          </a:p>
-          <a:p>
-            <a:pPr marL="835025" lvl="1" indent="-285750">
-              <a:lnSpc>
-                <a:spcPct val="150000"/>
-              </a:lnSpc>
-              <a:buFont typeface="Wingdings" panose="05000000000000000000" pitchFamily="2" charset="2"/>
-              <a:buChar char="ü"/>
-            </a:pPr>
-            <a:r>
-              <a:rPr lang="ko-KR" altLang="en-US" sz="1600" spc="-50" dirty="0"/>
-              <a:t>정의라는 이름 아래 개인의 자유가 침해되는 일이 없어야 한다고 말한다</a:t>
-            </a:r>
-            <a:r>
-              <a:rPr lang="en-US" altLang="ko-KR" sz="1600" spc="-50" dirty="0"/>
-              <a:t>.</a:t>
-            </a:r>
-          </a:p>
-          <a:p>
-            <a:pPr marL="377825" indent="-285750">
-              <a:lnSpc>
-                <a:spcPct val="150000"/>
-              </a:lnSpc>
-              <a:buFont typeface="Arial" panose="020B0604020202020204" pitchFamily="34" charset="0"/>
-              <a:buChar char="•"/>
-            </a:pPr>
-            <a:r>
-              <a:rPr lang="ko-KR" altLang="en-US" sz="1600" spc="-50" dirty="0"/>
-              <a:t>철학자 </a:t>
-            </a:r>
-            <a:r>
-              <a:rPr lang="ko-KR" altLang="en-US" sz="1600" spc="-50" dirty="0" err="1"/>
-              <a:t>노직</a:t>
-            </a:r>
-            <a:r>
-              <a:rPr lang="en-US" altLang="ko-KR" sz="1600" spc="-50" dirty="0"/>
-              <a:t>(R. Nozick, 1974)</a:t>
-            </a:r>
-            <a:r>
-              <a:rPr lang="ko-KR" altLang="en-US" sz="1600" spc="-50" dirty="0"/>
-              <a:t>이 쓴 </a:t>
-            </a:r>
-            <a:r>
-              <a:rPr lang="en-US" altLang="ko-KR" sz="1600" spc="-50" dirty="0"/>
-              <a:t>『</a:t>
-            </a:r>
-            <a:r>
-              <a:rPr lang="ko-KR" altLang="en-US" sz="1600" spc="-50" dirty="0"/>
-              <a:t>무정부</a:t>
-            </a:r>
-            <a:r>
-              <a:rPr lang="en-US" altLang="ko-KR" sz="1600" spc="-50" dirty="0"/>
-              <a:t>, </a:t>
-            </a:r>
-            <a:r>
-              <a:rPr lang="ko-KR" altLang="en-US" sz="1600" spc="-50" dirty="0"/>
-              <a:t>정부</a:t>
-            </a:r>
-            <a:r>
-              <a:rPr lang="en-US" altLang="ko-KR" sz="1600" spc="-50" dirty="0"/>
-              <a:t>, </a:t>
-            </a:r>
-            <a:r>
-              <a:rPr lang="ko-KR" altLang="en-US" sz="1600" spc="-50" dirty="0"/>
-              <a:t>그리고 유토피아</a:t>
-            </a:r>
-            <a:r>
-              <a:rPr lang="en-US" altLang="ko-KR" sz="1600" spc="-50" dirty="0"/>
-              <a:t>』</a:t>
-            </a:r>
-            <a:r>
-              <a:rPr lang="ko-KR" altLang="en-US" sz="1600" spc="-50" dirty="0"/>
-              <a:t>는 </a:t>
-            </a:r>
-            <a:r>
-              <a:rPr lang="ko-KR" altLang="en-US" sz="1600" spc="-50" dirty="0" err="1"/>
-              <a:t>자유론적</a:t>
-            </a:r>
-            <a:r>
-              <a:rPr lang="ko-KR" altLang="en-US" sz="1600" spc="-50" dirty="0"/>
-              <a:t> 정의관의 고전으로 널리 알려져 있다</a:t>
-            </a:r>
-            <a:r>
-              <a:rPr lang="en-US" altLang="ko-KR" sz="1600" spc="-50" dirty="0"/>
-              <a:t>.</a:t>
-            </a:r>
-          </a:p>
-          <a:p>
-            <a:pPr marL="835025" lvl="1" indent="-285750">
-              <a:lnSpc>
-                <a:spcPct val="150000"/>
-              </a:lnSpc>
-              <a:buFont typeface="Wingdings" panose="05000000000000000000" pitchFamily="2" charset="2"/>
-              <a:buChar char="ü"/>
-            </a:pPr>
-            <a:r>
-              <a:rPr lang="ko-KR" altLang="en-US" sz="1600" spc="-50" dirty="0" err="1"/>
-              <a:t>노직은</a:t>
-            </a:r>
-            <a:r>
-              <a:rPr lang="ko-KR" altLang="en-US" sz="1600" spc="-50" dirty="0"/>
-              <a:t> 사람이 수단일 수는 없고</a:t>
-            </a:r>
-            <a:r>
-              <a:rPr lang="en-US" altLang="ko-KR" sz="1600" spc="-50" dirty="0"/>
-              <a:t>, </a:t>
-            </a:r>
-            <a:r>
-              <a:rPr lang="ko-KR" altLang="en-US" sz="1600" spc="-50" dirty="0"/>
-              <a:t>목적 그 자체여야 한다는 칸트</a:t>
-            </a:r>
-            <a:r>
-              <a:rPr lang="en-US" altLang="ko-KR" sz="1600" spc="-50" dirty="0"/>
-              <a:t>(I. Kant)</a:t>
-            </a:r>
-            <a:r>
-              <a:rPr lang="ko-KR" altLang="en-US" sz="1600" spc="-50" dirty="0"/>
-              <a:t>적인 원칙을 출발점으로 삼고 있다</a:t>
-            </a:r>
-            <a:r>
-              <a:rPr lang="en-US" altLang="ko-KR" sz="1600" spc="-50" dirty="0"/>
-              <a:t>.</a:t>
-            </a:r>
-          </a:p>
-          <a:p>
-            <a:pPr marL="1292225" lvl="2" indent="-285750">
-              <a:lnSpc>
-                <a:spcPct val="150000"/>
-              </a:lnSpc>
-              <a:buFont typeface="Wingdings" panose="05000000000000000000" pitchFamily="2" charset="2"/>
-              <a:buChar char="Ø"/>
-            </a:pPr>
-            <a:r>
-              <a:rPr lang="ko-KR" altLang="en-US" sz="1600" spc="-50" dirty="0"/>
-              <a:t>이 원칙하에서는 개인의 권리는 어떤 경우에도 침해될 수 없고</a:t>
-            </a:r>
-            <a:r>
-              <a:rPr lang="en-US" altLang="ko-KR" sz="1600" spc="-50" dirty="0"/>
-              <a:t>, </a:t>
-            </a:r>
-            <a:r>
-              <a:rPr lang="ko-KR" altLang="en-US" sz="1600" spc="-50" dirty="0"/>
-              <a:t>어느 누구도 사회 전체를 위한다는 미명 아래 다른 사람을 이용할 권리를 가질 수 없다</a:t>
-            </a:r>
-            <a:r>
-              <a:rPr lang="en-US" altLang="ko-KR" sz="1600" spc="-50" dirty="0"/>
-              <a:t>.</a:t>
-            </a:r>
-          </a:p>
-          <a:p>
-            <a:pPr marL="835025" lvl="1" indent="-285750">
-              <a:lnSpc>
-                <a:spcPct val="150000"/>
-              </a:lnSpc>
-              <a:buFont typeface="Wingdings" panose="05000000000000000000" pitchFamily="2" charset="2"/>
-              <a:buChar char="ü"/>
-            </a:pPr>
-            <a:r>
-              <a:rPr lang="ko-KR" altLang="en-US" sz="1600" spc="-50" dirty="0" err="1"/>
-              <a:t>노직이</a:t>
-            </a:r>
-            <a:r>
-              <a:rPr lang="ko-KR" altLang="en-US" sz="1600" spc="-50" dirty="0"/>
-              <a:t> 말하는 정당한 권리의 원칙은 어떤 사람이 정의로운 방법을 통해 어떤 물건을 소유하고 있으면 그것을 </a:t>
-            </a:r>
-            <a:r>
-              <a:rPr lang="en-US" altLang="ko-KR" sz="1600" spc="-50" dirty="0"/>
-              <a:t>‘</a:t>
-            </a:r>
-            <a:r>
-              <a:rPr lang="ko-KR" altLang="en-US" sz="1600" spc="-50" dirty="0"/>
-              <a:t>정당하게 가질 권리가 있다</a:t>
-            </a:r>
-            <a:r>
-              <a:rPr lang="en-US" altLang="ko-KR" sz="1600" spc="-50" dirty="0"/>
-              <a:t>’</a:t>
-            </a:r>
-            <a:r>
-              <a:rPr lang="ko-KR" altLang="en-US" sz="1600" spc="-50" dirty="0"/>
-              <a:t>고 인정한다</a:t>
-            </a:r>
-            <a:r>
-              <a:rPr lang="en-US" altLang="ko-KR" sz="1600" spc="-50" dirty="0"/>
-              <a:t>. </a:t>
-            </a:r>
-            <a:r>
-              <a:rPr lang="ko-KR" altLang="en-US" sz="1600" spc="-50" dirty="0"/>
-              <a:t>또 다른 사람으로부터 올바른 방법을 통해 소유권을 이전 받아도</a:t>
-            </a:r>
-            <a:r>
-              <a:rPr lang="en-US" altLang="ko-KR" sz="1600" spc="-50" dirty="0"/>
-              <a:t>, </a:t>
-            </a:r>
-            <a:r>
-              <a:rPr lang="ko-KR" altLang="en-US" sz="1600" spc="-50" dirty="0"/>
-              <a:t>역시 </a:t>
-            </a:r>
-            <a:r>
-              <a:rPr lang="en-US" altLang="ko-KR" sz="1600" spc="-50" dirty="0"/>
-              <a:t>‘</a:t>
-            </a:r>
-            <a:r>
-              <a:rPr lang="ko-KR" altLang="en-US" sz="1600" spc="-50" dirty="0"/>
-              <a:t>정당하게 가질 권리</a:t>
-            </a:r>
-            <a:r>
-              <a:rPr lang="en-US" altLang="ko-KR" sz="1600" spc="-50" dirty="0"/>
-              <a:t>’</a:t>
-            </a:r>
-            <a:r>
-              <a:rPr lang="ko-KR" altLang="en-US" sz="1600" spc="-50" dirty="0"/>
-              <a:t>를 인정한다</a:t>
-            </a:r>
-            <a:r>
-              <a:rPr lang="en-US" altLang="ko-KR" sz="1600" spc="-50" dirty="0"/>
-              <a:t>.</a:t>
-            </a:r>
-          </a:p>
-          <a:p>
-            <a:pPr marL="835025" lvl="1" indent="-285750">
-              <a:lnSpc>
-                <a:spcPct val="150000"/>
-              </a:lnSpc>
-              <a:buFont typeface="Wingdings" panose="05000000000000000000" pitchFamily="2" charset="2"/>
-              <a:buChar char="ü"/>
-            </a:pPr>
-            <a:r>
-              <a:rPr lang="ko-KR" altLang="en-US" sz="1600" spc="-50" dirty="0"/>
-              <a:t>이와 같은 생각에서 결과의 정의보다는 절차상의 정의를 더욱 중요시하는 태도를 찾아볼 수 있다</a:t>
-            </a:r>
-            <a:r>
-              <a:rPr lang="en-US" altLang="ko-KR" sz="1600" spc="-50" dirty="0"/>
-              <a:t>.</a:t>
-            </a:r>
-          </a:p>
-          <a:p>
-            <a:pPr marL="377825" indent="-285750">
-              <a:lnSpc>
-                <a:spcPct val="150000"/>
-              </a:lnSpc>
-              <a:buFont typeface="Arial" panose="020B0604020202020204" pitchFamily="34" charset="0"/>
-              <a:buChar char="•"/>
-            </a:pPr>
-            <a:r>
-              <a:rPr lang="ko-KR" altLang="en-US" sz="1600" spc="-50" dirty="0"/>
-              <a:t>그러나 많은 사람들은 절차상의 형식적 정당성을 강조하며</a:t>
-            </a:r>
-            <a:r>
-              <a:rPr lang="en-US" altLang="ko-KR" sz="1600" spc="-50" dirty="0"/>
-              <a:t>, </a:t>
-            </a:r>
-            <a:r>
-              <a:rPr lang="ko-KR" altLang="en-US" sz="1600" spc="-50" dirty="0"/>
-              <a:t>그 결과로 나타난 불평등에 대해서 문제점을 지적한다</a:t>
-            </a:r>
-            <a:r>
-              <a:rPr lang="en-US" altLang="ko-KR" sz="1600" spc="-50" dirty="0"/>
-              <a:t>.</a:t>
-            </a:r>
-          </a:p>
-          <a:p>
-            <a:pPr marL="377825" indent="-285750">
-              <a:lnSpc>
-                <a:spcPct val="150000"/>
-              </a:lnSpc>
-              <a:buFont typeface="Arial" panose="020B0604020202020204" pitchFamily="34" charset="0"/>
-              <a:buChar char="•"/>
-            </a:pPr>
-            <a:r>
-              <a:rPr lang="ko-KR" altLang="en-US" sz="1600" spc="-50" dirty="0"/>
-              <a:t>또 정당한 </a:t>
-            </a:r>
-            <a:r>
-              <a:rPr lang="ko-KR" altLang="en-US" sz="1600" spc="-50" dirty="0" err="1"/>
-              <a:t>방법이라는게</a:t>
-            </a:r>
-            <a:r>
-              <a:rPr lang="ko-KR" altLang="en-US" sz="1600" spc="-50" dirty="0"/>
-              <a:t> 상황에 따라 달라질 수 있는 만큼</a:t>
-            </a:r>
-            <a:r>
-              <a:rPr lang="en-US" altLang="ko-KR" sz="1600" spc="-50" dirty="0"/>
-              <a:t>, </a:t>
-            </a:r>
-            <a:r>
-              <a:rPr lang="ko-KR" altLang="en-US" sz="1600" spc="-50" dirty="0"/>
-              <a:t>정당한 방법이 무엇인지에 대한 논란이 있을 수 있다</a:t>
-            </a:r>
-            <a:r>
-              <a:rPr lang="en-US" altLang="ko-KR" sz="1600" spc="-50" dirty="0"/>
-              <a:t>.</a:t>
-            </a:r>
-          </a:p>
-          <a:p>
-            <a:pPr marL="377825" indent="-285750">
-              <a:lnSpc>
-                <a:spcPct val="150000"/>
-              </a:lnSpc>
-              <a:buFont typeface="Arial" panose="020B0604020202020204" pitchFamily="34" charset="0"/>
-              <a:buChar char="•"/>
-            </a:pPr>
-            <a:r>
-              <a:rPr lang="ko-KR" altLang="en-US" sz="1600" spc="-50" dirty="0" err="1"/>
-              <a:t>자유론자들은</a:t>
-            </a:r>
-            <a:r>
-              <a:rPr lang="ko-KR" altLang="en-US" sz="1600" spc="-50" dirty="0"/>
-              <a:t> 보통 </a:t>
-            </a:r>
-            <a:r>
-              <a:rPr lang="ko-KR" altLang="en-US" sz="1600" spc="-50" dirty="0" err="1"/>
-              <a:t>현실옹호적인</a:t>
-            </a:r>
-            <a:r>
-              <a:rPr lang="ko-KR" altLang="en-US" sz="1600" spc="-50" dirty="0"/>
-              <a:t> 태도를 보이는데</a:t>
-            </a:r>
-            <a:r>
-              <a:rPr lang="en-US" altLang="ko-KR" sz="1600" spc="-50" dirty="0"/>
-              <a:t>, </a:t>
-            </a:r>
-            <a:r>
-              <a:rPr lang="ko-KR" altLang="en-US" sz="1600" spc="-50" dirty="0"/>
-              <a:t>이 또한 많은 사람들의 비판대상이 된다</a:t>
-            </a:r>
-            <a:r>
-              <a:rPr lang="en-US" altLang="ko-KR" sz="1600" spc="-50" dirty="0"/>
-              <a:t>.</a:t>
-            </a:r>
-          </a:p>
-          <a:p>
-            <a:pPr marL="835025" lvl="1" indent="-285750">
-              <a:lnSpc>
-                <a:spcPct val="150000"/>
-              </a:lnSpc>
-              <a:buFont typeface="Wingdings" panose="05000000000000000000" pitchFamily="2" charset="2"/>
-              <a:buChar char="ü"/>
-            </a:pPr>
-            <a:r>
-              <a:rPr lang="ko-KR" altLang="en-US" sz="1600" spc="-50" dirty="0"/>
-              <a:t>현실을 무조건 옹호할 </a:t>
-            </a:r>
-            <a:r>
-              <a:rPr lang="ko-KR" altLang="en-US" sz="1600" spc="-50" dirty="0" err="1"/>
-              <a:t>것이아니라</a:t>
-            </a:r>
-            <a:r>
-              <a:rPr lang="ko-KR" altLang="en-US" sz="1600" spc="-50" dirty="0"/>
-              <a:t> 냉철한 비판자의 면모를 보여야 한다는 것이다</a:t>
-            </a:r>
-            <a:r>
-              <a:rPr lang="en-US" altLang="ko-KR" sz="1600" spc="-50" dirty="0"/>
-              <a:t>.</a:t>
-            </a:r>
-          </a:p>
-          <a:p>
-            <a:pPr marL="835025" lvl="1" indent="-285750">
-              <a:lnSpc>
-                <a:spcPct val="150000"/>
-              </a:lnSpc>
-              <a:buFont typeface="Wingdings" panose="05000000000000000000" pitchFamily="2" charset="2"/>
-              <a:buChar char="ü"/>
-            </a:pPr>
-            <a:r>
-              <a:rPr lang="ko-KR" altLang="en-US" sz="1600" spc="-50" dirty="0"/>
-              <a:t>막연히 부정의를 시정해야 한다고 말하는 것이 아니라 실천에 옮겨</a:t>
-            </a:r>
-            <a:r>
-              <a:rPr lang="en-US" altLang="ko-KR" sz="1600" spc="-50" dirty="0"/>
-              <a:t>, </a:t>
-            </a:r>
-            <a:r>
-              <a:rPr lang="ko-KR" altLang="en-US" sz="1600" spc="-50" dirty="0"/>
-              <a:t>구체적 방안을 제시하는 것이 필요하다</a:t>
-            </a:r>
-            <a:r>
-              <a:rPr lang="en-US" altLang="ko-KR" sz="1600" spc="-50"/>
-              <a:t>.</a:t>
-            </a:r>
-            <a:endParaRPr lang="en-US" altLang="ko-KR" sz="1600" spc="-50" dirty="0"/>
-          </a:p>
-        </p:txBody>
-      </p:sp>
-    </p:spTree>
-    <p:extLst>
-      <p:ext uri="{BB962C8B-B14F-4D97-AF65-F5344CB8AC3E}">
-        <p14:creationId xmlns:p14="http://schemas.microsoft.com/office/powerpoint/2010/main" val="651776360"/>
-      </p:ext>
-    </p:extLst>
-  </p:cSld>
-  <p:clrMapOvr>
-    <a:masterClrMapping/>
-  </p:clrMapOvr>
-</p:sld>
-</file>
-
-<file path=ppt/slides/slide25.xml><?xml version="1.0" encoding="utf-8"?>
-<p:sld xmlns:a="http://schemas.openxmlformats.org/drawingml/2006/main" xmlns:r="http://schemas.openxmlformats.org/officeDocument/2006/relationships" xmlns:p="http://schemas.openxmlformats.org/presentationml/2006/main">
-  <p:cSld>
-    <p:spTree>
-      <p:nvGrpSpPr>
-        <p:cNvPr id="1" name="">
-          <a:extLst>
-            <a:ext uri="{FF2B5EF4-FFF2-40B4-BE49-F238E27FC236}">
-              <a16:creationId xmlns:a16="http://schemas.microsoft.com/office/drawing/2014/main" id="{C9302297-4B80-D577-A759-EE9E2232088A}"/>
-            </a:ext>
-          </a:extLst>
-        </p:cNvPr>
-        <p:cNvGrpSpPr/>
-        <p:nvPr/>
-      </p:nvGrpSpPr>
-      <p:grpSpPr>
-        <a:xfrm>
-          <a:off x="0" y="0"/>
-          <a:ext cx="0" cy="0"/>
-          <a:chOff x="0" y="0"/>
-          <a:chExt cx="0" cy="0"/>
-        </a:xfrm>
-      </p:grpSpPr>
-      <p:sp>
-        <p:nvSpPr>
-          <p:cNvPr id="2" name="제목 1">
-            <a:extLst>
-              <a:ext uri="{FF2B5EF4-FFF2-40B4-BE49-F238E27FC236}">
-                <a16:creationId xmlns:a16="http://schemas.microsoft.com/office/drawing/2014/main" id="{55B4E12C-4297-D051-C1B2-AA73EF122763}"/>
-              </a:ext>
-            </a:extLst>
-          </p:cNvPr>
-          <p:cNvSpPr>
-            <a:spLocks noGrp="1"/>
-          </p:cNvSpPr>
-          <p:nvPr>
-            <p:ph type="title"/>
-          </p:nvPr>
-        </p:nvSpPr>
-        <p:spPr/>
-        <p:txBody>
-          <a:bodyPr/>
-          <a:lstStyle/>
-          <a:p>
-            <a:r>
-              <a:rPr lang="ko-KR" altLang="en-US" dirty="0"/>
-              <a:t>공리주의적 정의관</a:t>
-            </a:r>
-          </a:p>
-        </p:txBody>
-      </p:sp>
-      <p:sp>
-        <p:nvSpPr>
-          <p:cNvPr id="4" name="슬라이드 번호 개체 틀 3">
-            <a:extLst>
-              <a:ext uri="{FF2B5EF4-FFF2-40B4-BE49-F238E27FC236}">
-                <a16:creationId xmlns:a16="http://schemas.microsoft.com/office/drawing/2014/main" id="{66B14CA6-9B52-CFD5-78BD-16E5E6A70C48}"/>
-              </a:ext>
-            </a:extLst>
-          </p:cNvPr>
-          <p:cNvSpPr>
-            <a:spLocks noGrp="1"/>
-          </p:cNvSpPr>
-          <p:nvPr>
-            <p:ph type="sldNum" sz="quarter" idx="12"/>
-          </p:nvPr>
-        </p:nvSpPr>
-        <p:spPr/>
-        <p:txBody>
-          <a:bodyPr/>
-          <a:lstStyle/>
-          <a:p>
-            <a:fld id="{109C872D-39A9-4065-8BF3-6A613116E2A1}" type="slidenum">
-              <a:rPr lang="ko-KR" altLang="en-US" smtClean="0"/>
-              <a:t>25</a:t>
-            </a:fld>
-            <a:endParaRPr lang="ko-KR" altLang="en-US"/>
-          </a:p>
-        </p:txBody>
-      </p:sp>
-      <p:sp>
-        <p:nvSpPr>
-          <p:cNvPr id="5" name="TextBox 4">
-            <a:extLst>
-              <a:ext uri="{FF2B5EF4-FFF2-40B4-BE49-F238E27FC236}">
-                <a16:creationId xmlns:a16="http://schemas.microsoft.com/office/drawing/2014/main" id="{1FBF17D4-9093-D36F-A268-C6EA6A55EC84}"/>
-              </a:ext>
-            </a:extLst>
-          </p:cNvPr>
-          <p:cNvSpPr txBox="1"/>
-          <p:nvPr/>
-        </p:nvSpPr>
-        <p:spPr>
-          <a:xfrm>
-            <a:off x="288790" y="958844"/>
-            <a:ext cx="11250267" cy="5584670"/>
-          </a:xfrm>
-          <a:prstGeom prst="rect">
-            <a:avLst/>
-          </a:prstGeom>
-          <a:noFill/>
-        </p:spPr>
-        <p:txBody>
-          <a:bodyPr wrap="square" rtlCol="0" anchor="t">
-            <a:spAutoFit/>
-          </a:bodyPr>
-          <a:lstStyle/>
-          <a:p>
-            <a:pPr marL="377825" indent="-285750">
-              <a:lnSpc>
-                <a:spcPct val="150000"/>
-              </a:lnSpc>
-              <a:buFont typeface="Arial" panose="020B0604020202020204" pitchFamily="34" charset="0"/>
-              <a:buChar char="•"/>
-            </a:pPr>
-            <a:r>
-              <a:rPr lang="ko-KR" altLang="en-US" sz="1600" spc="-50" dirty="0"/>
-              <a:t>공리주의적 정의관에서 바람직한 </a:t>
-            </a:r>
-            <a:r>
-              <a:rPr lang="ko-KR" altLang="en-US" sz="1600" spc="-50" dirty="0" err="1"/>
-              <a:t>분배란</a:t>
-            </a:r>
-            <a:r>
-              <a:rPr lang="ko-KR" altLang="en-US" sz="1600" spc="-50" dirty="0"/>
-              <a:t> 그 사회의 총체적 후생을 극대화할 수 있는 분배여야 한다는 것이 핵심이다</a:t>
-            </a:r>
-            <a:r>
-              <a:rPr lang="en-US" altLang="ko-KR" sz="1600" spc="-50" dirty="0"/>
-              <a:t>.</a:t>
-            </a:r>
-          </a:p>
-          <a:p>
-            <a:pPr marL="835025" lvl="1" indent="-285750">
-              <a:lnSpc>
-                <a:spcPct val="150000"/>
-              </a:lnSpc>
-              <a:buFont typeface="Wingdings" panose="05000000000000000000" pitchFamily="2" charset="2"/>
-              <a:buChar char="ü"/>
-            </a:pPr>
-            <a:r>
-              <a:rPr lang="ko-KR" altLang="en-US" sz="1600" spc="-50" dirty="0" err="1"/>
-              <a:t>벤담</a:t>
-            </a:r>
-            <a:r>
-              <a:rPr lang="en-US" altLang="ko-KR" sz="1600" spc="-50" dirty="0"/>
-              <a:t>(J. Bentham)</a:t>
-            </a:r>
-            <a:r>
-              <a:rPr lang="ko-KR" altLang="en-US" sz="1600" spc="-50" dirty="0"/>
-              <a:t>의 </a:t>
-            </a:r>
-            <a:r>
-              <a:rPr lang="en-US" altLang="ko-KR" sz="1600" spc="-50" dirty="0"/>
-              <a:t>‘</a:t>
-            </a:r>
-            <a:r>
-              <a:rPr lang="ko-KR" altLang="en-US" sz="1600" spc="-50" dirty="0"/>
-              <a:t>최대다수의 최대행복</a:t>
-            </a:r>
-            <a:r>
-              <a:rPr lang="en-US" altLang="ko-KR" sz="1600" spc="-50" dirty="0"/>
-              <a:t>‘ </a:t>
-            </a:r>
-            <a:r>
-              <a:rPr lang="ko-KR" altLang="en-US" sz="1600" spc="-50" dirty="0"/>
-              <a:t>이라는 말에 잘 나타나 있다</a:t>
-            </a:r>
-            <a:r>
-              <a:rPr lang="en-US" altLang="ko-KR" sz="1600" spc="-50" dirty="0"/>
-              <a:t>.</a:t>
-            </a:r>
-          </a:p>
-          <a:p>
-            <a:pPr marL="377825" indent="-285750">
-              <a:lnSpc>
-                <a:spcPct val="150000"/>
-              </a:lnSpc>
-              <a:buFont typeface="Arial" panose="020B0604020202020204" pitchFamily="34" charset="0"/>
-              <a:buChar char="•"/>
-            </a:pPr>
-            <a:r>
-              <a:rPr lang="ko-KR" altLang="en-US" sz="1600" spc="-50" dirty="0"/>
-              <a:t>최대다수의 최대행복을 가져오는 분배상태란 구체적으로 어떤 상태인지 알아보자</a:t>
-            </a:r>
-            <a:r>
-              <a:rPr lang="en-US" altLang="ko-KR" sz="1600" spc="-50" dirty="0"/>
-              <a:t>.</a:t>
-            </a:r>
-          </a:p>
-          <a:p>
-            <a:pPr marL="835025" lvl="1" indent="-285750">
-              <a:lnSpc>
-                <a:spcPct val="150000"/>
-              </a:lnSpc>
-              <a:buFont typeface="Wingdings" panose="05000000000000000000" pitchFamily="2" charset="2"/>
-              <a:buChar char="ü"/>
-            </a:pPr>
-            <a:r>
-              <a:rPr lang="ko-KR" altLang="en-US" sz="1600" spc="-50" dirty="0"/>
-              <a:t>물질적 가치가 모든 사람에게 고루 나누어진 상태 혹은 소수가 독점하고 있는 상태</a:t>
-            </a:r>
-            <a:r>
-              <a:rPr lang="en-US" altLang="ko-KR" sz="1600" spc="-50" dirty="0"/>
-              <a:t>, </a:t>
-            </a:r>
-            <a:r>
-              <a:rPr lang="ko-KR" altLang="en-US" sz="1600" spc="-50" dirty="0"/>
-              <a:t>둘 중 한마디로 답하기는 어렵다</a:t>
-            </a:r>
-            <a:r>
-              <a:rPr lang="en-US" altLang="ko-KR" sz="1600" spc="-50" dirty="0"/>
-              <a:t>.</a:t>
-            </a:r>
-          </a:p>
-          <a:p>
-            <a:pPr marL="1292225" lvl="2" indent="-285750">
-              <a:lnSpc>
-                <a:spcPct val="150000"/>
-              </a:lnSpc>
-              <a:buFont typeface="Wingdings" panose="05000000000000000000" pitchFamily="2" charset="2"/>
-              <a:buChar char="Ø"/>
-            </a:pPr>
-            <a:r>
-              <a:rPr lang="ko-KR" altLang="en-US" sz="1600" spc="-50" dirty="0" err="1"/>
-              <a:t>공리주의적인</a:t>
-            </a:r>
-            <a:r>
-              <a:rPr lang="ko-KR" altLang="en-US" sz="1600" spc="-50" dirty="0"/>
-              <a:t> 정의의 원칙이 적용되는 상황에 따라 다르기 때문이다</a:t>
-            </a:r>
-            <a:r>
-              <a:rPr lang="en-US" altLang="ko-KR" sz="1600" spc="-50" dirty="0"/>
-              <a:t>.</a:t>
-            </a:r>
-          </a:p>
-          <a:p>
-            <a:pPr marL="377825" indent="-285750">
-              <a:lnSpc>
-                <a:spcPct val="150000"/>
-              </a:lnSpc>
-              <a:buFont typeface="Arial" panose="020B0604020202020204" pitchFamily="34" charset="0"/>
-              <a:buChar char="•"/>
-            </a:pPr>
-            <a:r>
-              <a:rPr lang="ko-KR" altLang="en-US" sz="1600" spc="-50" dirty="0"/>
-              <a:t>그럼에도 불구하고 일반적으로 공리주의적 정의관을 가진 사람들은 평등한 분배에 호의적인 태도를 갖고 있다는 점이다</a:t>
-            </a:r>
-            <a:r>
-              <a:rPr lang="en-US" altLang="ko-KR" sz="1600" spc="-50" dirty="0"/>
-              <a:t>.</a:t>
-            </a:r>
-          </a:p>
-          <a:p>
-            <a:pPr marL="835025" lvl="1" indent="-285750">
-              <a:lnSpc>
-                <a:spcPct val="150000"/>
-              </a:lnSpc>
-              <a:buFont typeface="Wingdings" panose="05000000000000000000" pitchFamily="2" charset="2"/>
-              <a:buChar char="ü"/>
-            </a:pPr>
-            <a:r>
-              <a:rPr lang="ko-KR" altLang="en-US" sz="1600" spc="-50" dirty="0"/>
-              <a:t>특히 </a:t>
-            </a:r>
-            <a:r>
-              <a:rPr lang="ko-KR" altLang="en-US" sz="1600" spc="-50" dirty="0" err="1"/>
-              <a:t>벤담이</a:t>
-            </a:r>
-            <a:r>
-              <a:rPr lang="ko-KR" altLang="en-US" sz="1600" spc="-50" dirty="0"/>
-              <a:t> 사회의 행복 총합을 계산할 때 </a:t>
-            </a:r>
-            <a:r>
-              <a:rPr lang="en-US" altLang="ko-KR" sz="1600" spc="-50" dirty="0"/>
-              <a:t>‘</a:t>
-            </a:r>
-            <a:r>
-              <a:rPr lang="ko-KR" altLang="en-US" sz="1600" spc="-50" dirty="0"/>
-              <a:t>모든 사람이 한 몫으로서 포함되어야 하며</a:t>
-            </a:r>
-            <a:r>
-              <a:rPr lang="en-US" altLang="ko-KR" sz="1600" spc="-50" dirty="0"/>
-              <a:t>, </a:t>
-            </a:r>
-            <a:r>
-              <a:rPr lang="ko-KR" altLang="en-US" sz="1600" spc="-50" dirty="0"/>
-              <a:t>그 어느 누구도 한 몫 이상으로 셈하면 안된다</a:t>
-            </a:r>
-            <a:r>
-              <a:rPr lang="en-US" altLang="ko-KR" sz="1600" spc="-50" dirty="0"/>
-              <a:t>.’ </a:t>
-            </a:r>
-            <a:r>
-              <a:rPr lang="ko-KR" altLang="en-US" sz="1600" spc="-50" dirty="0"/>
-              <a:t>라고 말 한 것이 좋은 예이다</a:t>
-            </a:r>
-            <a:r>
-              <a:rPr lang="en-US" altLang="ko-KR" sz="1600" spc="-50" dirty="0"/>
-              <a:t>.</a:t>
-            </a:r>
-          </a:p>
-          <a:p>
-            <a:pPr marL="377825" indent="-285750">
-              <a:lnSpc>
-                <a:spcPct val="150000"/>
-              </a:lnSpc>
-              <a:buFont typeface="Arial" panose="020B0604020202020204" pitchFamily="34" charset="0"/>
-              <a:buChar char="•"/>
-            </a:pPr>
-            <a:r>
-              <a:rPr lang="ko-KR" altLang="en-US" sz="1600" spc="-50" dirty="0"/>
-              <a:t>반대로 공리주의적 정의관은 불균등한 분배 상태를 정당화시킬 때도 있다</a:t>
-            </a:r>
-            <a:r>
-              <a:rPr lang="en-US" altLang="ko-KR" sz="1600" spc="-50" dirty="0"/>
-              <a:t>. </a:t>
-            </a:r>
-          </a:p>
-          <a:p>
-            <a:pPr marL="835025" lvl="1" indent="-285750">
-              <a:lnSpc>
-                <a:spcPct val="150000"/>
-              </a:lnSpc>
-              <a:buFont typeface="Wingdings" panose="05000000000000000000" pitchFamily="2" charset="2"/>
-              <a:buChar char="ü"/>
-            </a:pPr>
-            <a:r>
-              <a:rPr lang="ko-KR" altLang="en-US" sz="1600" spc="-50" dirty="0"/>
-              <a:t>엄청난 소득을 얻고 있으면서도 소득의 한계효용이 떨어지지 않는 사람이 있다면</a:t>
-            </a:r>
-            <a:r>
-              <a:rPr lang="en-US" altLang="ko-KR" sz="1600" spc="-50" dirty="0"/>
-              <a:t>, </a:t>
-            </a:r>
-            <a:r>
-              <a:rPr lang="ko-KR" altLang="en-US" sz="1600" spc="-50" dirty="0"/>
-              <a:t>공리주의적 원칙은 이 사람에게 더욱더 많은 소득을 분배해 주도록 요구하는 것이다</a:t>
-            </a:r>
-            <a:r>
-              <a:rPr lang="en-US" altLang="ko-KR" sz="1600" spc="-50" dirty="0"/>
-              <a:t>.</a:t>
-            </a:r>
-          </a:p>
-          <a:p>
-            <a:pPr marL="377825" indent="-285750">
-              <a:lnSpc>
-                <a:spcPct val="150000"/>
-              </a:lnSpc>
-              <a:buFont typeface="Arial" panose="020B0604020202020204" pitchFamily="34" charset="0"/>
-              <a:buChar char="•"/>
-            </a:pPr>
-            <a:r>
-              <a:rPr lang="ko-KR" altLang="en-US" sz="1600" spc="-50" dirty="0"/>
-              <a:t>공리주의의 가장 큰 문제는 실천과정에서 개인의 권리가 침해될 수 있다는 사실이다</a:t>
-            </a:r>
-            <a:r>
-              <a:rPr lang="en-US" altLang="ko-KR" sz="1600" spc="-50" dirty="0"/>
-              <a:t>.</a:t>
-            </a:r>
-          </a:p>
-          <a:p>
-            <a:pPr marL="835025" lvl="1" indent="-285750">
-              <a:lnSpc>
-                <a:spcPct val="150000"/>
-              </a:lnSpc>
-              <a:buFont typeface="Wingdings" panose="05000000000000000000" pitchFamily="2" charset="2"/>
-              <a:buChar char="ü"/>
-            </a:pPr>
-            <a:r>
-              <a:rPr lang="ko-KR" altLang="en-US" sz="1600" spc="-50" dirty="0"/>
-              <a:t>한 사람이 다른 사람에게 부를 이전시켜 사회후생이 증가할 때</a:t>
-            </a:r>
-            <a:r>
-              <a:rPr lang="en-US" altLang="ko-KR" sz="1600" spc="-50" dirty="0"/>
-              <a:t>, </a:t>
-            </a:r>
-            <a:r>
-              <a:rPr lang="ko-KR" altLang="en-US" sz="1600" spc="-50" dirty="0"/>
-              <a:t>개인의 정당한 권리가 침해된다면 큰 문제가 된다</a:t>
-            </a:r>
-            <a:r>
-              <a:rPr lang="en-US" altLang="ko-KR" sz="1600" spc="-50" dirty="0"/>
-              <a:t>.</a:t>
-            </a:r>
-          </a:p>
-          <a:p>
-            <a:pPr marL="377825" indent="-285750">
-              <a:lnSpc>
-                <a:spcPct val="150000"/>
-              </a:lnSpc>
-              <a:buFont typeface="Arial" panose="020B0604020202020204" pitchFamily="34" charset="0"/>
-              <a:buChar char="•"/>
-            </a:pPr>
-            <a:r>
-              <a:rPr lang="ko-KR" altLang="en-US" sz="1600" spc="-50" dirty="0"/>
-              <a:t>또 공리주의는 개인간의 효용비교를 전제로 하기 때문에 비판의 대상이 되기도 한다</a:t>
-            </a:r>
-            <a:r>
-              <a:rPr lang="en-US" altLang="ko-KR" sz="1600" spc="-50" dirty="0"/>
-              <a:t>.</a:t>
-            </a:r>
-          </a:p>
-          <a:p>
-            <a:pPr marL="377825" indent="-285750">
-              <a:lnSpc>
-                <a:spcPct val="150000"/>
-              </a:lnSpc>
-              <a:buFont typeface="Arial" panose="020B0604020202020204" pitchFamily="34" charset="0"/>
-              <a:buChar char="•"/>
-            </a:pPr>
-            <a:r>
-              <a:rPr lang="ko-KR" altLang="en-US" sz="1600" spc="-50" dirty="0"/>
-              <a:t>이처럼 적지 않은 문제에도 불구하고 사회 후생을 증가시킨다는 점에서 실용성</a:t>
-            </a:r>
-            <a:r>
-              <a:rPr lang="en-US" altLang="ko-KR" sz="1600" spc="-50" dirty="0"/>
-              <a:t>, </a:t>
-            </a:r>
-            <a:r>
-              <a:rPr lang="ko-KR" altLang="en-US" sz="1600" spc="-50" dirty="0"/>
-              <a:t>현실성을 갖추고 있어 호소력이 있다</a:t>
-            </a:r>
-            <a:r>
-              <a:rPr lang="en-US" altLang="ko-KR" sz="1600" spc="-50" dirty="0"/>
-              <a:t>.</a:t>
-            </a:r>
-          </a:p>
-        </p:txBody>
-      </p:sp>
-    </p:spTree>
-    <p:extLst>
-      <p:ext uri="{BB962C8B-B14F-4D97-AF65-F5344CB8AC3E}">
-        <p14:creationId xmlns:p14="http://schemas.microsoft.com/office/powerpoint/2010/main" val="3980124907"/>
-      </p:ext>
-    </p:extLst>
-  </p:cSld>
-  <p:clrMapOvr>
-    <a:masterClrMapping/>
-  </p:clrMapOvr>
-</p:sld>
-</file>
-
-<file path=ppt/slides/slide26.xml><?xml version="1.0" encoding="utf-8"?>
-<p:sld xmlns:a="http://schemas.openxmlformats.org/drawingml/2006/main" xmlns:r="http://schemas.openxmlformats.org/officeDocument/2006/relationships" xmlns:p="http://schemas.openxmlformats.org/presentationml/2006/main">
-  <p:cSld>
-    <p:spTree>
-      <p:nvGrpSpPr>
-        <p:cNvPr id="1" name="">
-          <a:extLst>
-            <a:ext uri="{FF2B5EF4-FFF2-40B4-BE49-F238E27FC236}">
-              <a16:creationId xmlns:a16="http://schemas.microsoft.com/office/drawing/2014/main" id="{DA62FD1C-81BE-A33F-23C2-F4CB2336C76E}"/>
-            </a:ext>
-          </a:extLst>
-        </p:cNvPr>
-        <p:cNvGrpSpPr/>
-        <p:nvPr/>
-      </p:nvGrpSpPr>
-      <p:grpSpPr>
-        <a:xfrm>
-          <a:off x="0" y="0"/>
-          <a:ext cx="0" cy="0"/>
-          <a:chOff x="0" y="0"/>
-          <a:chExt cx="0" cy="0"/>
-        </a:xfrm>
-      </p:grpSpPr>
-      <p:sp>
-        <p:nvSpPr>
-          <p:cNvPr id="2" name="제목 1">
-            <a:extLst>
-              <a:ext uri="{FF2B5EF4-FFF2-40B4-BE49-F238E27FC236}">
-                <a16:creationId xmlns:a16="http://schemas.microsoft.com/office/drawing/2014/main" id="{298FE5D6-BF1F-ED1A-7F84-AB55B87D511E}"/>
-              </a:ext>
-            </a:extLst>
-          </p:cNvPr>
-          <p:cNvSpPr>
-            <a:spLocks noGrp="1"/>
-          </p:cNvSpPr>
-          <p:nvPr>
-            <p:ph type="title"/>
-          </p:nvPr>
-        </p:nvSpPr>
-        <p:spPr/>
-        <p:txBody>
-          <a:bodyPr/>
-          <a:lstStyle/>
-          <a:p>
-            <a:r>
-              <a:rPr lang="ko-KR" altLang="en-US" dirty="0" err="1"/>
-              <a:t>롤즈의</a:t>
-            </a:r>
-            <a:r>
-              <a:rPr lang="ko-KR" altLang="en-US" dirty="0"/>
-              <a:t> 최소극대화원칙</a:t>
-            </a:r>
-          </a:p>
-        </p:txBody>
-      </p:sp>
-      <p:sp>
-        <p:nvSpPr>
-          <p:cNvPr id="4" name="슬라이드 번호 개체 틀 3">
-            <a:extLst>
-              <a:ext uri="{FF2B5EF4-FFF2-40B4-BE49-F238E27FC236}">
-                <a16:creationId xmlns:a16="http://schemas.microsoft.com/office/drawing/2014/main" id="{738F09F0-EEE5-C21F-E865-07405E78D299}"/>
-              </a:ext>
-            </a:extLst>
-          </p:cNvPr>
-          <p:cNvSpPr>
-            <a:spLocks noGrp="1"/>
-          </p:cNvSpPr>
-          <p:nvPr>
-            <p:ph type="sldNum" sz="quarter" idx="12"/>
-          </p:nvPr>
-        </p:nvSpPr>
-        <p:spPr/>
-        <p:txBody>
-          <a:bodyPr/>
-          <a:lstStyle/>
-          <a:p>
-            <a:fld id="{109C872D-39A9-4065-8BF3-6A613116E2A1}" type="slidenum">
-              <a:rPr lang="ko-KR" altLang="en-US" smtClean="0"/>
-              <a:t>26</a:t>
-            </a:fld>
-            <a:endParaRPr lang="ko-KR" altLang="en-US"/>
-          </a:p>
-        </p:txBody>
-      </p:sp>
-      <p:sp>
-        <p:nvSpPr>
-          <p:cNvPr id="5" name="TextBox 4">
-            <a:extLst>
-              <a:ext uri="{FF2B5EF4-FFF2-40B4-BE49-F238E27FC236}">
-                <a16:creationId xmlns:a16="http://schemas.microsoft.com/office/drawing/2014/main" id="{EB1440F7-7E14-DC15-BFDC-1F4DAEA8D9F2}"/>
-              </a:ext>
-            </a:extLst>
-          </p:cNvPr>
-          <p:cNvSpPr txBox="1"/>
-          <p:nvPr/>
-        </p:nvSpPr>
-        <p:spPr>
-          <a:xfrm>
-            <a:off x="288790" y="958844"/>
-            <a:ext cx="11250267" cy="5584670"/>
-          </a:xfrm>
-          <a:prstGeom prst="rect">
-            <a:avLst/>
-          </a:prstGeom>
-          <a:noFill/>
-        </p:spPr>
-        <p:txBody>
-          <a:bodyPr wrap="square" rtlCol="0" anchor="t">
-            <a:spAutoFit/>
-          </a:bodyPr>
-          <a:lstStyle/>
-          <a:p>
-            <a:pPr marL="377825" indent="-285750">
-              <a:lnSpc>
-                <a:spcPct val="150000"/>
-              </a:lnSpc>
-              <a:buFont typeface="Arial" panose="020B0604020202020204" pitchFamily="34" charset="0"/>
-              <a:buChar char="•"/>
-            </a:pPr>
-            <a:r>
-              <a:rPr lang="ko-KR" altLang="en-US" sz="1600" spc="-50" dirty="0"/>
-              <a:t>현대 철학계에서 분배의 정의 이론의 거봉으로 인정받는 </a:t>
-            </a:r>
-            <a:r>
-              <a:rPr lang="ko-KR" altLang="en-US" sz="1600" spc="-50" dirty="0" err="1"/>
-              <a:t>롤즈</a:t>
-            </a:r>
-            <a:r>
-              <a:rPr lang="en-US" altLang="ko-KR" sz="1600" spc="-50" dirty="0"/>
-              <a:t>(J. Rawls, 1971)</a:t>
-            </a:r>
-            <a:r>
-              <a:rPr lang="ko-KR" altLang="en-US" sz="1600" spc="-50" dirty="0"/>
-              <a:t>의 정의관은 평등주의의 변형이다</a:t>
-            </a:r>
-            <a:r>
-              <a:rPr lang="en-US" altLang="ko-KR" sz="1600" spc="-50" dirty="0"/>
-              <a:t>.</a:t>
-            </a:r>
-          </a:p>
-          <a:p>
-            <a:pPr marL="835025" lvl="1" indent="-285750">
-              <a:lnSpc>
-                <a:spcPct val="150000"/>
-              </a:lnSpc>
-              <a:buFont typeface="Wingdings" panose="05000000000000000000" pitchFamily="2" charset="2"/>
-              <a:buChar char="ü"/>
-            </a:pPr>
-            <a:r>
-              <a:rPr lang="ko-KR" altLang="en-US" sz="1600" spc="-50" dirty="0" err="1"/>
-              <a:t>롤즈를</a:t>
-            </a:r>
-            <a:r>
-              <a:rPr lang="ko-KR" altLang="en-US" sz="1600" spc="-50" dirty="0"/>
-              <a:t> 자유주의자</a:t>
-            </a:r>
-            <a:r>
-              <a:rPr lang="en-US" altLang="ko-KR" sz="1600" spc="-50" dirty="0"/>
-              <a:t> </a:t>
-            </a:r>
-            <a:r>
-              <a:rPr lang="ko-KR" altLang="en-US" sz="1600" spc="-50" dirty="0"/>
-              <a:t>혹은 평등주의자로 볼 것인지 논란이 일기도 하지만</a:t>
-            </a:r>
-            <a:r>
-              <a:rPr lang="en-US" altLang="ko-KR" sz="1600" spc="-50" dirty="0"/>
-              <a:t>, </a:t>
-            </a:r>
-            <a:r>
-              <a:rPr lang="ko-KR" altLang="en-US" sz="1600" spc="-50" dirty="0" err="1"/>
-              <a:t>샌델</a:t>
-            </a:r>
-            <a:r>
-              <a:rPr lang="en-US" altLang="ko-KR" sz="1600" spc="-50" dirty="0"/>
-              <a:t>(M. Sandel, 2009)</a:t>
-            </a:r>
-            <a:r>
-              <a:rPr lang="ko-KR" altLang="en-US" sz="1600" spc="-50" dirty="0"/>
-              <a:t>은 </a:t>
-            </a:r>
-            <a:r>
-              <a:rPr lang="ko-KR" altLang="en-US" sz="1600" spc="-50" dirty="0" err="1"/>
-              <a:t>롤즈를</a:t>
-            </a:r>
-            <a:r>
-              <a:rPr lang="ko-KR" altLang="en-US" sz="1600" spc="-50" dirty="0"/>
-              <a:t> 평등주의적 자유주의자라고 부른다</a:t>
-            </a:r>
-            <a:r>
-              <a:rPr lang="en-US" altLang="ko-KR" sz="1600" spc="-50" dirty="0"/>
-              <a:t>.</a:t>
-            </a:r>
-          </a:p>
-          <a:p>
-            <a:pPr marL="377825" indent="-285750">
-              <a:lnSpc>
-                <a:spcPct val="150000"/>
-              </a:lnSpc>
-              <a:buFont typeface="Arial" panose="020B0604020202020204" pitchFamily="34" charset="0"/>
-              <a:buChar char="•"/>
-            </a:pPr>
-            <a:r>
-              <a:rPr lang="ko-KR" altLang="en-US" sz="1600" spc="-50" dirty="0" err="1"/>
-              <a:t>롤즈의</a:t>
-            </a:r>
-            <a:r>
-              <a:rPr lang="ko-KR" altLang="en-US" sz="1600" spc="-50" dirty="0"/>
-              <a:t> 정의관은 원초적 상황이라는 가상적 상황으로부터 출발한다</a:t>
-            </a:r>
-            <a:r>
-              <a:rPr lang="en-US" altLang="ko-KR" sz="1600" spc="-50" dirty="0"/>
-              <a:t>.</a:t>
-            </a:r>
-          </a:p>
-          <a:p>
-            <a:pPr marL="835025" lvl="1" indent="-285750">
-              <a:lnSpc>
-                <a:spcPct val="150000"/>
-              </a:lnSpc>
-              <a:buFont typeface="Wingdings" panose="05000000000000000000" pitchFamily="2" charset="2"/>
-              <a:buChar char="ü"/>
-            </a:pPr>
-            <a:r>
-              <a:rPr lang="ko-KR" altLang="en-US" sz="1600" spc="-50" dirty="0"/>
-              <a:t>이 상태는 아무런 사회질서가 없고</a:t>
-            </a:r>
-            <a:r>
-              <a:rPr lang="en-US" altLang="ko-KR" sz="1600" spc="-50" dirty="0"/>
-              <a:t>, </a:t>
-            </a:r>
-            <a:r>
-              <a:rPr lang="ko-KR" altLang="en-US" sz="1600" spc="-50" dirty="0"/>
-              <a:t>모든 사람이 무지의 장막에 가려 어떻게 될지 모르는 상태라고 설명한다</a:t>
-            </a:r>
-            <a:r>
-              <a:rPr lang="en-US" altLang="ko-KR" sz="1600" spc="-50" dirty="0"/>
-              <a:t>.</a:t>
-            </a:r>
-          </a:p>
-          <a:p>
-            <a:pPr marL="835025" lvl="1" indent="-285750">
-              <a:lnSpc>
-                <a:spcPct val="150000"/>
-              </a:lnSpc>
-              <a:buFont typeface="Wingdings" panose="05000000000000000000" pitchFamily="2" charset="2"/>
-              <a:buChar char="ü"/>
-            </a:pPr>
-            <a:r>
-              <a:rPr lang="ko-KR" altLang="en-US" sz="1600" spc="-50" dirty="0"/>
-              <a:t>이 상황 속에서 사람들은 사회질서의 선택과정에서 공정하고 편파적이지 않은 기준을 선택하게 된다는 것이다</a:t>
-            </a:r>
-            <a:r>
-              <a:rPr lang="en-US" altLang="ko-KR" sz="1600" spc="-50" dirty="0"/>
-              <a:t>.</a:t>
-            </a:r>
-          </a:p>
-          <a:p>
-            <a:pPr marL="377825" indent="-285750">
-              <a:lnSpc>
-                <a:spcPct val="150000"/>
-              </a:lnSpc>
-              <a:buFont typeface="Arial" panose="020B0604020202020204" pitchFamily="34" charset="0"/>
-              <a:buChar char="•"/>
-            </a:pPr>
-            <a:r>
-              <a:rPr lang="ko-KR" altLang="en-US" sz="1600" spc="-50" dirty="0"/>
-              <a:t>이런 원초적 상황에서 사람들이 선택할 것이라 기대할 수 있는 정의의 원칙으로 다음 두 가지를 제시한다</a:t>
-            </a:r>
-            <a:r>
-              <a:rPr lang="en-US" altLang="ko-KR" sz="1600" spc="-50" dirty="0"/>
-              <a:t>.</a:t>
-            </a:r>
-          </a:p>
-          <a:p>
-            <a:pPr marL="835025" lvl="1" indent="-285750">
-              <a:lnSpc>
-                <a:spcPct val="150000"/>
-              </a:lnSpc>
-              <a:buFont typeface="Wingdings" panose="05000000000000000000" pitchFamily="2" charset="2"/>
-              <a:buChar char="ü"/>
-            </a:pPr>
-            <a:r>
-              <a:rPr lang="ko-KR" altLang="en-US" sz="1600" spc="-50" dirty="0"/>
-              <a:t>첫째</a:t>
-            </a:r>
-            <a:r>
-              <a:rPr lang="en-US" altLang="ko-KR" sz="1600" spc="-50" dirty="0"/>
-              <a:t>, </a:t>
-            </a:r>
-            <a:r>
-              <a:rPr lang="ko-KR" altLang="en-US" sz="1600" spc="-50" dirty="0"/>
-              <a:t>모든 사람이 다른 사람들의 자유와 양립가능한 선에서 가장 광범위한 자유에 대한 동등한 권리를 가져야 한다</a:t>
-            </a:r>
-            <a:r>
-              <a:rPr lang="en-US" altLang="ko-KR" sz="1600" spc="-50" dirty="0"/>
-              <a:t>.</a:t>
-            </a:r>
-          </a:p>
-          <a:p>
-            <a:pPr marL="835025" lvl="1" indent="-285750">
-              <a:lnSpc>
-                <a:spcPct val="150000"/>
-              </a:lnSpc>
-              <a:buFont typeface="Wingdings" panose="05000000000000000000" pitchFamily="2" charset="2"/>
-              <a:buChar char="ü"/>
-            </a:pPr>
-            <a:r>
-              <a:rPr lang="ko-KR" altLang="en-US" sz="1600" spc="-50" dirty="0"/>
-              <a:t>둘째</a:t>
-            </a:r>
-            <a:r>
-              <a:rPr lang="en-US" altLang="ko-KR" sz="1600" spc="-50" dirty="0"/>
-              <a:t>,</a:t>
-            </a:r>
-            <a:r>
-              <a:rPr lang="ko-KR" altLang="en-US" sz="1600" spc="-50" dirty="0"/>
-              <a:t> 사회적</a:t>
-            </a:r>
-            <a:r>
-              <a:rPr lang="en-US" altLang="ko-KR" sz="1600" spc="-50" dirty="0"/>
-              <a:t>·</a:t>
-            </a:r>
-            <a:r>
-              <a:rPr lang="ko-KR" altLang="en-US" sz="1600" spc="-50" dirty="0"/>
-              <a:t>경제적 불평등은 다음의 두 조건을 모두 충족할 때</a:t>
-            </a:r>
-            <a:r>
-              <a:rPr lang="en-US" altLang="ko-KR" sz="1600" spc="-50" dirty="0"/>
-              <a:t>, </a:t>
-            </a:r>
-            <a:r>
-              <a:rPr lang="ko-KR" altLang="en-US" sz="1600" spc="-50" dirty="0"/>
-              <a:t>그 정당성을 인정받는다</a:t>
-            </a:r>
-            <a:r>
-              <a:rPr lang="en-US" altLang="ko-KR" sz="1600" spc="-50" dirty="0"/>
-              <a:t>. (</a:t>
-            </a:r>
-            <a:r>
-              <a:rPr lang="ko-KR" altLang="en-US" sz="1600" spc="-50" dirty="0"/>
-              <a:t>차등의 원칙</a:t>
-            </a:r>
-            <a:r>
-              <a:rPr lang="en-US" altLang="ko-KR" sz="1600" spc="-50" dirty="0"/>
-              <a:t>)</a:t>
-            </a:r>
-          </a:p>
-          <a:p>
-            <a:pPr marL="1292225" lvl="2" indent="-285750">
-              <a:lnSpc>
-                <a:spcPct val="150000"/>
-              </a:lnSpc>
-              <a:buFont typeface="Wingdings" panose="05000000000000000000" pitchFamily="2" charset="2"/>
-              <a:buChar char="Ø"/>
-            </a:pPr>
-            <a:r>
-              <a:rPr lang="ko-KR" altLang="en-US" sz="1600" spc="-50" dirty="0"/>
-              <a:t>불평등성이 모든 사람에게 이득이 되는 것을 기대할 수 있어야 한다</a:t>
-            </a:r>
-            <a:r>
-              <a:rPr lang="en-US" altLang="ko-KR" sz="1600" spc="-50" dirty="0"/>
-              <a:t>.</a:t>
-            </a:r>
-          </a:p>
-          <a:p>
-            <a:pPr marL="1292225" lvl="2" indent="-285750">
-              <a:lnSpc>
-                <a:spcPct val="150000"/>
-              </a:lnSpc>
-              <a:buFont typeface="Wingdings" panose="05000000000000000000" pitchFamily="2" charset="2"/>
-              <a:buChar char="Ø"/>
-            </a:pPr>
-            <a:r>
-              <a:rPr lang="ko-KR" altLang="en-US" sz="1600" spc="-50" dirty="0"/>
-              <a:t>모든 사람에게 기회가 개방된 직위 및 직책과 </a:t>
-            </a:r>
-            <a:r>
-              <a:rPr lang="ko-KR" altLang="en-US" sz="1600" spc="-50" dirty="0" err="1"/>
-              <a:t>결부되어서만</a:t>
-            </a:r>
-            <a:r>
-              <a:rPr lang="ko-KR" altLang="en-US" sz="1600" spc="-50" dirty="0"/>
-              <a:t> 불평등성이 존재해야 한다</a:t>
-            </a:r>
-            <a:r>
-              <a:rPr lang="en-US" altLang="ko-KR" sz="1600" spc="-50" dirty="0"/>
-              <a:t>.</a:t>
-            </a:r>
-          </a:p>
-          <a:p>
-            <a:pPr marL="377825" indent="-285750">
-              <a:lnSpc>
-                <a:spcPct val="150000"/>
-              </a:lnSpc>
-              <a:buFont typeface="Arial" panose="020B0604020202020204" pitchFamily="34" charset="0"/>
-              <a:buChar char="•"/>
-            </a:pPr>
-            <a:r>
-              <a:rPr lang="ko-KR" altLang="en-US" sz="1600" spc="-50" dirty="0" err="1"/>
-              <a:t>롤즈의</a:t>
-            </a:r>
-            <a:r>
-              <a:rPr lang="ko-KR" altLang="en-US" sz="1600" spc="-50" dirty="0"/>
-              <a:t> 정의관에서 평등주의적 개념이 선명히 드러나 있는 것은 두 번째 원칙</a:t>
-            </a:r>
-            <a:r>
-              <a:rPr lang="en-US" altLang="ko-KR" sz="1600" spc="-50" dirty="0"/>
-              <a:t>, </a:t>
-            </a:r>
-            <a:r>
-              <a:rPr lang="ko-KR" altLang="en-US" sz="1600" spc="-50" dirty="0"/>
-              <a:t>즉 차등의 원칙이다</a:t>
-            </a:r>
-            <a:r>
-              <a:rPr lang="en-US" altLang="ko-KR" sz="1600" spc="-50" dirty="0"/>
-              <a:t>.</a:t>
-            </a:r>
-          </a:p>
-          <a:p>
-            <a:pPr marL="835025" lvl="1" indent="-285750">
-              <a:lnSpc>
-                <a:spcPct val="150000"/>
-              </a:lnSpc>
-              <a:buFont typeface="Wingdings" panose="05000000000000000000" pitchFamily="2" charset="2"/>
-              <a:buChar char="ü"/>
-            </a:pPr>
-            <a:r>
-              <a:rPr lang="ko-KR" altLang="en-US" sz="1600" spc="-50" dirty="0"/>
-              <a:t>차등의 원칙을 통해 </a:t>
-            </a:r>
-            <a:r>
-              <a:rPr lang="en-US" altLang="ko-KR" sz="1600" spc="-50" dirty="0"/>
-              <a:t>‘</a:t>
-            </a:r>
-            <a:r>
-              <a:rPr lang="ko-KR" altLang="en-US" sz="1600" spc="-50" dirty="0"/>
-              <a:t>최소극대화의 원칙</a:t>
-            </a:r>
-            <a:r>
-              <a:rPr lang="en-US" altLang="ko-KR" sz="1600" spc="-50" dirty="0"/>
-              <a:t>’</a:t>
-            </a:r>
-            <a:r>
-              <a:rPr lang="ko-KR" altLang="en-US" sz="1600" spc="-50" dirty="0"/>
-              <a:t>을 도출할 수 있다고 설명하는데</a:t>
-            </a:r>
-            <a:r>
-              <a:rPr lang="en-US" altLang="ko-KR" sz="1600" spc="-50" dirty="0"/>
-              <a:t>, </a:t>
-            </a:r>
-            <a:r>
-              <a:rPr lang="ko-KR" altLang="en-US" sz="1600" spc="-50" dirty="0"/>
-              <a:t>한 사회의 가장 못사는 사람에게 가장 큰 이득이 돌아가도록 사회의 기본구조를 짜야 한다는 내용을 담고 있다</a:t>
-            </a:r>
-            <a:r>
-              <a:rPr lang="en-US" altLang="ko-KR" sz="1600" spc="-50" dirty="0"/>
-              <a:t>.</a:t>
-            </a:r>
-          </a:p>
-          <a:p>
-            <a:pPr marL="377825" indent="-285750">
-              <a:lnSpc>
-                <a:spcPct val="150000"/>
-              </a:lnSpc>
-              <a:buFont typeface="Arial" panose="020B0604020202020204" pitchFamily="34" charset="0"/>
-              <a:buChar char="•"/>
-            </a:pPr>
-            <a:r>
-              <a:rPr lang="ko-KR" altLang="en-US" sz="1600" spc="-50" dirty="0" err="1"/>
-              <a:t>롤즈</a:t>
-            </a:r>
-            <a:r>
-              <a:rPr lang="ko-KR" altLang="en-US" sz="1600" spc="-50" dirty="0"/>
-              <a:t> 정의관의 가장 큰 문제는 현실에 존재하지 않는 원초적 상황으로부터 정의의 원칙을 끌어냈다는 점이다</a:t>
-            </a:r>
-            <a:r>
-              <a:rPr lang="en-US" altLang="ko-KR" sz="1600" spc="-50" dirty="0"/>
-              <a:t>.</a:t>
-            </a:r>
-          </a:p>
-        </p:txBody>
-      </p:sp>
-    </p:spTree>
-    <p:extLst>
-      <p:ext uri="{BB962C8B-B14F-4D97-AF65-F5344CB8AC3E}">
-        <p14:creationId xmlns:p14="http://schemas.microsoft.com/office/powerpoint/2010/main" val="3479714049"/>
-      </p:ext>
-    </p:extLst>
-  </p:cSld>
-  <p:clrMapOvr>
-    <a:masterClrMapping/>
-  </p:clrMapOvr>
-</p:sld>
-</file>
-
-<file path=ppt/slides/slide27.xml><?xml version="1.0" encoding="utf-8"?>
-<p:sld xmlns:a="http://schemas.openxmlformats.org/drawingml/2006/main" xmlns:r="http://schemas.openxmlformats.org/officeDocument/2006/relationships" xmlns:p="http://schemas.openxmlformats.org/presentationml/2006/main">
-  <p:cSld>
-    <p:spTree>
-      <p:nvGrpSpPr>
-        <p:cNvPr id="1" name="">
-          <a:extLst>
-            <a:ext uri="{FF2B5EF4-FFF2-40B4-BE49-F238E27FC236}">
-              <a16:creationId xmlns:a16="http://schemas.microsoft.com/office/drawing/2014/main" id="{9AC8B0EB-74B1-B51C-A4E6-7DD41C0B047F}"/>
-            </a:ext>
-          </a:extLst>
-        </p:cNvPr>
-        <p:cNvGrpSpPr/>
-        <p:nvPr/>
-      </p:nvGrpSpPr>
-      <p:grpSpPr>
-        <a:xfrm>
-          <a:off x="0" y="0"/>
-          <a:ext cx="0" cy="0"/>
-          <a:chOff x="0" y="0"/>
-          <a:chExt cx="0" cy="0"/>
-        </a:xfrm>
-      </p:grpSpPr>
-      <p:pic>
-        <p:nvPicPr>
-          <p:cNvPr id="3" name="그림 2" descr="텍스트, 로고, 원, 폰트이(가) 표시된 사진&#10;&#10;AI 생성 콘텐츠는 정확하지 않을 수 있습니다.">
-            <a:extLst>
-              <a:ext uri="{FF2B5EF4-FFF2-40B4-BE49-F238E27FC236}">
-                <a16:creationId xmlns:a16="http://schemas.microsoft.com/office/drawing/2014/main" id="{C524993C-D1C3-8436-D8C1-21698BE6D1B3}"/>
-              </a:ext>
-            </a:extLst>
-          </p:cNvPr>
-          <p:cNvPicPr>
-            <a:picLocks noChangeAspect="1"/>
-          </p:cNvPicPr>
-          <p:nvPr/>
-        </p:nvPicPr>
-        <p:blipFill>
-          <a:blip r:embed="rId2">
-            <a:alphaModFix amt="20000"/>
-            <a:extLst>
-              <a:ext uri="{28A0092B-C50C-407E-A947-70E740481C1C}">
-                <a14:useLocalDpi xmlns:a14="http://schemas.microsoft.com/office/drawing/2010/main" val="0"/>
-              </a:ext>
-            </a:extLst>
-          </a:blip>
-          <a:stretch>
-            <a:fillRect/>
-          </a:stretch>
-        </p:blipFill>
-        <p:spPr>
-          <a:xfrm>
-            <a:off x="4012070" y="1673061"/>
-            <a:ext cx="4167861" cy="4167861"/>
-          </a:xfrm>
-          <a:prstGeom prst="rect">
-            <a:avLst/>
-          </a:prstGeom>
-        </p:spPr>
-      </p:pic>
-      <p:sp>
-        <p:nvSpPr>
-          <p:cNvPr id="2" name="제목 1">
-            <a:extLst>
-              <a:ext uri="{FF2B5EF4-FFF2-40B4-BE49-F238E27FC236}">
-                <a16:creationId xmlns:a16="http://schemas.microsoft.com/office/drawing/2014/main" id="{051A9577-CCBA-F474-5E82-99100C452E21}"/>
-              </a:ext>
-            </a:extLst>
-          </p:cNvPr>
-          <p:cNvSpPr>
-            <a:spLocks noGrp="1"/>
-          </p:cNvSpPr>
-          <p:nvPr>
-            <p:ph type="title"/>
-          </p:nvPr>
-        </p:nvSpPr>
-        <p:spPr>
-          <a:xfrm>
-            <a:off x="831850" y="1709739"/>
-            <a:ext cx="10515600" cy="2134292"/>
-          </a:xfrm>
-          <a:effectLst>
-            <a:reflection blurRad="50800" stA="45000" endPos="44000" dir="5400000" sy="-100000" algn="bl" rotWithShape="0"/>
-          </a:effectLst>
-        </p:spPr>
-        <p:txBody>
-          <a:bodyPr/>
-          <a:lstStyle/>
-          <a:p>
-            <a:r>
-              <a:rPr lang="en-US" altLang="ko-KR" b="1" i="0" spc="150">
-                <a:solidFill>
-                  <a:schemeClr val="accent2"/>
-                </a:solidFill>
-              </a:rPr>
-              <a:t>T</a:t>
-            </a:r>
-            <a:r>
-              <a:rPr lang="en-US" altLang="ko-KR" sz="5400" i="0" spc="100"/>
-              <a:t>hank you</a:t>
-            </a:r>
-            <a:endParaRPr lang="ko-KR" altLang="en-US" sz="5400" i="0" spc="100"/>
-          </a:p>
-        </p:txBody>
-      </p:sp>
-      <p:sp>
-        <p:nvSpPr>
-          <p:cNvPr id="4" name="슬라이드 번호 개체 틀 3">
-            <a:extLst>
-              <a:ext uri="{FF2B5EF4-FFF2-40B4-BE49-F238E27FC236}">
-                <a16:creationId xmlns:a16="http://schemas.microsoft.com/office/drawing/2014/main" id="{AF4898E0-926C-D8DA-8874-21A66F64BB68}"/>
-              </a:ext>
-            </a:extLst>
-          </p:cNvPr>
-          <p:cNvSpPr>
-            <a:spLocks noGrp="1"/>
-          </p:cNvSpPr>
-          <p:nvPr>
-            <p:ph type="sldNum" sz="quarter" idx="12"/>
-          </p:nvPr>
-        </p:nvSpPr>
-        <p:spPr/>
-        <p:txBody>
-          <a:bodyPr/>
-          <a:lstStyle/>
-          <a:p>
-            <a:fld id="{109C872D-39A9-4065-8BF3-6A613116E2A1}" type="slidenum">
-              <a:rPr lang="ko-KR" altLang="en-US" smtClean="0"/>
-              <a:t>27</a:t>
-            </a:fld>
-            <a:endParaRPr lang="ko-KR" altLang="en-US"/>
-          </a:p>
-        </p:txBody>
-      </p:sp>
-    </p:spTree>
-    <p:extLst>
-      <p:ext uri="{BB962C8B-B14F-4D97-AF65-F5344CB8AC3E}">
-        <p14:creationId xmlns:p14="http://schemas.microsoft.com/office/powerpoint/2010/main" val="3130404870"/>
       </p:ext>
     </p:extLst>
   </p:cSld>
@@ -15451,6 +15944,557 @@
     <p:extLst>
       <p:ext uri="{BB962C8B-B14F-4D97-AF65-F5344CB8AC3E}">
         <p14:creationId xmlns:p14="http://schemas.microsoft.com/office/powerpoint/2010/main" val="2957073077"/>
+      </p:ext>
+    </p:extLst>
+  </p:cSld>
+  <p:clrMapOvr>
+    <a:masterClrMapping/>
+  </p:clrMapOvr>
+</p:sld>
+</file>
+
+<file path=ppt/slides/slide30.xml><?xml version="1.0" encoding="utf-8"?>
+<p:sld xmlns:a="http://schemas.openxmlformats.org/drawingml/2006/main" xmlns:r="http://schemas.openxmlformats.org/officeDocument/2006/relationships" xmlns:p="http://schemas.openxmlformats.org/presentationml/2006/main">
+  <p:cSld>
+    <p:spTree>
+      <p:nvGrpSpPr>
+        <p:cNvPr id="1" name="">
+          <a:extLst>
+            <a:ext uri="{FF2B5EF4-FFF2-40B4-BE49-F238E27FC236}">
+              <a16:creationId xmlns:a16="http://schemas.microsoft.com/office/drawing/2014/main" id="{D7CE1F9D-D2C2-8892-CF3D-3C5B8C9D0632}"/>
+            </a:ext>
+          </a:extLst>
+        </p:cNvPr>
+        <p:cNvGrpSpPr/>
+        <p:nvPr/>
+      </p:nvGrpSpPr>
+      <p:grpSpPr>
+        <a:xfrm>
+          <a:off x="0" y="0"/>
+          <a:ext cx="0" cy="0"/>
+          <a:chOff x="0" y="0"/>
+          <a:chExt cx="0" cy="0"/>
+        </a:xfrm>
+      </p:grpSpPr>
+      <p:sp>
+        <p:nvSpPr>
+          <p:cNvPr id="2" name="제목 1">
+            <a:extLst>
+              <a:ext uri="{FF2B5EF4-FFF2-40B4-BE49-F238E27FC236}">
+                <a16:creationId xmlns:a16="http://schemas.microsoft.com/office/drawing/2014/main" id="{15BC7766-70D3-029D-9D16-4236757284E6}"/>
+              </a:ext>
+            </a:extLst>
+          </p:cNvPr>
+          <p:cNvSpPr>
+            <a:spLocks noGrp="1"/>
+          </p:cNvSpPr>
+          <p:nvPr>
+            <p:ph type="title"/>
+          </p:nvPr>
+        </p:nvSpPr>
+        <p:spPr/>
+        <p:txBody>
+          <a:bodyPr/>
+          <a:lstStyle/>
+          <a:p>
+            <a:r>
+              <a:rPr lang="ko-KR" altLang="en-US" dirty="0"/>
+              <a:t>재분배정책과 효율성</a:t>
+            </a:r>
+          </a:p>
+        </p:txBody>
+      </p:sp>
+      <p:sp>
+        <p:nvSpPr>
+          <p:cNvPr id="4" name="슬라이드 번호 개체 틀 3">
+            <a:extLst>
+              <a:ext uri="{FF2B5EF4-FFF2-40B4-BE49-F238E27FC236}">
+                <a16:creationId xmlns:a16="http://schemas.microsoft.com/office/drawing/2014/main" id="{6739D1CB-86FE-F78F-0C64-70966FFB7E61}"/>
+              </a:ext>
+            </a:extLst>
+          </p:cNvPr>
+          <p:cNvSpPr>
+            <a:spLocks noGrp="1"/>
+          </p:cNvSpPr>
+          <p:nvPr>
+            <p:ph type="sldNum" sz="quarter" idx="12"/>
+          </p:nvPr>
+        </p:nvSpPr>
+        <p:spPr/>
+        <p:txBody>
+          <a:bodyPr/>
+          <a:lstStyle/>
+          <a:p>
+            <a:fld id="{109C872D-39A9-4065-8BF3-6A613116E2A1}" type="slidenum">
+              <a:rPr lang="ko-KR" altLang="en-US" smtClean="0"/>
+              <a:t>30</a:t>
+            </a:fld>
+            <a:endParaRPr lang="ko-KR" altLang="en-US"/>
+          </a:p>
+        </p:txBody>
+      </p:sp>
+      <p:sp>
+        <p:nvSpPr>
+          <p:cNvPr id="3" name="TextBox 2">
+            <a:extLst>
+              <a:ext uri="{FF2B5EF4-FFF2-40B4-BE49-F238E27FC236}">
+                <a16:creationId xmlns:a16="http://schemas.microsoft.com/office/drawing/2014/main" id="{345AEA97-186D-4C10-C99C-03FFD6B04DC1}"/>
+              </a:ext>
+            </a:extLst>
+          </p:cNvPr>
+          <p:cNvSpPr txBox="1"/>
+          <p:nvPr/>
+        </p:nvSpPr>
+        <p:spPr>
+          <a:xfrm>
+            <a:off x="288790" y="958844"/>
+            <a:ext cx="11250267" cy="5215338"/>
+          </a:xfrm>
+          <a:prstGeom prst="rect">
+            <a:avLst/>
+          </a:prstGeom>
+          <a:noFill/>
+        </p:spPr>
+        <p:txBody>
+          <a:bodyPr wrap="square" rtlCol="0" anchor="t">
+            <a:spAutoFit/>
+          </a:bodyPr>
+          <a:lstStyle/>
+          <a:p>
+            <a:pPr marL="377825" indent="-285750">
+              <a:lnSpc>
+                <a:spcPct val="150000"/>
+              </a:lnSpc>
+              <a:buFont typeface="Arial" panose="020B0604020202020204" pitchFamily="34" charset="0"/>
+              <a:buChar char="•"/>
+            </a:pPr>
+            <a:r>
+              <a:rPr lang="ko-KR" altLang="en-US" sz="1600" spc="-50" dirty="0"/>
+              <a:t>재분배정책이 갖는 가장 큰 문제는 최소한 단기적으로 경제의 효율성을 감소시킨다는 점이다</a:t>
+            </a:r>
+            <a:r>
+              <a:rPr lang="en-US" altLang="ko-KR" sz="1600" spc="-50" dirty="0"/>
+              <a:t>.</a:t>
+            </a:r>
+          </a:p>
+          <a:p>
+            <a:pPr marL="835025" lvl="1" indent="-285750">
+              <a:lnSpc>
+                <a:spcPct val="150000"/>
+              </a:lnSpc>
+              <a:buFont typeface="Wingdings" panose="05000000000000000000" pitchFamily="2" charset="2"/>
+              <a:buChar char="ü"/>
+            </a:pPr>
+            <a:r>
+              <a:rPr lang="ko-KR" altLang="en-US" sz="1600" spc="-50" dirty="0"/>
+              <a:t>단적으로 생각해보면</a:t>
+            </a:r>
+            <a:r>
+              <a:rPr lang="en-US" altLang="ko-KR" sz="1600" spc="-50" dirty="0"/>
+              <a:t>, </a:t>
+            </a:r>
+            <a:r>
+              <a:rPr lang="ko-KR" altLang="en-US" sz="1600" spc="-50" dirty="0"/>
+              <a:t>국가가 모든 사람의 생계를 책임진다면 사람들은 일하려는 동기가 없다</a:t>
+            </a:r>
+            <a:r>
+              <a:rPr lang="en-US" altLang="ko-KR" sz="1600" spc="-50" dirty="0"/>
+              <a:t>.</a:t>
+            </a:r>
+          </a:p>
+          <a:p>
+            <a:pPr marL="835025" lvl="1" indent="-285750">
+              <a:lnSpc>
+                <a:spcPct val="150000"/>
+              </a:lnSpc>
+              <a:buFont typeface="Wingdings" panose="05000000000000000000" pitchFamily="2" charset="2"/>
+              <a:buChar char="ü"/>
+            </a:pPr>
+            <a:r>
+              <a:rPr lang="en-US" altLang="ko-KR" sz="1600" spc="-50" dirty="0"/>
+              <a:t>‘</a:t>
+            </a:r>
+            <a:r>
+              <a:rPr lang="ko-KR" altLang="en-US" sz="1600" spc="-50" dirty="0" err="1"/>
+              <a:t>복지병</a:t>
+            </a:r>
+            <a:r>
+              <a:rPr lang="en-US" altLang="ko-KR" sz="1600" spc="-50" dirty="0"/>
+              <a:t>’ </a:t>
+            </a:r>
+            <a:r>
+              <a:rPr lang="ko-KR" altLang="en-US" sz="1600" spc="-50" dirty="0"/>
+              <a:t>이라는 말은 이런 병리현상을 잘 표현하고 있다</a:t>
+            </a:r>
+            <a:r>
+              <a:rPr lang="en-US" altLang="ko-KR" sz="1600" spc="-50" dirty="0"/>
+              <a:t>.</a:t>
+            </a:r>
+          </a:p>
+          <a:p>
+            <a:pPr marL="377825" indent="-285750">
+              <a:lnSpc>
+                <a:spcPct val="150000"/>
+              </a:lnSpc>
+              <a:buFont typeface="Arial" panose="020B0604020202020204" pitchFamily="34" charset="0"/>
+              <a:buChar char="•"/>
+            </a:pPr>
+            <a:endParaRPr lang="en-US" altLang="ko-KR" sz="1600" spc="-50" dirty="0"/>
+          </a:p>
+          <a:p>
+            <a:pPr marL="377825" indent="-285750">
+              <a:lnSpc>
+                <a:spcPct val="150000"/>
+              </a:lnSpc>
+              <a:buFont typeface="Arial" panose="020B0604020202020204" pitchFamily="34" charset="0"/>
+              <a:buChar char="•"/>
+            </a:pPr>
+            <a:r>
+              <a:rPr lang="ko-KR" altLang="en-US" sz="1600" spc="-50" dirty="0"/>
+              <a:t>그러나 공평한 분배를 지향하는 정부의 모든 정책이 효율성 감소를 가져오지는 않는다</a:t>
+            </a:r>
+            <a:r>
+              <a:rPr lang="en-US" altLang="ko-KR" sz="1600" spc="-50" dirty="0"/>
+              <a:t>.</a:t>
+            </a:r>
+          </a:p>
+          <a:p>
+            <a:pPr marL="835025" lvl="1" indent="-285750">
+              <a:lnSpc>
+                <a:spcPct val="150000"/>
+              </a:lnSpc>
+              <a:buFont typeface="Wingdings" panose="05000000000000000000" pitchFamily="2" charset="2"/>
+              <a:buChar char="ü"/>
+            </a:pPr>
+            <a:r>
+              <a:rPr lang="ko-KR" altLang="en-US" sz="1600" spc="-50" dirty="0"/>
+              <a:t>정책에 따라서 재분배정책이 공평성뿐 아니라</a:t>
+            </a:r>
+            <a:r>
+              <a:rPr lang="en-US" altLang="ko-KR" sz="1600" spc="-50" dirty="0"/>
+              <a:t>, </a:t>
+            </a:r>
+            <a:r>
+              <a:rPr lang="ko-KR" altLang="en-US" sz="1600" spc="-50" dirty="0"/>
+              <a:t>효율성 측면에서도 긍정적인 효과를 낼 수 있다</a:t>
+            </a:r>
+            <a:r>
+              <a:rPr lang="en-US" altLang="ko-KR" sz="1600" spc="-50" dirty="0"/>
+              <a:t>.</a:t>
+            </a:r>
+          </a:p>
+          <a:p>
+            <a:pPr marL="1292225" lvl="2" indent="-285750">
+              <a:lnSpc>
+                <a:spcPct val="150000"/>
+              </a:lnSpc>
+              <a:buFont typeface="Wingdings" panose="05000000000000000000" pitchFamily="2" charset="2"/>
+              <a:buChar char="Ø"/>
+            </a:pPr>
+            <a:r>
+              <a:rPr lang="ko-KR" altLang="en-US" sz="1600" spc="-50" dirty="0"/>
+              <a:t>예를 들어</a:t>
+            </a:r>
+            <a:r>
+              <a:rPr lang="en-US" altLang="ko-KR" sz="1600" spc="-50" dirty="0"/>
+              <a:t>, </a:t>
+            </a:r>
+            <a:r>
+              <a:rPr lang="ko-KR" altLang="en-US" sz="1600" spc="-50" dirty="0"/>
+              <a:t>정부가 그</a:t>
+            </a:r>
+            <a:r>
+              <a:rPr lang="en-US" altLang="ko-KR" sz="1600" spc="-50" dirty="0"/>
+              <a:t> </a:t>
+            </a:r>
+            <a:r>
+              <a:rPr lang="ko-KR" altLang="en-US" sz="1600" spc="-50" dirty="0"/>
+              <a:t>사회에 만연해 있는 차별을 철폐하여</a:t>
+            </a:r>
+            <a:r>
+              <a:rPr lang="en-US" altLang="ko-KR" sz="1600" spc="-50" dirty="0"/>
+              <a:t>, </a:t>
+            </a:r>
+            <a:r>
+              <a:rPr lang="ko-KR" altLang="en-US" sz="1600" spc="-50" dirty="0"/>
+              <a:t>차별 받고 있는 사람들이 능력을 발휘할 수 있는 일을 가질 수 있게 한다면 공평성과 효율성 모든 측면에서 긍정적인 효과가 나타나는 것이다</a:t>
+            </a:r>
+            <a:r>
+              <a:rPr lang="en-US" altLang="ko-KR" sz="1600" spc="-50" dirty="0"/>
+              <a:t>.</a:t>
+            </a:r>
+          </a:p>
+          <a:p>
+            <a:pPr marL="1292225" lvl="2" indent="-285750">
+              <a:lnSpc>
+                <a:spcPct val="150000"/>
+              </a:lnSpc>
+              <a:buFont typeface="Wingdings" panose="05000000000000000000" pitchFamily="2" charset="2"/>
+              <a:buChar char="Ø"/>
+            </a:pPr>
+            <a:endParaRPr lang="en-US" altLang="ko-KR" sz="1600" spc="-50" dirty="0"/>
+          </a:p>
+          <a:p>
+            <a:pPr marL="377825" indent="-285750">
+              <a:lnSpc>
+                <a:spcPct val="150000"/>
+              </a:lnSpc>
+              <a:buFont typeface="Arial" panose="020B0604020202020204" pitchFamily="34" charset="0"/>
+              <a:buChar char="•"/>
+            </a:pPr>
+            <a:r>
+              <a:rPr lang="ko-KR" altLang="en-US" sz="1600" spc="-50" dirty="0"/>
+              <a:t>또한 장기적인 시각에서 보면 공평성과 효율성은 보완적인 관계가 될 가능성이 크다</a:t>
+            </a:r>
+            <a:r>
+              <a:rPr lang="en-US" altLang="ko-KR" sz="1600" spc="-50" dirty="0"/>
+              <a:t>.</a:t>
+            </a:r>
+          </a:p>
+          <a:p>
+            <a:pPr marL="835025" lvl="1" indent="-285750">
+              <a:lnSpc>
+                <a:spcPct val="150000"/>
+              </a:lnSpc>
+              <a:buFont typeface="Wingdings" panose="05000000000000000000" pitchFamily="2" charset="2"/>
+              <a:buChar char="ü"/>
+            </a:pPr>
+            <a:r>
+              <a:rPr lang="ko-KR" altLang="en-US" sz="1600" spc="-50" dirty="0" err="1"/>
+              <a:t>써로</a:t>
+            </a:r>
+            <a:r>
+              <a:rPr lang="ko-KR" altLang="en-US" sz="1600" spc="-50" dirty="0"/>
+              <a:t> </a:t>
+            </a:r>
+            <a:r>
+              <a:rPr lang="en-US" altLang="ko-KR" sz="1600" spc="-50" dirty="0"/>
+              <a:t>(L. </a:t>
+            </a:r>
+            <a:r>
+              <a:rPr lang="en-US" altLang="ko-KR" sz="1600" spc="-50" dirty="0" err="1"/>
+              <a:t>Thruow</a:t>
+            </a:r>
+            <a:r>
+              <a:rPr lang="en-US" altLang="ko-KR" sz="1600" spc="-50" dirty="0"/>
+              <a:t>)</a:t>
+            </a:r>
+            <a:r>
+              <a:rPr lang="ko-KR" altLang="en-US" sz="1600" spc="-50" dirty="0"/>
+              <a:t>는 주류경제학의 이론이 경제의 장기발전에 필수적인 요소 </a:t>
+            </a:r>
+            <a:r>
+              <a:rPr lang="en-US" altLang="ko-KR" sz="1600" spc="-50" dirty="0"/>
+              <a:t>(</a:t>
+            </a:r>
+            <a:r>
+              <a:rPr lang="ko-KR" altLang="en-US" sz="1600" spc="-50" dirty="0"/>
+              <a:t>동기</a:t>
+            </a:r>
+            <a:r>
+              <a:rPr lang="en-US" altLang="ko-KR" sz="1600" spc="-50" dirty="0"/>
+              <a:t>, </a:t>
+            </a:r>
+            <a:r>
+              <a:rPr lang="ko-KR" altLang="en-US" sz="1600" spc="-50" dirty="0"/>
+              <a:t>협동</a:t>
+            </a:r>
+            <a:r>
+              <a:rPr lang="en-US" altLang="ko-KR" sz="1600" spc="-50" dirty="0"/>
+              <a:t>, </a:t>
+            </a:r>
+            <a:r>
+              <a:rPr lang="ko-KR" altLang="en-US" sz="1600" spc="-50" dirty="0"/>
+              <a:t>팀워크</a:t>
+            </a:r>
+            <a:r>
+              <a:rPr lang="en-US" altLang="ko-KR" sz="1600" spc="-50" dirty="0"/>
+              <a:t>)</a:t>
+            </a:r>
+            <a:r>
+              <a:rPr lang="ko-KR" altLang="en-US" sz="1600" spc="-50" dirty="0"/>
+              <a:t>를 간과하고 있다고 지적한다</a:t>
+            </a:r>
+            <a:r>
+              <a:rPr lang="en-US" altLang="ko-KR" sz="1600" spc="-50" dirty="0"/>
+              <a:t>.</a:t>
+            </a:r>
+          </a:p>
+          <a:p>
+            <a:pPr marL="1292225" lvl="2" indent="-285750">
+              <a:lnSpc>
+                <a:spcPct val="150000"/>
+              </a:lnSpc>
+              <a:buFont typeface="Wingdings" panose="05000000000000000000" pitchFamily="2" charset="2"/>
+              <a:buChar char="Ø"/>
+            </a:pPr>
+            <a:r>
+              <a:rPr lang="en-US" altLang="ko-KR" sz="1600" spc="-50" dirty="0"/>
+              <a:t>3</a:t>
+            </a:r>
+            <a:r>
+              <a:rPr lang="ko-KR" altLang="en-US" sz="1600" spc="-50" dirty="0"/>
+              <a:t>가지 필수요소가 잘 발휘되기 위해서는 사회구성원들이 공평한 대우를 받고 있다는 느낌을 갖고 있어야 한다고 말한다</a:t>
+            </a:r>
+            <a:r>
+              <a:rPr lang="en-US" altLang="ko-KR" sz="1600" spc="-50"/>
+              <a:t>.</a:t>
+            </a:r>
+            <a:endParaRPr lang="en-US" altLang="ko-KR" sz="1600" spc="-50" dirty="0"/>
+          </a:p>
+        </p:txBody>
+      </p:sp>
+    </p:spTree>
+    <p:extLst>
+      <p:ext uri="{BB962C8B-B14F-4D97-AF65-F5344CB8AC3E}">
+        <p14:creationId xmlns:p14="http://schemas.microsoft.com/office/powerpoint/2010/main" val="1088023555"/>
+      </p:ext>
+    </p:extLst>
+  </p:cSld>
+  <p:clrMapOvr>
+    <a:masterClrMapping/>
+  </p:clrMapOvr>
+</p:sld>
+</file>
+
+<file path=ppt/slides/slide31.xml><?xml version="1.0" encoding="utf-8"?>
+<p:sld xmlns:a="http://schemas.openxmlformats.org/drawingml/2006/main" xmlns:r="http://schemas.openxmlformats.org/officeDocument/2006/relationships" xmlns:p="http://schemas.openxmlformats.org/presentationml/2006/main">
+  <p:cSld>
+    <p:spTree>
+      <p:nvGrpSpPr>
+        <p:cNvPr id="1" name="">
+          <a:extLst>
+            <a:ext uri="{FF2B5EF4-FFF2-40B4-BE49-F238E27FC236}">
+              <a16:creationId xmlns:a16="http://schemas.microsoft.com/office/drawing/2014/main" id="{9AC8B0EB-74B1-B51C-A4E6-7DD41C0B047F}"/>
+            </a:ext>
+          </a:extLst>
+        </p:cNvPr>
+        <p:cNvGrpSpPr/>
+        <p:nvPr/>
+      </p:nvGrpSpPr>
+      <p:grpSpPr>
+        <a:xfrm>
+          <a:off x="0" y="0"/>
+          <a:ext cx="0" cy="0"/>
+          <a:chOff x="0" y="0"/>
+          <a:chExt cx="0" cy="0"/>
+        </a:xfrm>
+      </p:grpSpPr>
+      <p:pic>
+        <p:nvPicPr>
+          <p:cNvPr id="3" name="그림 2" descr="텍스트, 로고, 원, 폰트이(가) 표시된 사진&#10;&#10;AI 생성 콘텐츠는 정확하지 않을 수 있습니다.">
+            <a:extLst>
+              <a:ext uri="{FF2B5EF4-FFF2-40B4-BE49-F238E27FC236}">
+                <a16:creationId xmlns:a16="http://schemas.microsoft.com/office/drawing/2014/main" id="{C524993C-D1C3-8436-D8C1-21698BE6D1B3}"/>
+              </a:ext>
+            </a:extLst>
+          </p:cNvPr>
+          <p:cNvPicPr>
+            <a:picLocks noChangeAspect="1"/>
+          </p:cNvPicPr>
+          <p:nvPr/>
+        </p:nvPicPr>
+        <p:blipFill>
+          <a:blip r:embed="rId2">
+            <a:alphaModFix amt="20000"/>
+            <a:extLst>
+              <a:ext uri="{28A0092B-C50C-407E-A947-70E740481C1C}">
+                <a14:useLocalDpi xmlns:a14="http://schemas.microsoft.com/office/drawing/2010/main" val="0"/>
+              </a:ext>
+            </a:extLst>
+          </a:blip>
+          <a:stretch>
+            <a:fillRect/>
+          </a:stretch>
+        </p:blipFill>
+        <p:spPr>
+          <a:xfrm>
+            <a:off x="4012070" y="1673061"/>
+            <a:ext cx="4167861" cy="4167861"/>
+          </a:xfrm>
+          <a:prstGeom prst="rect">
+            <a:avLst/>
+          </a:prstGeom>
+        </p:spPr>
+      </p:pic>
+      <p:sp>
+        <p:nvSpPr>
+          <p:cNvPr id="2" name="제목 1">
+            <a:extLst>
+              <a:ext uri="{FF2B5EF4-FFF2-40B4-BE49-F238E27FC236}">
+                <a16:creationId xmlns:a16="http://schemas.microsoft.com/office/drawing/2014/main" id="{051A9577-CCBA-F474-5E82-99100C452E21}"/>
+              </a:ext>
+            </a:extLst>
+          </p:cNvPr>
+          <p:cNvSpPr>
+            <a:spLocks noGrp="1"/>
+          </p:cNvSpPr>
+          <p:nvPr>
+            <p:ph type="title"/>
+          </p:nvPr>
+        </p:nvSpPr>
+        <p:spPr>
+          <a:xfrm>
+            <a:off x="831850" y="1709739"/>
+            <a:ext cx="10515600" cy="2134292"/>
+          </a:xfrm>
+          <a:effectLst>
+            <a:reflection blurRad="50800" stA="45000" endPos="44000" dir="5400000" sy="-100000" algn="bl" rotWithShape="0"/>
+          </a:effectLst>
+        </p:spPr>
+        <p:txBody>
+          <a:bodyPr/>
+          <a:lstStyle/>
+          <a:p>
+            <a:r>
+              <a:rPr lang="en-US" altLang="ko-KR" b="1" i="0" spc="150">
+                <a:solidFill>
+                  <a:schemeClr val="accent2"/>
+                </a:solidFill>
+              </a:rPr>
+              <a:t>T</a:t>
+            </a:r>
+            <a:r>
+              <a:rPr lang="en-US" altLang="ko-KR" sz="5400" i="0" spc="100"/>
+              <a:t>hank you</a:t>
+            </a:r>
+            <a:endParaRPr lang="ko-KR" altLang="en-US" sz="5400" i="0" spc="100"/>
+          </a:p>
+        </p:txBody>
+      </p:sp>
+      <p:sp>
+        <p:nvSpPr>
+          <p:cNvPr id="4" name="슬라이드 번호 개체 틀 3">
+            <a:extLst>
+              <a:ext uri="{FF2B5EF4-FFF2-40B4-BE49-F238E27FC236}">
+                <a16:creationId xmlns:a16="http://schemas.microsoft.com/office/drawing/2014/main" id="{AF4898E0-926C-D8DA-8874-21A66F64BB68}"/>
+              </a:ext>
+            </a:extLst>
+          </p:cNvPr>
+          <p:cNvSpPr>
+            <a:spLocks noGrp="1"/>
+          </p:cNvSpPr>
+          <p:nvPr>
+            <p:ph type="sldNum" sz="quarter" idx="12"/>
+          </p:nvPr>
+        </p:nvSpPr>
+        <p:spPr/>
+        <p:txBody>
+          <a:bodyPr/>
+          <a:lstStyle/>
+          <a:p>
+            <a:fld id="{109C872D-39A9-4065-8BF3-6A613116E2A1}" type="slidenum">
+              <a:rPr lang="ko-KR" altLang="en-US" smtClean="0"/>
+              <a:t>31</a:t>
+            </a:fld>
+            <a:endParaRPr lang="ko-KR" altLang="en-US"/>
+          </a:p>
+        </p:txBody>
+      </p:sp>
+    </p:spTree>
+    <p:extLst>
+      <p:ext uri="{BB962C8B-B14F-4D97-AF65-F5344CB8AC3E}">
+        <p14:creationId xmlns:p14="http://schemas.microsoft.com/office/powerpoint/2010/main" val="3130404870"/>
       </p:ext>
     </p:extLst>
   </p:cSld>

--- a/재정학/01_Lectures/재정학_Chapter_9.pptx
+++ b/재정학/01_Lectures/재정학_Chapter_9.pptx
@@ -249,7 +249,7 @@
           <a:p>
             <a:fld id="{4A5E00EF-AEA4-43E2-9451-8F9C59A39471}" type="datetimeFigureOut">
               <a:rPr lang="ko-KR" altLang="en-US" smtClean="0"/>
-              <a:t>2026-04-01</a:t>
+              <a:t>2026-05-26</a:t>
             </a:fld>
             <a:endParaRPr lang="ko-KR" altLang="en-US"/>
           </a:p>
@@ -671,7 +671,7 @@
           <a:p>
             <a:fld id="{CD32C56F-BD27-4999-9E6D-D4EACE3DA9F4}" type="datetime1">
               <a:rPr lang="ko-KR" altLang="en-US" smtClean="0"/>
-              <a:t>2026-04-01</a:t>
+              <a:t>2026-05-26</a:t>
             </a:fld>
             <a:endParaRPr lang="ko-KR" altLang="en-US"/>
           </a:p>
@@ -885,7 +885,7 @@
           <a:p>
             <a:fld id="{8EF4A19C-72C8-45CA-8E3F-68A7FA345D6C}" type="datetime1">
               <a:rPr lang="ko-KR" altLang="en-US" smtClean="0"/>
-              <a:t>2026-04-01</a:t>
+              <a:t>2026-05-26</a:t>
             </a:fld>
             <a:endParaRPr lang="ko-KR" altLang="en-US"/>
           </a:p>
@@ -1109,7 +1109,7 @@
           <a:p>
             <a:fld id="{56A175B2-010B-4341-954C-5F8F5C70B124}" type="datetime1">
               <a:rPr lang="ko-KR" altLang="en-US" smtClean="0"/>
-              <a:t>2026-04-01</a:t>
+              <a:t>2026-05-26</a:t>
             </a:fld>
             <a:endParaRPr lang="ko-KR" altLang="en-US"/>
           </a:p>
@@ -1323,7 +1323,7 @@
           <a:p>
             <a:fld id="{16B83F9E-22C9-45CA-9E85-070F1D3EF530}" type="datetime1">
               <a:rPr lang="ko-KR" altLang="en-US" smtClean="0"/>
-              <a:t>2026-04-01</a:t>
+              <a:t>2026-05-26</a:t>
             </a:fld>
             <a:endParaRPr lang="ko-KR" altLang="en-US"/>
           </a:p>
@@ -1614,7 +1614,7 @@
           <a:p>
             <a:fld id="{03278F45-FB3C-4C4D-B89A-7BC3F5F229F6}" type="datetime1">
               <a:rPr lang="ko-KR" altLang="en-US" smtClean="0"/>
-              <a:t>2026-04-01</a:t>
+              <a:t>2026-05-26</a:t>
             </a:fld>
             <a:endParaRPr lang="ko-KR" altLang="en-US"/>
           </a:p>
@@ -2007,7 +2007,7 @@
           <a:p>
             <a:fld id="{38FDAC3C-35A6-415C-9F03-738A6AC328B1}" type="datetime1">
               <a:rPr lang="ko-KR" altLang="en-US" smtClean="0"/>
-              <a:t>2026-04-01</a:t>
+              <a:t>2026-05-26</a:t>
             </a:fld>
             <a:endParaRPr lang="ko-KR" altLang="en-US"/>
           </a:p>
@@ -3601,7 +3601,7 @@
           <a:p>
             <a:fld id="{507A0DF1-AEE6-4B0D-89D2-351E7B3EF65C}" type="datetime1">
               <a:rPr lang="ko-KR" altLang="en-US" smtClean="0"/>
-              <a:t>2026-04-01</a:t>
+              <a:t>2026-05-26</a:t>
             </a:fld>
             <a:endParaRPr lang="ko-KR" altLang="en-US"/>
           </a:p>
@@ -4029,7 +4029,7 @@
           <a:p>
             <a:fld id="{CA93B8C9-630F-4D57-944D-04FD37CECCD3}" type="datetime1">
               <a:rPr lang="ko-KR" altLang="en-US" smtClean="0"/>
-              <a:t>2026-04-01</a:t>
+              <a:t>2026-05-26</a:t>
             </a:fld>
             <a:endParaRPr lang="ko-KR" altLang="en-US"/>
           </a:p>
@@ -4186,7 +4186,7 @@
           <a:p>
             <a:fld id="{E986165A-AC43-4902-9541-874ECD310BA3}" type="datetime1">
               <a:rPr lang="ko-KR" altLang="en-US" smtClean="0"/>
-              <a:t>2026-04-01</a:t>
+              <a:t>2026-05-26</a:t>
             </a:fld>
             <a:endParaRPr lang="ko-KR" altLang="en-US"/>
           </a:p>
@@ -4513,7 +4513,7 @@
           <a:p>
             <a:fld id="{47E6EE6D-2B0E-43A9-87A2-7354CDB998F4}" type="datetime1">
               <a:rPr lang="ko-KR" altLang="en-US" smtClean="0"/>
-              <a:t>2026-04-01</a:t>
+              <a:t>2026-05-26</a:t>
             </a:fld>
             <a:endParaRPr lang="ko-KR" altLang="en-US"/>
           </a:p>
@@ -4817,7 +4817,7 @@
           <a:p>
             <a:fld id="{5CC5944E-0BC8-4FAA-9F94-6B4B05834E10}" type="datetime1">
               <a:rPr lang="ko-KR" altLang="en-US" smtClean="0"/>
-              <a:t>2026-04-01</a:t>
+              <a:t>2026-05-26</a:t>
             </a:fld>
             <a:endParaRPr lang="ko-KR" altLang="en-US"/>
           </a:p>
@@ -8995,7 +8995,17 @@
             </a:r>
             <a:r>
               <a:rPr lang="en-US" altLang="ko-KR" sz="1600" spc="-50" dirty="0"/>
-              <a:t>.</a:t>
+              <a:t>. (</a:t>
+            </a:r>
+            <a:r>
+              <a:rPr lang="en-US" altLang="ko-KR" sz="1600" spc="-50" dirty="0">
+                <a:hlinkClick r:id="rId2"/>
+              </a:rPr>
+              <a:t>https://www.mohw.go.kr/menu.es?mid=a10708010300</a:t>
+            </a:r>
+            <a:r>
+              <a:rPr lang="en-US" altLang="ko-KR" sz="1600" spc="-50" dirty="0"/>
+              <a:t>)</a:t>
             </a:r>
           </a:p>
           <a:p>
@@ -10146,8 +10156,8 @@
           </a:p>
         </p:txBody>
       </p:sp>
-      <mc:AlternateContent xmlns:mc="http://schemas.openxmlformats.org/markup-compatibility/2006" xmlns:a14="http://schemas.microsoft.com/office/drawing/2010/main">
-        <mc:Choice Requires="a14">
+      <mc:AlternateContent xmlns:mc="http://schemas.openxmlformats.org/markup-compatibility/2006">
+        <mc:Choice xmlns:a14="http://schemas.microsoft.com/office/drawing/2010/main" Requires="a14">
           <p:sp>
             <p:nvSpPr>
               <p:cNvPr id="8" name="TextBox 7">
@@ -10185,7 +10195,7 @@
                 </a:pPr>
                 <a:r>
                   <a:rPr lang="ko-KR" altLang="en-US" sz="1600" dirty="0"/>
-                  <a:t>정부가 소득세제를 설계할 때 선택할 수 있는 변수는 </a:t>
+                  <a:t>정부가 이 제도를 설계할 때 선택할 수 있는 변수는 </a:t>
                 </a:r>
                 <a14:m>
                   <m:oMath xmlns:m="http://schemas.openxmlformats.org/officeDocument/2006/math">
@@ -10345,7 +10355,7 @@
             </p:txBody>
           </p:sp>
         </mc:Choice>
-        <mc:Fallback xmlns="">
+        <mc:Fallback>
           <p:sp>
             <p:nvSpPr>
               <p:cNvPr id="8" name="TextBox 7">
@@ -10999,7 +11009,7 @@
             </a:r>
             <a:r>
               <a:rPr lang="ko-KR" altLang="en-US" sz="1600" spc="-50" dirty="0"/>
-              <a:t>또 경제능력의 평가를 받지 않고 수혜자가 되는 특성이 있기 때문에 다른 재분배정책보다 심각할 수 있다</a:t>
+              <a:t>또 경제능력의 평가를 받지 않고 수혜자가 되는 특성이 있기 때문에 다른 재분배정책보다 문제가 심각할 수 있다</a:t>
             </a:r>
             <a:r>
               <a:rPr lang="en-US" altLang="ko-KR" sz="1600" spc="-50" dirty="0"/>
@@ -11332,7 +11342,7 @@
         <p:spPr>
           <a:xfrm>
             <a:off x="288791" y="2909564"/>
-            <a:ext cx="5790080" cy="1522020"/>
+            <a:ext cx="5790080" cy="2260683"/>
           </a:xfrm>
           <a:prstGeom prst="rect">
             <a:avLst/>
@@ -11458,6 +11468,57 @@
               <a:t>만원 미만인 경우</a:t>
             </a:r>
             <a:endParaRPr lang="en-US" altLang="ko-KR" sz="1600" spc="-50" dirty="0"/>
+          </a:p>
+          <a:p>
+            <a:pPr marL="549275" lvl="1">
+              <a:lnSpc>
+                <a:spcPct val="150000"/>
+              </a:lnSpc>
+            </a:pPr>
+            <a:r>
+              <a:rPr lang="en-US" altLang="ko-KR" sz="1600" spc="-50" dirty="0"/>
+              <a:t>※ </a:t>
+            </a:r>
+            <a:r>
+              <a:rPr lang="ko-KR" altLang="en-US" sz="1600" spc="-50" dirty="0"/>
+              <a:t>단 </a:t>
+            </a:r>
+            <a:r>
+              <a:rPr lang="ko-KR" altLang="en-US" sz="1600" spc="-50" dirty="0" err="1"/>
+              <a:t>가구원</a:t>
+            </a:r>
+            <a:r>
+              <a:rPr lang="ko-KR" altLang="en-US" sz="1600" spc="-50" dirty="0"/>
+              <a:t> 모두가 소유하고 있는 주택</a:t>
+            </a:r>
+            <a:r>
+              <a:rPr lang="en-US" altLang="ko-KR" sz="1600" spc="-50" dirty="0"/>
+              <a:t>·</a:t>
+            </a:r>
+            <a:r>
+              <a:rPr lang="ko-KR" altLang="en-US" sz="1600" spc="-50" dirty="0"/>
+              <a:t>토지</a:t>
+            </a:r>
+            <a:r>
+              <a:rPr lang="en-US" altLang="ko-KR" sz="1600" spc="-50" dirty="0"/>
+              <a:t>·</a:t>
+            </a:r>
+            <a:r>
+              <a:rPr lang="ko-KR" altLang="en-US" sz="1600" spc="-50" dirty="0"/>
+              <a:t>건물 등 재산 합계가 </a:t>
+            </a:r>
+            <a:r>
+              <a:rPr lang="en-US" altLang="ko-KR" sz="1600" spc="-50" dirty="0"/>
+              <a:t>2.4</a:t>
+            </a:r>
+            <a:r>
+              <a:rPr lang="ko-KR" altLang="en-US" sz="1600" spc="-50" dirty="0"/>
+              <a:t>억원 미만이어야 함</a:t>
+            </a:r>
+            <a:r>
+              <a:rPr lang="en-US" altLang="ko-KR" sz="1600" spc="-50" dirty="0"/>
+              <a:t>.</a:t>
+            </a:r>
           </a:p>
         </p:txBody>
       </p:sp>
@@ -12422,8 +12483,8 @@
           </a:p>
         </p:txBody>
       </p:sp>
-      <mc:AlternateContent xmlns:mc="http://schemas.openxmlformats.org/markup-compatibility/2006" xmlns:a14="http://schemas.microsoft.com/office/drawing/2010/main">
-        <mc:Choice Requires="a14">
+      <mc:AlternateContent xmlns:mc="http://schemas.openxmlformats.org/markup-compatibility/2006">
+        <mc:Choice xmlns:a14="http://schemas.microsoft.com/office/drawing/2010/main" Requires="a14">
           <p:sp>
             <p:nvSpPr>
               <p:cNvPr id="6" name="TextBox 5">
@@ -12706,11 +12767,11 @@
                 </a:r>
                 <a:r>
                   <a:rPr lang="en-US" altLang="ko-KR" sz="1600" spc="-50" dirty="0"/>
-                  <a:t>800</a:t>
+                  <a:t>1,700</a:t>
                 </a:r>
                 <a:r>
                   <a:rPr lang="ko-KR" altLang="en-US" sz="1600" spc="-50" dirty="0"/>
-                  <a:t>만원 미만인 경우</a:t>
+                  <a:t>만원 이상인 경우</a:t>
                 </a:r>
                 <a:endParaRPr lang="en-US" altLang="ko-KR" sz="1600" spc="-50" dirty="0"/>
               </a:p>
@@ -12727,7 +12788,7 @@
             </p:txBody>
           </p:sp>
         </mc:Choice>
-        <mc:Fallback xmlns="">
+        <mc:Fallback>
           <p:sp>
             <p:nvSpPr>
               <p:cNvPr id="6" name="TextBox 5">
@@ -12909,8 +12970,8 @@
                   <a:t>곡선의 </a:t>
                 </a:r>
                 <a:r>
-                  <a:rPr lang="en-US" altLang="ko-KR" sz="1600" spc="-50" dirty="0"/>
-                  <a:t>1,700</a:t>
+                  <a:rPr lang="en-US" altLang="ko-KR" sz="1600" spc="-50"/>
+                  <a:t>800</a:t>
                 </a:r>
                 <a:r>
                   <a:rPr lang="ko-KR" altLang="en-US" sz="1600" spc="-50" dirty="0"/>
@@ -18213,20 +18274,22 @@
             </a:r>
           </a:p>
           <a:p>
-            <a:pPr marL="835025" lvl="1" indent="-285750">
-              <a:lnSpc>
-                <a:spcPct val="150000"/>
-              </a:lnSpc>
-              <a:buFont typeface="Wingdings" panose="05000000000000000000" pitchFamily="2" charset="2"/>
-              <a:buChar char="ü"/>
-            </a:pPr>
+            <a:pPr marL="549275" lvl="1">
+              <a:lnSpc>
+                <a:spcPct val="150000"/>
+              </a:lnSpc>
+            </a:pPr>
+            <a:r>
+              <a:rPr lang="en-US" altLang="ko-KR" sz="1600" spc="-50" dirty="0"/>
+              <a:t>1. </a:t>
+            </a:r>
             <a:r>
               <a:rPr lang="ko-KR" altLang="en-US" sz="1600" spc="-50" dirty="0"/>
               <a:t>일반적 조세제도</a:t>
             </a:r>
             <a:r>
               <a:rPr lang="en-US" altLang="ko-KR" sz="1600" spc="-50" dirty="0"/>
-              <a:t>, </a:t>
+              <a:t>,   2. </a:t>
             </a:r>
             <a:r>
               <a:rPr lang="ko-KR" altLang="en-US" sz="1600" spc="-50" dirty="0"/>
@@ -18234,7 +18297,7 @@
             </a:r>
             <a:r>
               <a:rPr lang="en-US" altLang="ko-KR" sz="1600" spc="-50" dirty="0"/>
-              <a:t>, </a:t>
+              <a:t>,   3. </a:t>
             </a:r>
             <a:r>
               <a:rPr lang="ko-KR" altLang="en-US" sz="1600" spc="-50" dirty="0"/>
@@ -18242,7 +18305,7 @@
             </a:r>
             <a:r>
               <a:rPr lang="en-US" altLang="ko-KR" sz="1600" spc="-50" dirty="0"/>
-              <a:t>, </a:t>
+              <a:t>,   4. </a:t>
             </a:r>
             <a:r>
               <a:rPr lang="ko-KR" altLang="en-US" sz="1600" spc="-50" dirty="0"/>
@@ -18250,7 +18313,7 @@
             </a:r>
             <a:r>
               <a:rPr lang="en-US" altLang="ko-KR" sz="1600" spc="-50" dirty="0"/>
-              <a:t>, </a:t>
+              <a:t>,   5. </a:t>
             </a:r>
             <a:r>
               <a:rPr lang="ko-KR" altLang="en-US" sz="1600" spc="-50" dirty="0"/>

--- a/재정학/01_Lectures/재정학_Chapter_9.pptx
+++ b/재정학/01_Lectures/재정학_Chapter_9.pptx
@@ -5,7 +5,7 @@
     <p:sldMasterId id="2147483648" r:id="rId1"/>
   </p:sldMasterIdLst>
   <p:notesMasterIdLst>
-    <p:notesMasterId r:id="rId33"/>
+    <p:notesMasterId r:id="rId35"/>
   </p:notesMasterIdLst>
   <p:sldIdLst>
     <p:sldId id="375" r:id="rId2"/>
@@ -28,17 +28,19 @@
     <p:sldId id="741" r:id="rId19"/>
     <p:sldId id="742" r:id="rId20"/>
     <p:sldId id="743" r:id="rId21"/>
-    <p:sldId id="744" r:id="rId22"/>
-    <p:sldId id="745" r:id="rId23"/>
-    <p:sldId id="727" r:id="rId24"/>
-    <p:sldId id="746" r:id="rId25"/>
-    <p:sldId id="747" r:id="rId26"/>
-    <p:sldId id="748" r:id="rId27"/>
-    <p:sldId id="749" r:id="rId28"/>
-    <p:sldId id="750" r:id="rId29"/>
-    <p:sldId id="728" r:id="rId30"/>
-    <p:sldId id="751" r:id="rId31"/>
-    <p:sldId id="364" r:id="rId32"/>
+    <p:sldId id="752" r:id="rId22"/>
+    <p:sldId id="753" r:id="rId23"/>
+    <p:sldId id="744" r:id="rId24"/>
+    <p:sldId id="745" r:id="rId25"/>
+    <p:sldId id="727" r:id="rId26"/>
+    <p:sldId id="746" r:id="rId27"/>
+    <p:sldId id="747" r:id="rId28"/>
+    <p:sldId id="748" r:id="rId29"/>
+    <p:sldId id="749" r:id="rId30"/>
+    <p:sldId id="750" r:id="rId31"/>
+    <p:sldId id="728" r:id="rId32"/>
+    <p:sldId id="751" r:id="rId33"/>
+    <p:sldId id="364" r:id="rId34"/>
   </p:sldIdLst>
   <p:sldSz cx="12192000" cy="6858000"/>
   <p:notesSz cx="6858000" cy="9144000"/>
@@ -249,7 +251,7 @@
           <a:p>
             <a:fld id="{4A5E00EF-AEA4-43E2-9451-8F9C59A39471}" type="datetimeFigureOut">
               <a:rPr lang="ko-KR" altLang="en-US" smtClean="0"/>
-              <a:t>2026-05-26</a:t>
+              <a:t>2026-05-27</a:t>
             </a:fld>
             <a:endParaRPr lang="ko-KR" altLang="en-US"/>
           </a:p>
@@ -671,7 +673,7 @@
           <a:p>
             <a:fld id="{CD32C56F-BD27-4999-9E6D-D4EACE3DA9F4}" type="datetime1">
               <a:rPr lang="ko-KR" altLang="en-US" smtClean="0"/>
-              <a:t>2026-05-26</a:t>
+              <a:t>2026-05-27</a:t>
             </a:fld>
             <a:endParaRPr lang="ko-KR" altLang="en-US"/>
           </a:p>
@@ -885,7 +887,7 @@
           <a:p>
             <a:fld id="{8EF4A19C-72C8-45CA-8E3F-68A7FA345D6C}" type="datetime1">
               <a:rPr lang="ko-KR" altLang="en-US" smtClean="0"/>
-              <a:t>2026-05-26</a:t>
+              <a:t>2026-05-27</a:t>
             </a:fld>
             <a:endParaRPr lang="ko-KR" altLang="en-US"/>
           </a:p>
@@ -1109,7 +1111,7 @@
           <a:p>
             <a:fld id="{56A175B2-010B-4341-954C-5F8F5C70B124}" type="datetime1">
               <a:rPr lang="ko-KR" altLang="en-US" smtClean="0"/>
-              <a:t>2026-05-26</a:t>
+              <a:t>2026-05-27</a:t>
             </a:fld>
             <a:endParaRPr lang="ko-KR" altLang="en-US"/>
           </a:p>
@@ -1323,7 +1325,7 @@
           <a:p>
             <a:fld id="{16B83F9E-22C9-45CA-9E85-070F1D3EF530}" type="datetime1">
               <a:rPr lang="ko-KR" altLang="en-US" smtClean="0"/>
-              <a:t>2026-05-26</a:t>
+              <a:t>2026-05-27</a:t>
             </a:fld>
             <a:endParaRPr lang="ko-KR" altLang="en-US"/>
           </a:p>
@@ -1614,7 +1616,7 @@
           <a:p>
             <a:fld id="{03278F45-FB3C-4C4D-B89A-7BC3F5F229F6}" type="datetime1">
               <a:rPr lang="ko-KR" altLang="en-US" smtClean="0"/>
-              <a:t>2026-05-26</a:t>
+              <a:t>2026-05-27</a:t>
             </a:fld>
             <a:endParaRPr lang="ko-KR" altLang="en-US"/>
           </a:p>
@@ -2007,7 +2009,7 @@
           <a:p>
             <a:fld id="{38FDAC3C-35A6-415C-9F03-738A6AC328B1}" type="datetime1">
               <a:rPr lang="ko-KR" altLang="en-US" smtClean="0"/>
-              <a:t>2026-05-26</a:t>
+              <a:t>2026-05-27</a:t>
             </a:fld>
             <a:endParaRPr lang="ko-KR" altLang="en-US"/>
           </a:p>
@@ -3601,7 +3603,7 @@
           <a:p>
             <a:fld id="{507A0DF1-AEE6-4B0D-89D2-351E7B3EF65C}" type="datetime1">
               <a:rPr lang="ko-KR" altLang="en-US" smtClean="0"/>
-              <a:t>2026-05-26</a:t>
+              <a:t>2026-05-27</a:t>
             </a:fld>
             <a:endParaRPr lang="ko-KR" altLang="en-US"/>
           </a:p>
@@ -4029,7 +4031,7 @@
           <a:p>
             <a:fld id="{CA93B8C9-630F-4D57-944D-04FD37CECCD3}" type="datetime1">
               <a:rPr lang="ko-KR" altLang="en-US" smtClean="0"/>
-              <a:t>2026-05-26</a:t>
+              <a:t>2026-05-27</a:t>
             </a:fld>
             <a:endParaRPr lang="ko-KR" altLang="en-US"/>
           </a:p>
@@ -4186,7 +4188,7 @@
           <a:p>
             <a:fld id="{E986165A-AC43-4902-9541-874ECD310BA3}" type="datetime1">
               <a:rPr lang="ko-KR" altLang="en-US" smtClean="0"/>
-              <a:t>2026-05-26</a:t>
+              <a:t>2026-05-27</a:t>
             </a:fld>
             <a:endParaRPr lang="ko-KR" altLang="en-US"/>
           </a:p>
@@ -4513,7 +4515,7 @@
           <a:p>
             <a:fld id="{47E6EE6D-2B0E-43A9-87A2-7354CDB998F4}" type="datetime1">
               <a:rPr lang="ko-KR" altLang="en-US" smtClean="0"/>
-              <a:t>2026-05-26</a:t>
+              <a:t>2026-05-27</a:t>
             </a:fld>
             <a:endParaRPr lang="ko-KR" altLang="en-US"/>
           </a:p>
@@ -4817,7 +4819,7 @@
           <a:p>
             <a:fld id="{5CC5944E-0BC8-4FAA-9F94-6B4B05834E10}" type="datetime1">
               <a:rPr lang="ko-KR" altLang="en-US" smtClean="0"/>
-              <a:t>2026-05-26</a:t>
+              <a:t>2026-05-27</a:t>
             </a:fld>
             <a:endParaRPr lang="ko-KR" altLang="en-US"/>
           </a:p>
@@ -10156,8 +10158,8 @@
           </a:p>
         </p:txBody>
       </p:sp>
-      <mc:AlternateContent xmlns:mc="http://schemas.openxmlformats.org/markup-compatibility/2006">
-        <mc:Choice xmlns:a14="http://schemas.microsoft.com/office/drawing/2010/main" Requires="a14">
+      <mc:AlternateContent xmlns:mc="http://schemas.openxmlformats.org/markup-compatibility/2006" xmlns:a14="http://schemas.microsoft.com/office/drawing/2010/main">
+        <mc:Choice Requires="a14">
           <p:sp>
             <p:nvSpPr>
               <p:cNvPr id="8" name="TextBox 7">
@@ -10355,7 +10357,7 @@
             </p:txBody>
           </p:sp>
         </mc:Choice>
-        <mc:Fallback>
+        <mc:Fallback xmlns="">
           <p:sp>
             <p:nvSpPr>
               <p:cNvPr id="8" name="TextBox 7">
@@ -12483,8 +12485,8 @@
           </a:p>
         </p:txBody>
       </p:sp>
-      <mc:AlternateContent xmlns:mc="http://schemas.openxmlformats.org/markup-compatibility/2006">
-        <mc:Choice xmlns:a14="http://schemas.microsoft.com/office/drawing/2010/main" Requires="a14">
+      <mc:AlternateContent xmlns:mc="http://schemas.openxmlformats.org/markup-compatibility/2006" xmlns:a14="http://schemas.microsoft.com/office/drawing/2010/main">
+        <mc:Choice Requires="a14">
           <p:sp>
             <p:nvSpPr>
               <p:cNvPr id="6" name="TextBox 5">
@@ -12788,7 +12790,7 @@
             </p:txBody>
           </p:sp>
         </mc:Choice>
-        <mc:Fallback>
+        <mc:Fallback xmlns="">
           <p:sp>
             <p:nvSpPr>
               <p:cNvPr id="6" name="TextBox 5">
@@ -12878,8 +12880,8 @@
           </a:p>
         </p:txBody>
       </p:sp>
-      <mc:AlternateContent xmlns:mc="http://schemas.openxmlformats.org/markup-compatibility/2006">
-        <mc:Choice xmlns:a14="http://schemas.microsoft.com/office/drawing/2010/main" Requires="a14">
+      <mc:AlternateContent xmlns:mc="http://schemas.openxmlformats.org/markup-compatibility/2006" xmlns:a14="http://schemas.microsoft.com/office/drawing/2010/main">
+        <mc:Choice Requires="a14">
           <p:sp>
             <p:nvSpPr>
               <p:cNvPr id="5" name="TextBox 4">
@@ -12970,7 +12972,7 @@
                   <a:t>곡선의 </a:t>
                 </a:r>
                 <a:r>
-                  <a:rPr lang="en-US" altLang="ko-KR" sz="1600" spc="-50"/>
+                  <a:rPr lang="en-US" altLang="ko-KR" sz="1600" spc="-50" dirty="0"/>
                   <a:t>800</a:t>
                 </a:r>
                 <a:r>
@@ -13225,7 +13227,7 @@
             </p:txBody>
           </p:sp>
         </mc:Choice>
-        <mc:Fallback>
+        <mc:Fallback xmlns="">
           <p:sp>
             <p:nvSpPr>
               <p:cNvPr id="5" name="TextBox 4">
@@ -13291,6 +13293,854 @@
         <p:cNvPr id="1" name="">
           <a:extLst>
             <a:ext uri="{FF2B5EF4-FFF2-40B4-BE49-F238E27FC236}">
+              <a16:creationId xmlns:a16="http://schemas.microsoft.com/office/drawing/2014/main" id="{8A9308AC-978D-7AD2-E2BD-B57AD29D34A8}"/>
+            </a:ext>
+          </a:extLst>
+        </p:cNvPr>
+        <p:cNvGrpSpPr/>
+        <p:nvPr/>
+      </p:nvGrpSpPr>
+      <p:grpSpPr>
+        <a:xfrm>
+          <a:off x="0" y="0"/>
+          <a:ext cx="0" cy="0"/>
+          <a:chOff x="0" y="0"/>
+          <a:chExt cx="0" cy="0"/>
+        </a:xfrm>
+      </p:grpSpPr>
+      <p:pic>
+        <p:nvPicPr>
+          <p:cNvPr id="3" name="그림 2">
+            <a:extLst>
+              <a:ext uri="{FF2B5EF4-FFF2-40B4-BE49-F238E27FC236}">
+                <a16:creationId xmlns:a16="http://schemas.microsoft.com/office/drawing/2014/main" id="{83E2DC72-359D-3545-E2B0-CD59480A2F7E}"/>
+              </a:ext>
+            </a:extLst>
+          </p:cNvPr>
+          <p:cNvPicPr>
+            <a:picLocks noChangeAspect="1"/>
+          </p:cNvPicPr>
+          <p:nvPr/>
+        </p:nvPicPr>
+        <p:blipFill>
+          <a:blip r:embed="rId2">
+            <a:extLst>
+              <a:ext uri="{28A0092B-C50C-407E-A947-70E740481C1C}">
+                <a14:useLocalDpi xmlns:a14="http://schemas.microsoft.com/office/drawing/2010/main" val="0"/>
+              </a:ext>
+            </a:extLst>
+          </a:blip>
+          <a:srcRect l="18141" t="14353" r="26408" b="8619"/>
+          <a:stretch>
+            <a:fillRect/>
+          </a:stretch>
+        </p:blipFill>
+        <p:spPr>
+          <a:xfrm>
+            <a:off x="7884582" y="2313639"/>
+            <a:ext cx="3832844" cy="3038400"/>
+          </a:xfrm>
+          <a:prstGeom prst="rect">
+            <a:avLst/>
+          </a:prstGeom>
+        </p:spPr>
+      </p:pic>
+      <p:sp>
+        <p:nvSpPr>
+          <p:cNvPr id="2" name="제목 1">
+            <a:extLst>
+              <a:ext uri="{FF2B5EF4-FFF2-40B4-BE49-F238E27FC236}">
+                <a16:creationId xmlns:a16="http://schemas.microsoft.com/office/drawing/2014/main" id="{0886CAA3-4983-84E6-1200-B48F818CC5A5}"/>
+              </a:ext>
+            </a:extLst>
+          </p:cNvPr>
+          <p:cNvSpPr>
+            <a:spLocks noGrp="1"/>
+          </p:cNvSpPr>
+          <p:nvPr>
+            <p:ph type="title"/>
+          </p:nvPr>
+        </p:nvSpPr>
+        <p:spPr/>
+        <p:txBody>
+          <a:bodyPr/>
+          <a:lstStyle/>
+          <a:p>
+            <a:r>
+              <a:rPr lang="ko-KR" altLang="en-US" dirty="0"/>
+              <a:t>근로장려세제</a:t>
+            </a:r>
+          </a:p>
+        </p:txBody>
+      </p:sp>
+      <p:sp>
+        <p:nvSpPr>
+          <p:cNvPr id="4" name="슬라이드 번호 개체 틀 3">
+            <a:extLst>
+              <a:ext uri="{FF2B5EF4-FFF2-40B4-BE49-F238E27FC236}">
+                <a16:creationId xmlns:a16="http://schemas.microsoft.com/office/drawing/2014/main" id="{BA557130-3B3F-4686-99A1-EFF149FCADB1}"/>
+              </a:ext>
+            </a:extLst>
+          </p:cNvPr>
+          <p:cNvSpPr>
+            <a:spLocks noGrp="1"/>
+          </p:cNvSpPr>
+          <p:nvPr>
+            <p:ph type="sldNum" sz="quarter" idx="12"/>
+          </p:nvPr>
+        </p:nvSpPr>
+        <p:spPr/>
+        <p:txBody>
+          <a:bodyPr/>
+          <a:lstStyle/>
+          <a:p>
+            <a:fld id="{109C872D-39A9-4065-8BF3-6A613116E2A1}" type="slidenum">
+              <a:rPr lang="ko-KR" altLang="en-US" smtClean="0"/>
+              <a:t>21</a:t>
+            </a:fld>
+            <a:endParaRPr lang="ko-KR" altLang="en-US"/>
+          </a:p>
+        </p:txBody>
+      </p:sp>
+      <p:sp>
+        <p:nvSpPr>
+          <p:cNvPr id="9" name="TextBox 8">
+            <a:extLst>
+              <a:ext uri="{FF2B5EF4-FFF2-40B4-BE49-F238E27FC236}">
+                <a16:creationId xmlns:a16="http://schemas.microsoft.com/office/drawing/2014/main" id="{8605E1EB-209D-3B76-1959-CD33AD7F3346}"/>
+              </a:ext>
+            </a:extLst>
+          </p:cNvPr>
+          <p:cNvSpPr txBox="1"/>
+          <p:nvPr/>
+        </p:nvSpPr>
+        <p:spPr>
+          <a:xfrm>
+            <a:off x="8210311" y="2100146"/>
+            <a:ext cx="3580080" cy="276999"/>
+          </a:xfrm>
+          <a:prstGeom prst="rect">
+            <a:avLst/>
+          </a:prstGeom>
+          <a:noFill/>
+        </p:spPr>
+        <p:txBody>
+          <a:bodyPr wrap="square">
+            <a:spAutoFit/>
+          </a:bodyPr>
+          <a:lstStyle/>
+          <a:p>
+            <a:pPr algn="ctr"/>
+            <a:r>
+              <a:rPr lang="en-US" altLang="ko-KR" sz="1200" spc="-50" dirty="0"/>
+              <a:t>&lt;</a:t>
+            </a:r>
+            <a:r>
+              <a:rPr lang="ko-KR" altLang="en-US" sz="1200" spc="-50" dirty="0"/>
+              <a:t>근로장려세제의 효과</a:t>
+            </a:r>
+            <a:r>
+              <a:rPr lang="en-US" altLang="ko-KR" sz="1200" spc="-50" dirty="0"/>
+              <a:t>&gt;</a:t>
+            </a:r>
+            <a:endParaRPr lang="ko-KR" altLang="en-US" sz="1200" dirty="0"/>
+          </a:p>
+        </p:txBody>
+      </p:sp>
+      <mc:AlternateContent xmlns:mc="http://schemas.openxmlformats.org/markup-compatibility/2006">
+        <mc:Choice xmlns:a14="http://schemas.microsoft.com/office/drawing/2010/main" Requires="a14">
+          <p:sp>
+            <p:nvSpPr>
+              <p:cNvPr id="8" name="TextBox 7">
+                <a:extLst>
+                  <a:ext uri="{FF2B5EF4-FFF2-40B4-BE49-F238E27FC236}">
+                    <a16:creationId xmlns:a16="http://schemas.microsoft.com/office/drawing/2014/main" id="{4D4557F0-0BC3-3C17-98DC-6F389AAC689D}"/>
+                  </a:ext>
+                </a:extLst>
+              </p:cNvPr>
+              <p:cNvSpPr txBox="1"/>
+              <p:nvPr/>
+            </p:nvSpPr>
+            <p:spPr>
+              <a:xfrm>
+                <a:off x="288790" y="883205"/>
+                <a:ext cx="7522827" cy="5341270"/>
+              </a:xfrm>
+              <a:prstGeom prst="rect">
+                <a:avLst/>
+              </a:prstGeom>
+              <a:noFill/>
+            </p:spPr>
+            <p:txBody>
+              <a:bodyPr wrap="square" rtlCol="0" anchor="t">
+                <a:spAutoFit/>
+              </a:bodyPr>
+              <a:lstStyle/>
+              <a:p>
+                <a:pPr marL="835025" lvl="1" indent="-285750">
+                  <a:lnSpc>
+                    <a:spcPct val="150000"/>
+                  </a:lnSpc>
+                  <a:buFont typeface="Wingdings" panose="05000000000000000000" pitchFamily="2" charset="2"/>
+                  <a:buChar char="ü"/>
+                </a:pPr>
+                <a14:m>
+                  <m:oMath xmlns:m="http://schemas.openxmlformats.org/officeDocument/2006/math">
+                    <m:r>
+                      <a:rPr lang="ko-KR" altLang="en-US" sz="1600" i="1" spc="-50" smtClean="0">
+                        <a:latin typeface="Cambria Math" panose="02040503050406030204" pitchFamily="18" charset="0"/>
+                      </a:rPr>
+                      <m:t>근</m:t>
+                    </m:r>
+                  </m:oMath>
+                </a14:m>
+                <a:r>
+                  <a:rPr lang="ko-KR" altLang="en-US" sz="1600" spc="-50" dirty="0"/>
+                  <a:t>로장려세제 도입 후의 선택점이 </a:t>
+                </a:r>
+                <a14:m>
+                  <m:oMath xmlns:m="http://schemas.openxmlformats.org/officeDocument/2006/math">
+                    <m:bar>
+                      <m:barPr>
+                        <m:pos m:val="top"/>
+                        <m:ctrlPr>
+                          <a:rPr lang="en-US" altLang="ko-KR" sz="1600" i="1" spc="-50">
+                            <a:latin typeface="Cambria Math" panose="02040503050406030204" pitchFamily="18" charset="0"/>
+                          </a:rPr>
+                        </m:ctrlPr>
+                      </m:barPr>
+                      <m:e>
+                        <m:r>
+                          <a:rPr lang="en-US" altLang="ko-KR" sz="1600" i="1" spc="-50">
+                            <a:latin typeface="Cambria Math" panose="02040503050406030204" pitchFamily="18" charset="0"/>
+                          </a:rPr>
+                          <m:t>𝐼𝐵</m:t>
+                        </m:r>
+                      </m:e>
+                    </m:bar>
+                  </m:oMath>
+                </a14:m>
+                <a:r>
+                  <a:rPr lang="en-US" altLang="ko-KR" sz="1600" spc="-50" dirty="0"/>
+                  <a:t> </a:t>
+                </a:r>
+                <a:r>
+                  <a:rPr lang="ko-KR" altLang="en-US" sz="1600" spc="-50" dirty="0"/>
+                  <a:t>위의 한 점이 될 수도 있다</a:t>
+                </a:r>
+                <a:r>
+                  <a:rPr lang="en-US" altLang="ko-KR" sz="1600" spc="-50" dirty="0"/>
+                  <a:t>.</a:t>
+                </a:r>
+              </a:p>
+              <a:p>
+                <a:pPr marL="1292225" lvl="2" indent="-285750">
+                  <a:lnSpc>
+                    <a:spcPct val="150000"/>
+                  </a:lnSpc>
+                  <a:buFont typeface="Wingdings" panose="05000000000000000000" pitchFamily="2" charset="2"/>
+                  <a:buChar char="Ø"/>
+                </a:pPr>
+                <a:r>
+                  <a:rPr lang="ko-KR" altLang="en-US" sz="1600" spc="-50" dirty="0"/>
+                  <a:t>이때는 대체효과와 소득효과가 반대방향으로 작용하여</a:t>
+                </a:r>
+                <a:r>
+                  <a:rPr lang="en-US" altLang="ko-KR" sz="1600" spc="-50" dirty="0"/>
+                  <a:t>, </a:t>
+                </a:r>
+                <a:r>
+                  <a:rPr lang="ko-KR" altLang="en-US" sz="1600" spc="-50" dirty="0"/>
+                  <a:t>노동 공급량이 증가할지 감소할지 불분명하다</a:t>
+                </a:r>
+                <a:r>
+                  <a:rPr lang="en-US" altLang="ko-KR" sz="1600" spc="-50" dirty="0"/>
+                  <a:t>.</a:t>
+                </a:r>
+              </a:p>
+              <a:p>
+                <a:pPr marL="1292225" lvl="2" indent="-285750">
+                  <a:lnSpc>
+                    <a:spcPct val="150000"/>
+                  </a:lnSpc>
+                  <a:buFont typeface="Wingdings" panose="05000000000000000000" pitchFamily="2" charset="2"/>
+                  <a:buChar char="Ø"/>
+                </a:pPr>
+                <a:r>
+                  <a:rPr lang="ko-KR" altLang="en-US" sz="1600" spc="-50" dirty="0"/>
+                  <a:t>대체효과는 노동공급량을 늘리는 방향으로 작용하지만</a:t>
+                </a:r>
+                <a:r>
+                  <a:rPr lang="en-US" altLang="ko-KR" sz="1600" spc="-50" dirty="0"/>
+                  <a:t>, </a:t>
+                </a:r>
+                <a:r>
+                  <a:rPr lang="ko-KR" altLang="en-US" sz="1600" spc="-50" dirty="0"/>
+                  <a:t>소득효과는 노동공급량을 줄이는 방향으로 작용하기 때문이다</a:t>
+                </a:r>
+                <a:r>
+                  <a:rPr lang="en-US" altLang="ko-KR" sz="1600" spc="-50" dirty="0"/>
+                  <a:t>.</a:t>
+                </a:r>
+              </a:p>
+              <a:p>
+                <a:pPr marL="1292225" lvl="2" indent="-285750">
+                  <a:lnSpc>
+                    <a:spcPct val="150000"/>
+                  </a:lnSpc>
+                  <a:buFont typeface="Wingdings" panose="05000000000000000000" pitchFamily="2" charset="2"/>
+                  <a:buChar char="Ø"/>
+                </a:pPr>
+                <a:endParaRPr lang="en-US" altLang="ko-KR" sz="1600" spc="-50" dirty="0"/>
+              </a:p>
+              <a:p>
+                <a:pPr marL="835025" lvl="1" indent="-285750">
+                  <a:lnSpc>
+                    <a:spcPct val="150000"/>
+                  </a:lnSpc>
+                  <a:buFont typeface="Wingdings" panose="05000000000000000000" pitchFamily="2" charset="2"/>
+                  <a:buChar char="ü"/>
+                </a:pPr>
+                <a14:m>
+                  <m:oMath xmlns:m="http://schemas.openxmlformats.org/officeDocument/2006/math">
+                    <m:r>
+                      <a:rPr lang="ko-KR" altLang="en-US" sz="1600" i="1" spc="-50">
+                        <a:latin typeface="Cambria Math" panose="02040503050406030204" pitchFamily="18" charset="0"/>
+                      </a:rPr>
+                      <m:t>근</m:t>
+                    </m:r>
+                  </m:oMath>
+                </a14:m>
+                <a:r>
+                  <a:rPr lang="ko-KR" altLang="en-US" sz="1600" spc="-50" dirty="0"/>
+                  <a:t>로장려세제 도입 후의 선택점이 </a:t>
+                </a:r>
+                <a14:m>
+                  <m:oMath xmlns:m="http://schemas.openxmlformats.org/officeDocument/2006/math">
+                    <m:bar>
+                      <m:barPr>
+                        <m:pos m:val="top"/>
+                        <m:ctrlPr>
+                          <a:rPr lang="en-US" altLang="ko-KR" sz="1600" i="1" spc="-50">
+                            <a:latin typeface="Cambria Math" panose="02040503050406030204" pitchFamily="18" charset="0"/>
+                          </a:rPr>
+                        </m:ctrlPr>
+                      </m:barPr>
+                      <m:e>
+                        <m:r>
+                          <a:rPr lang="en-US" altLang="ko-KR" sz="1600" b="0" i="1" spc="-50" smtClean="0">
+                            <a:latin typeface="Cambria Math" panose="02040503050406030204" pitchFamily="18" charset="0"/>
+                          </a:rPr>
+                          <m:t>𝐺𝐻</m:t>
+                        </m:r>
+                      </m:e>
+                    </m:bar>
+                  </m:oMath>
+                </a14:m>
+                <a:r>
+                  <a:rPr lang="en-US" altLang="ko-KR" sz="1600" spc="-50" dirty="0"/>
+                  <a:t> </a:t>
+                </a:r>
+                <a:r>
+                  <a:rPr lang="ko-KR" altLang="en-US" sz="1600" spc="-50" dirty="0"/>
+                  <a:t>위의 한 점이 될 수도 있다</a:t>
+                </a:r>
+                <a:r>
+                  <a:rPr lang="en-US" altLang="ko-KR" sz="1600" spc="-50" dirty="0"/>
+                  <a:t>.</a:t>
+                </a:r>
+              </a:p>
+              <a:p>
+                <a:pPr marL="1292225" lvl="2" indent="-285750">
+                  <a:lnSpc>
+                    <a:spcPct val="150000"/>
+                  </a:lnSpc>
+                  <a:buFont typeface="Wingdings" panose="05000000000000000000" pitchFamily="2" charset="2"/>
+                  <a:buChar char="Ø"/>
+                </a:pPr>
+                <a:r>
+                  <a:rPr lang="ko-KR" altLang="en-US" sz="1600" spc="-50" dirty="0"/>
+                  <a:t>이때는 대체효과와 소득효과 모두 노동 공급량을 줄이는 방향으로 작용한다</a:t>
+                </a:r>
+                <a:r>
+                  <a:rPr lang="en-US" altLang="ko-KR" sz="1600" spc="-50" dirty="0"/>
+                  <a:t>.</a:t>
+                </a:r>
+              </a:p>
+              <a:p>
+                <a:pPr marL="1292225" lvl="2" indent="-285750">
+                  <a:lnSpc>
+                    <a:spcPct val="150000"/>
+                  </a:lnSpc>
+                  <a:buFont typeface="Wingdings" panose="05000000000000000000" pitchFamily="2" charset="2"/>
+                  <a:buChar char="Ø"/>
+                </a:pPr>
+                <a:endParaRPr lang="en-US" altLang="ko-KR" sz="1600" spc="-50" dirty="0"/>
+              </a:p>
+              <a:p>
+                <a:pPr marL="835025" lvl="1" indent="-285750">
+                  <a:lnSpc>
+                    <a:spcPct val="150000"/>
+                  </a:lnSpc>
+                  <a:buFont typeface="Wingdings" panose="05000000000000000000" pitchFamily="2" charset="2"/>
+                  <a:buChar char="ü"/>
+                </a:pPr>
+                <a:r>
+                  <a:rPr lang="ko-KR" altLang="en-US" sz="1600" spc="-50" dirty="0"/>
+                  <a:t>근로장려세제 도입 후의 선택점이 </a:t>
+                </a:r>
+                <a14:m>
+                  <m:oMath xmlns:m="http://schemas.openxmlformats.org/officeDocument/2006/math">
+                    <m:bar>
+                      <m:barPr>
+                        <m:pos m:val="top"/>
+                        <m:ctrlPr>
+                          <a:rPr lang="en-US" altLang="ko-KR" sz="1600" i="1" spc="-50">
+                            <a:latin typeface="Cambria Math" panose="02040503050406030204" pitchFamily="18" charset="0"/>
+                          </a:rPr>
+                        </m:ctrlPr>
+                      </m:barPr>
+                      <m:e>
+                        <m:r>
+                          <a:rPr lang="en-US" altLang="ko-KR" sz="1600" i="1" spc="-50">
+                            <a:latin typeface="Cambria Math" panose="02040503050406030204" pitchFamily="18" charset="0"/>
+                          </a:rPr>
+                          <m:t>𝐻</m:t>
+                        </m:r>
+                        <m:r>
+                          <a:rPr lang="en-US" altLang="ko-KR" sz="1600" b="0" i="1" spc="-50" smtClean="0">
+                            <a:latin typeface="Cambria Math" panose="02040503050406030204" pitchFamily="18" charset="0"/>
+                          </a:rPr>
+                          <m:t>𝐼</m:t>
+                        </m:r>
+                      </m:e>
+                    </m:bar>
+                  </m:oMath>
+                </a14:m>
+                <a:r>
+                  <a:rPr lang="en-US" altLang="ko-KR" sz="1600" spc="-50" dirty="0"/>
+                  <a:t> </a:t>
+                </a:r>
+                <a:r>
+                  <a:rPr lang="ko-KR" altLang="en-US" sz="1600" spc="-50" dirty="0"/>
+                  <a:t>위의 한 점이 될 수도 있다</a:t>
+                </a:r>
+                <a:r>
+                  <a:rPr lang="en-US" altLang="ko-KR" sz="1600" spc="-50" dirty="0"/>
+                  <a:t>.</a:t>
+                </a:r>
+              </a:p>
+              <a:p>
+                <a:pPr marL="1292225" lvl="2" indent="-285750">
+                  <a:lnSpc>
+                    <a:spcPct val="150000"/>
+                  </a:lnSpc>
+                  <a:buFont typeface="Wingdings" panose="05000000000000000000" pitchFamily="2" charset="2"/>
+                  <a:buChar char="Ø"/>
+                </a:pPr>
+                <a:r>
+                  <a:rPr lang="en-US" altLang="ko-KR" sz="1600" spc="-50" dirty="0"/>
+                  <a:t>(</a:t>
+                </a:r>
+                <a:r>
+                  <a:rPr lang="ko-KR" altLang="en-US" sz="1600" spc="-50" dirty="0"/>
+                  <a:t>전 슬라이드에서 </a:t>
+                </a:r>
+                <a:r>
+                  <a:rPr lang="ko-KR" altLang="en-US" sz="1600" spc="-50" dirty="0" err="1"/>
+                  <a:t>확인했다시피</a:t>
+                </a:r>
+                <a:r>
+                  <a:rPr lang="en-US" altLang="ko-KR" sz="1600" spc="-50" dirty="0"/>
+                  <a:t>) </a:t>
+                </a:r>
+                <a:r>
+                  <a:rPr lang="ko-KR" altLang="en-US" sz="1600" spc="-50" dirty="0"/>
+                  <a:t>이 경우에는 기울기에 변화가 없으므로 오직 소득효과만 나타나게 된다</a:t>
+                </a:r>
+                <a:r>
+                  <a:rPr lang="en-US" altLang="ko-KR" sz="1600" spc="-50" dirty="0"/>
+                  <a:t>.</a:t>
+                </a:r>
+              </a:p>
+              <a:p>
+                <a:pPr marL="1292225" lvl="2" indent="-285750">
+                  <a:lnSpc>
+                    <a:spcPct val="150000"/>
+                  </a:lnSpc>
+                  <a:buFont typeface="Wingdings" panose="05000000000000000000" pitchFamily="2" charset="2"/>
+                  <a:buChar char="Ø"/>
+                </a:pPr>
+                <a:r>
+                  <a:rPr lang="ko-KR" altLang="en-US" sz="1600" spc="-50" dirty="0"/>
+                  <a:t>따라서 노동 공급량을 줄이게 된다</a:t>
+                </a:r>
+                <a:r>
+                  <a:rPr lang="en-US" altLang="ko-KR" sz="1600" spc="-50" dirty="0"/>
+                  <a:t>.</a:t>
+                </a:r>
+              </a:p>
+            </p:txBody>
+          </p:sp>
+        </mc:Choice>
+        <mc:Fallback>
+          <p:sp>
+            <p:nvSpPr>
+              <p:cNvPr id="8" name="TextBox 7">
+                <a:extLst>
+                  <a:ext uri="{FF2B5EF4-FFF2-40B4-BE49-F238E27FC236}">
+                    <a16:creationId xmlns:a16="http://schemas.microsoft.com/office/drawing/2014/main" id="{4D4557F0-0BC3-3C17-98DC-6F389AAC689D}"/>
+                  </a:ext>
+                </a:extLst>
+              </p:cNvPr>
+              <p:cNvSpPr txBox="1">
+                <a:spLocks noRot="1" noChangeAspect="1" noMove="1" noResize="1" noEditPoints="1" noAdjustHandles="1" noChangeArrowheads="1" noChangeShapeType="1" noTextEdit="1"/>
+              </p:cNvSpPr>
+              <p:nvPr/>
+            </p:nvSpPr>
+            <p:spPr>
+              <a:xfrm>
+                <a:off x="288790" y="883205"/>
+                <a:ext cx="7522827" cy="5341270"/>
+              </a:xfrm>
+              <a:prstGeom prst="rect">
+                <a:avLst/>
+              </a:prstGeom>
+              <a:blipFill>
+                <a:blip r:embed="rId3"/>
+                <a:stretch>
+                  <a:fillRect r="-243" b="-457"/>
+                </a:stretch>
+              </a:blipFill>
+            </p:spPr>
+            <p:txBody>
+              <a:bodyPr/>
+              <a:lstStyle/>
+              <a:p>
+                <a:r>
+                  <a:rPr lang="ko-KR" altLang="en-US">
+                    <a:noFill/>
+                  </a:rPr>
+                  <a:t> </a:t>
+                </a:r>
+              </a:p>
+            </p:txBody>
+          </p:sp>
+        </mc:Fallback>
+      </mc:AlternateContent>
+    </p:spTree>
+    <p:extLst>
+      <p:ext uri="{BB962C8B-B14F-4D97-AF65-F5344CB8AC3E}">
+        <p14:creationId xmlns:p14="http://schemas.microsoft.com/office/powerpoint/2010/main" val="3413834143"/>
+      </p:ext>
+    </p:extLst>
+  </p:cSld>
+  <p:clrMapOvr>
+    <a:masterClrMapping/>
+  </p:clrMapOvr>
+</p:sld>
+</file>
+
+<file path=ppt/slides/slide22.xml><?xml version="1.0" encoding="utf-8"?>
+<p:sld xmlns:a="http://schemas.openxmlformats.org/drawingml/2006/main" xmlns:r="http://schemas.openxmlformats.org/officeDocument/2006/relationships" xmlns:p="http://schemas.openxmlformats.org/presentationml/2006/main">
+  <p:cSld>
+    <p:spTree>
+      <p:nvGrpSpPr>
+        <p:cNvPr id="1" name="">
+          <a:extLst>
+            <a:ext uri="{FF2B5EF4-FFF2-40B4-BE49-F238E27FC236}">
+              <a16:creationId xmlns:a16="http://schemas.microsoft.com/office/drawing/2014/main" id="{A169F6E4-8DDA-C786-A1B2-FAB59A74EFCB}"/>
+            </a:ext>
+          </a:extLst>
+        </p:cNvPr>
+        <p:cNvGrpSpPr/>
+        <p:nvPr/>
+      </p:nvGrpSpPr>
+      <p:grpSpPr>
+        <a:xfrm>
+          <a:off x="0" y="0"/>
+          <a:ext cx="0" cy="0"/>
+          <a:chOff x="0" y="0"/>
+          <a:chExt cx="0" cy="0"/>
+        </a:xfrm>
+      </p:grpSpPr>
+      <p:sp>
+        <p:nvSpPr>
+          <p:cNvPr id="2" name="제목 1">
+            <a:extLst>
+              <a:ext uri="{FF2B5EF4-FFF2-40B4-BE49-F238E27FC236}">
+                <a16:creationId xmlns:a16="http://schemas.microsoft.com/office/drawing/2014/main" id="{B1B8DD16-6510-DCFF-5557-69D5EAC58F19}"/>
+              </a:ext>
+            </a:extLst>
+          </p:cNvPr>
+          <p:cNvSpPr>
+            <a:spLocks noGrp="1"/>
+          </p:cNvSpPr>
+          <p:nvPr>
+            <p:ph type="title"/>
+          </p:nvPr>
+        </p:nvSpPr>
+        <p:spPr/>
+        <p:txBody>
+          <a:bodyPr/>
+          <a:lstStyle/>
+          <a:p>
+            <a:r>
+              <a:rPr lang="ko-KR" altLang="en-US" dirty="0"/>
+              <a:t>근로장려세제</a:t>
+            </a:r>
+          </a:p>
+        </p:txBody>
+      </p:sp>
+      <p:sp>
+        <p:nvSpPr>
+          <p:cNvPr id="4" name="슬라이드 번호 개체 틀 3">
+            <a:extLst>
+              <a:ext uri="{FF2B5EF4-FFF2-40B4-BE49-F238E27FC236}">
+                <a16:creationId xmlns:a16="http://schemas.microsoft.com/office/drawing/2014/main" id="{E17C759E-F0A1-5353-65CE-670CEC09CCF3}"/>
+              </a:ext>
+            </a:extLst>
+          </p:cNvPr>
+          <p:cNvSpPr>
+            <a:spLocks noGrp="1"/>
+          </p:cNvSpPr>
+          <p:nvPr>
+            <p:ph type="sldNum" sz="quarter" idx="12"/>
+          </p:nvPr>
+        </p:nvSpPr>
+        <p:spPr/>
+        <p:txBody>
+          <a:bodyPr/>
+          <a:lstStyle/>
+          <a:p>
+            <a:fld id="{109C872D-39A9-4065-8BF3-6A613116E2A1}" type="slidenum">
+              <a:rPr lang="ko-KR" altLang="en-US" smtClean="0"/>
+              <a:t>22</a:t>
+            </a:fld>
+            <a:endParaRPr lang="ko-KR" altLang="en-US"/>
+          </a:p>
+        </p:txBody>
+      </p:sp>
+      <p:sp>
+        <p:nvSpPr>
+          <p:cNvPr id="6" name="TextBox 5">
+            <a:extLst>
+              <a:ext uri="{FF2B5EF4-FFF2-40B4-BE49-F238E27FC236}">
+                <a16:creationId xmlns:a16="http://schemas.microsoft.com/office/drawing/2014/main" id="{11F1FEC3-BF6D-0F94-24C4-B324B4D65C20}"/>
+              </a:ext>
+            </a:extLst>
+          </p:cNvPr>
+          <p:cNvSpPr txBox="1"/>
+          <p:nvPr/>
+        </p:nvSpPr>
+        <p:spPr>
+          <a:xfrm>
+            <a:off x="288790" y="958844"/>
+            <a:ext cx="11250267" cy="4476675"/>
+          </a:xfrm>
+          <a:prstGeom prst="rect">
+            <a:avLst/>
+          </a:prstGeom>
+          <a:noFill/>
+        </p:spPr>
+        <p:txBody>
+          <a:bodyPr wrap="square" rtlCol="0" anchor="t">
+            <a:spAutoFit/>
+          </a:bodyPr>
+          <a:lstStyle/>
+          <a:p>
+            <a:pPr marL="377825" indent="-285750">
+              <a:lnSpc>
+                <a:spcPct val="150000"/>
+              </a:lnSpc>
+              <a:buFont typeface="Arial" panose="020B0604020202020204" pitchFamily="34" charset="0"/>
+              <a:buChar char="•"/>
+            </a:pPr>
+            <a:r>
+              <a:rPr lang="ko-KR" altLang="en-US" sz="1600" spc="-50" dirty="0"/>
+              <a:t>종합해보면</a:t>
+            </a:r>
+            <a:r>
+              <a:rPr lang="en-US" altLang="ko-KR" sz="1600" spc="-50" dirty="0"/>
+              <a:t>, </a:t>
+            </a:r>
+            <a:r>
+              <a:rPr lang="ko-KR" altLang="en-US" sz="1600" spc="-50" dirty="0"/>
+              <a:t>이론적으로 볼 때 근로장려세제의 도입은 노동 공급량을 줄이는 결과를 가져올 가능성이 크다</a:t>
+            </a:r>
+            <a:r>
+              <a:rPr lang="en-US" altLang="ko-KR" sz="1600" spc="-50" dirty="0"/>
+              <a:t>.</a:t>
+            </a:r>
+          </a:p>
+          <a:p>
+            <a:pPr marL="835025" lvl="1" indent="-285750">
+              <a:lnSpc>
+                <a:spcPct val="150000"/>
+              </a:lnSpc>
+              <a:buFont typeface="Wingdings" panose="05000000000000000000" pitchFamily="2" charset="2"/>
+              <a:buChar char="ü"/>
+            </a:pPr>
+            <a:r>
+              <a:rPr lang="ko-KR" altLang="en-US" sz="1600" spc="-50" dirty="0"/>
+              <a:t>미국 경제에 대한 실증연구 결과에 따르면</a:t>
+            </a:r>
+            <a:r>
+              <a:rPr lang="en-US" altLang="ko-KR" sz="1600" spc="-50" dirty="0"/>
+              <a:t>, </a:t>
+            </a:r>
+            <a:r>
+              <a:rPr lang="ko-KR" altLang="en-US" sz="1600" spc="-50" dirty="0"/>
+              <a:t>근로장려세제가 노동시간을 감소시키지 않은 것으로 나타난다</a:t>
+            </a:r>
+            <a:r>
+              <a:rPr lang="en-US" altLang="ko-KR" sz="1600" spc="-50" dirty="0"/>
+              <a:t>.</a:t>
+            </a:r>
+          </a:p>
+          <a:p>
+            <a:pPr marL="1292225" lvl="2" indent="-285750">
+              <a:lnSpc>
+                <a:spcPct val="150000"/>
+              </a:lnSpc>
+              <a:buFont typeface="Wingdings" panose="05000000000000000000" pitchFamily="2" charset="2"/>
+              <a:buChar char="Ø"/>
+            </a:pPr>
+            <a:r>
+              <a:rPr lang="ko-KR" altLang="en-US" sz="1600" spc="-50" dirty="0"/>
+              <a:t>그 이유로는 대부분의 근로자들이 노동시간을 자유로이 선택할 수 없는 상황에 처해 있다는 점이 있을 수 있고</a:t>
+            </a:r>
+            <a:endParaRPr lang="en-US" altLang="ko-KR" sz="1600" spc="-50" dirty="0"/>
+          </a:p>
+          <a:p>
+            <a:pPr marL="1292225" lvl="2" indent="-285750">
+              <a:lnSpc>
+                <a:spcPct val="150000"/>
+              </a:lnSpc>
+              <a:buFont typeface="Wingdings" panose="05000000000000000000" pitchFamily="2" charset="2"/>
+              <a:buChar char="Ø"/>
+            </a:pPr>
+            <a:r>
+              <a:rPr lang="ko-KR" altLang="en-US" sz="1600" spc="-50" dirty="0"/>
+              <a:t>또 다른 이유로는 근로자들이 근로장려세제의 구조에 대해 잘 모르기 때문일 수 있다는 해석이 있다</a:t>
+            </a:r>
+            <a:r>
+              <a:rPr lang="en-US" altLang="ko-KR" sz="1600" spc="-50" dirty="0"/>
+              <a:t>.</a:t>
+            </a:r>
+          </a:p>
+          <a:p>
+            <a:pPr marL="1292225" lvl="2" indent="-285750">
+              <a:lnSpc>
+                <a:spcPct val="150000"/>
+              </a:lnSpc>
+              <a:buFont typeface="Wingdings" panose="05000000000000000000" pitchFamily="2" charset="2"/>
+              <a:buChar char="Ø"/>
+            </a:pPr>
+            <a:endParaRPr lang="en-US" altLang="ko-KR" sz="1600" spc="-50" dirty="0"/>
+          </a:p>
+          <a:p>
+            <a:pPr marL="377825" indent="-285750">
+              <a:lnSpc>
+                <a:spcPct val="150000"/>
+              </a:lnSpc>
+              <a:buFont typeface="Arial" panose="020B0604020202020204" pitchFamily="34" charset="0"/>
+              <a:buChar char="•"/>
+            </a:pPr>
+            <a:r>
+              <a:rPr lang="ko-KR" altLang="en-US" sz="1600" spc="-50" dirty="0"/>
+              <a:t>그러나 위와 같이 근로장려세제만의 효과를 분석하는 것은 문제가 있을 수 있다</a:t>
+            </a:r>
+            <a:r>
+              <a:rPr lang="en-US" altLang="ko-KR" sz="1600" spc="-50" dirty="0"/>
+              <a:t>.</a:t>
+            </a:r>
+          </a:p>
+          <a:p>
+            <a:pPr marL="835025" lvl="1" indent="-285750">
+              <a:lnSpc>
+                <a:spcPct val="150000"/>
+              </a:lnSpc>
+              <a:buFont typeface="Wingdings" panose="05000000000000000000" pitchFamily="2" charset="2"/>
+              <a:buChar char="ü"/>
+            </a:pPr>
+            <a:r>
+              <a:rPr lang="ko-KR" altLang="en-US" sz="1600" spc="-50" dirty="0"/>
+              <a:t>애당초 근로장려세제는 국민 기초생활보장제도와 같은 공공부조정책의 근로의욕 감퇴효과에 대한 보완책으로 도입된 것이기 때문이다</a:t>
+            </a:r>
+            <a:r>
+              <a:rPr lang="en-US" altLang="ko-KR" sz="1600" spc="-50" dirty="0"/>
+              <a:t>.</a:t>
+            </a:r>
+          </a:p>
+          <a:p>
+            <a:pPr marL="835025" lvl="1" indent="-285750">
+              <a:lnSpc>
+                <a:spcPct val="150000"/>
+              </a:lnSpc>
+              <a:buFont typeface="Wingdings" panose="05000000000000000000" pitchFamily="2" charset="2"/>
+              <a:buChar char="ü"/>
+            </a:pPr>
+            <a:r>
+              <a:rPr lang="ko-KR" altLang="en-US" sz="1600" spc="-50" dirty="0"/>
+              <a:t>따라서 근로장려세제가 노동공급에 미치는 영향을 현실성 있게 분석하려면 </a:t>
+            </a:r>
+            <a:r>
+              <a:rPr lang="ko-KR" altLang="en-US" sz="1600" spc="-50" dirty="0" err="1"/>
+              <a:t>국민기초생활보장제도와의</a:t>
+            </a:r>
+            <a:r>
+              <a:rPr lang="ko-KR" altLang="en-US" sz="1600" spc="-50" dirty="0"/>
+              <a:t> 상대적 맥락에서 접근해야 한다</a:t>
+            </a:r>
+            <a:r>
+              <a:rPr lang="en-US" altLang="ko-KR" sz="1600" spc="-50" dirty="0"/>
+              <a:t>.</a:t>
+            </a:r>
+          </a:p>
+          <a:p>
+            <a:pPr marL="835025" lvl="1" indent="-285750">
+              <a:lnSpc>
+                <a:spcPct val="150000"/>
+              </a:lnSpc>
+              <a:buFont typeface="Wingdings" panose="05000000000000000000" pitchFamily="2" charset="2"/>
+              <a:buChar char="ü"/>
+            </a:pPr>
+            <a:endParaRPr lang="en-US" altLang="ko-KR" sz="1600" spc="-50" dirty="0"/>
+          </a:p>
+          <a:p>
+            <a:pPr marL="835025" lvl="1" indent="-285750">
+              <a:lnSpc>
+                <a:spcPct val="150000"/>
+              </a:lnSpc>
+              <a:buFont typeface="Wingdings" panose="05000000000000000000" pitchFamily="2" charset="2"/>
+              <a:buChar char="ü"/>
+            </a:pPr>
+            <a:endParaRPr lang="en-US" altLang="ko-KR" sz="1600" spc="-50" dirty="0"/>
+          </a:p>
+        </p:txBody>
+      </p:sp>
+    </p:spTree>
+    <p:extLst>
+      <p:ext uri="{BB962C8B-B14F-4D97-AF65-F5344CB8AC3E}">
+        <p14:creationId xmlns:p14="http://schemas.microsoft.com/office/powerpoint/2010/main" val="3029804614"/>
+      </p:ext>
+    </p:extLst>
+  </p:cSld>
+  <p:clrMapOvr>
+    <a:masterClrMapping/>
+  </p:clrMapOvr>
+</p:sld>
+</file>
+
+<file path=ppt/slides/slide23.xml><?xml version="1.0" encoding="utf-8"?>
+<p:sld xmlns:a="http://schemas.openxmlformats.org/drawingml/2006/main" xmlns:r="http://schemas.openxmlformats.org/officeDocument/2006/relationships" xmlns:p="http://schemas.openxmlformats.org/presentationml/2006/main">
+  <p:cSld>
+    <p:spTree>
+      <p:nvGrpSpPr>
+        <p:cNvPr id="1" name="">
+          <a:extLst>
+            <a:ext uri="{FF2B5EF4-FFF2-40B4-BE49-F238E27FC236}">
               <a16:creationId xmlns:a16="http://schemas.microsoft.com/office/drawing/2014/main" id="{37F71A1E-9B47-50D7-EEE7-449268E691A6}"/>
             </a:ext>
           </a:extLst>
@@ -13357,7 +14207,7 @@
           <a:p>
             <a:fld id="{109C872D-39A9-4065-8BF3-6A613116E2A1}" type="slidenum">
               <a:rPr lang="ko-KR" altLang="en-US" smtClean="0"/>
-              <a:t>21</a:t>
+              <a:t>23</a:t>
             </a:fld>
             <a:endParaRPr lang="ko-KR" altLang="en-US"/>
           </a:p>
@@ -13644,7 +14494,7 @@
 </p:sld>
 </file>
 
-<file path=ppt/slides/slide22.xml><?xml version="1.0" encoding="utf-8"?>
+<file path=ppt/slides/slide24.xml><?xml version="1.0" encoding="utf-8"?>
 <p:sld xmlns:a="http://schemas.openxmlformats.org/drawingml/2006/main" xmlns:r="http://schemas.openxmlformats.org/officeDocument/2006/relationships" xmlns:p="http://schemas.openxmlformats.org/presentationml/2006/main">
   <p:cSld>
     <p:spTree>
@@ -13718,7 +14568,7 @@
           <a:p>
             <a:fld id="{109C872D-39A9-4065-8BF3-6A613116E2A1}" type="slidenum">
               <a:rPr lang="ko-KR" altLang="en-US" smtClean="0"/>
-              <a:t>22</a:t>
+              <a:t>24</a:t>
             </a:fld>
             <a:endParaRPr lang="ko-KR" altLang="en-US"/>
           </a:p>
@@ -13882,7 +14732,7 @@
 </p:sld>
 </file>
 
-<file path=ppt/slides/slide23.xml><?xml version="1.0" encoding="utf-8"?>
+<file path=ppt/slides/slide25.xml><?xml version="1.0" encoding="utf-8"?>
 <p:sld xmlns:a="http://schemas.openxmlformats.org/drawingml/2006/main" xmlns:r="http://schemas.openxmlformats.org/officeDocument/2006/relationships" xmlns:p="http://schemas.openxmlformats.org/presentationml/2006/main">
   <p:cSld>
     <p:spTree>
@@ -13965,7 +14815,7 @@
           <a:p>
             <a:fld id="{109C872D-39A9-4065-8BF3-6A613116E2A1}" type="slidenum">
               <a:rPr lang="ko-KR" altLang="en-US" smtClean="0"/>
-              <a:t>23</a:t>
+              <a:t>25</a:t>
             </a:fld>
             <a:endParaRPr lang="ko-KR" altLang="en-US"/>
           </a:p>
@@ -14025,7 +14875,7 @@
 </p:sld>
 </file>
 
-<file path=ppt/slides/slide24.xml><?xml version="1.0" encoding="utf-8"?>
+<file path=ppt/slides/slide26.xml><?xml version="1.0" encoding="utf-8"?>
 <p:sld xmlns:a="http://schemas.openxmlformats.org/drawingml/2006/main" xmlns:r="http://schemas.openxmlformats.org/officeDocument/2006/relationships" xmlns:p="http://schemas.openxmlformats.org/presentationml/2006/main">
   <p:cSld>
     <p:spTree>
@@ -14099,7 +14949,7 @@
           <a:p>
             <a:fld id="{109C872D-39A9-4065-8BF3-6A613116E2A1}" type="slidenum">
               <a:rPr lang="ko-KR" altLang="en-US" smtClean="0"/>
-              <a:t>24</a:t>
+              <a:t>26</a:t>
             </a:fld>
             <a:endParaRPr lang="ko-KR" altLang="en-US"/>
           </a:p>
@@ -14363,7 +15213,7 @@
 </p:sld>
 </file>
 
-<file path=ppt/slides/slide25.xml><?xml version="1.0" encoding="utf-8"?>
+<file path=ppt/slides/slide27.xml><?xml version="1.0" encoding="utf-8"?>
 <p:sld xmlns:a="http://schemas.openxmlformats.org/drawingml/2006/main" xmlns:r="http://schemas.openxmlformats.org/officeDocument/2006/relationships" xmlns:p="http://schemas.openxmlformats.org/presentationml/2006/main">
   <p:cSld>
     <p:spTree>
@@ -14437,7 +15287,7 @@
           <a:p>
             <a:fld id="{109C872D-39A9-4065-8BF3-6A613116E2A1}" type="slidenum">
               <a:rPr lang="ko-KR" altLang="en-US" smtClean="0"/>
-              <a:t>25</a:t>
+              <a:t>27</a:t>
             </a:fld>
             <a:endParaRPr lang="ko-KR" altLang="en-US"/>
           </a:p>
@@ -14929,7 +15779,7 @@
 </p:sld>
 </file>
 
-<file path=ppt/slides/slide26.xml><?xml version="1.0" encoding="utf-8"?>
+<file path=ppt/slides/slide28.xml><?xml version="1.0" encoding="utf-8"?>
 <p:sld xmlns:a="http://schemas.openxmlformats.org/drawingml/2006/main" xmlns:r="http://schemas.openxmlformats.org/officeDocument/2006/relationships" xmlns:p="http://schemas.openxmlformats.org/presentationml/2006/main">
   <p:cSld>
     <p:spTree>
@@ -15003,7 +15853,7 @@
           <a:p>
             <a:fld id="{109C872D-39A9-4065-8BF3-6A613116E2A1}" type="slidenum">
               <a:rPr lang="ko-KR" altLang="en-US" smtClean="0"/>
-              <a:t>26</a:t>
+              <a:t>28</a:t>
             </a:fld>
             <a:endParaRPr lang="ko-KR" altLang="en-US"/>
           </a:p>
@@ -15192,7 +16042,7 @@
 </p:sld>
 </file>
 
-<file path=ppt/slides/slide27.xml><?xml version="1.0" encoding="utf-8"?>
+<file path=ppt/slides/slide29.xml><?xml version="1.0" encoding="utf-8"?>
 <p:sld xmlns:a="http://schemas.openxmlformats.org/drawingml/2006/main" xmlns:r="http://schemas.openxmlformats.org/officeDocument/2006/relationships" xmlns:p="http://schemas.openxmlformats.org/presentationml/2006/main">
   <p:cSld>
     <p:spTree>
@@ -15266,7 +16116,7 @@
           <a:p>
             <a:fld id="{109C872D-39A9-4065-8BF3-6A613116E2A1}" type="slidenum">
               <a:rPr lang="ko-KR" altLang="en-US" smtClean="0"/>
-              <a:t>27</a:t>
+              <a:t>29</a:t>
             </a:fld>
             <a:endParaRPr lang="ko-KR" altLang="en-US"/>
           </a:p>
@@ -15451,417 +16301,6 @@
     <p:extLst>
       <p:ext uri="{BB962C8B-B14F-4D97-AF65-F5344CB8AC3E}">
         <p14:creationId xmlns:p14="http://schemas.microsoft.com/office/powerpoint/2010/main" val="1563459701"/>
-      </p:ext>
-    </p:extLst>
-  </p:cSld>
-  <p:clrMapOvr>
-    <a:masterClrMapping/>
-  </p:clrMapOvr>
-</p:sld>
-</file>
-
-<file path=ppt/slides/slide28.xml><?xml version="1.0" encoding="utf-8"?>
-<p:sld xmlns:a="http://schemas.openxmlformats.org/drawingml/2006/main" xmlns:r="http://schemas.openxmlformats.org/officeDocument/2006/relationships" xmlns:p="http://schemas.openxmlformats.org/presentationml/2006/main">
-  <p:cSld>
-    <p:spTree>
-      <p:nvGrpSpPr>
-        <p:cNvPr id="1" name="">
-          <a:extLst>
-            <a:ext uri="{FF2B5EF4-FFF2-40B4-BE49-F238E27FC236}">
-              <a16:creationId xmlns:a16="http://schemas.microsoft.com/office/drawing/2014/main" id="{8CE0678B-2C54-F543-2A64-B6197C364E5C}"/>
-            </a:ext>
-          </a:extLst>
-        </p:cNvPr>
-        <p:cNvGrpSpPr/>
-        <p:nvPr/>
-      </p:nvGrpSpPr>
-      <p:grpSpPr>
-        <a:xfrm>
-          <a:off x="0" y="0"/>
-          <a:ext cx="0" cy="0"/>
-          <a:chOff x="0" y="0"/>
-          <a:chExt cx="0" cy="0"/>
-        </a:xfrm>
-      </p:grpSpPr>
-      <p:sp>
-        <p:nvSpPr>
-          <p:cNvPr id="2" name="제목 1">
-            <a:extLst>
-              <a:ext uri="{FF2B5EF4-FFF2-40B4-BE49-F238E27FC236}">
-                <a16:creationId xmlns:a16="http://schemas.microsoft.com/office/drawing/2014/main" id="{48CFB745-5DE7-23ED-764A-03F2033A302F}"/>
-              </a:ext>
-            </a:extLst>
-          </p:cNvPr>
-          <p:cNvSpPr>
-            <a:spLocks noGrp="1"/>
-          </p:cNvSpPr>
-          <p:nvPr>
-            <p:ph type="title"/>
-          </p:nvPr>
-        </p:nvSpPr>
-        <p:spPr/>
-        <p:txBody>
-          <a:bodyPr/>
-          <a:lstStyle/>
-          <a:p>
-            <a:r>
-              <a:rPr lang="ko-KR" altLang="en-US" dirty="0"/>
-              <a:t>정책적인 빈곤선</a:t>
-            </a:r>
-          </a:p>
-        </p:txBody>
-      </p:sp>
-      <p:sp>
-        <p:nvSpPr>
-          <p:cNvPr id="4" name="슬라이드 번호 개체 틀 3">
-            <a:extLst>
-              <a:ext uri="{FF2B5EF4-FFF2-40B4-BE49-F238E27FC236}">
-                <a16:creationId xmlns:a16="http://schemas.microsoft.com/office/drawing/2014/main" id="{12D00A29-5F89-C886-A807-AC70C3ADF4B5}"/>
-              </a:ext>
-            </a:extLst>
-          </p:cNvPr>
-          <p:cNvSpPr>
-            <a:spLocks noGrp="1"/>
-          </p:cNvSpPr>
-          <p:nvPr>
-            <p:ph type="sldNum" sz="quarter" idx="12"/>
-          </p:nvPr>
-        </p:nvSpPr>
-        <p:spPr/>
-        <p:txBody>
-          <a:bodyPr/>
-          <a:lstStyle/>
-          <a:p>
-            <a:fld id="{109C872D-39A9-4065-8BF3-6A613116E2A1}" type="slidenum">
-              <a:rPr lang="ko-KR" altLang="en-US" smtClean="0"/>
-              <a:t>28</a:t>
-            </a:fld>
-            <a:endParaRPr lang="ko-KR" altLang="en-US"/>
-          </a:p>
-        </p:txBody>
-      </p:sp>
-      <p:sp>
-        <p:nvSpPr>
-          <p:cNvPr id="3" name="TextBox 2">
-            <a:extLst>
-              <a:ext uri="{FF2B5EF4-FFF2-40B4-BE49-F238E27FC236}">
-                <a16:creationId xmlns:a16="http://schemas.microsoft.com/office/drawing/2014/main" id="{B6225294-83CB-18CF-D0BF-3229553C8AA7}"/>
-              </a:ext>
-            </a:extLst>
-          </p:cNvPr>
-          <p:cNvSpPr txBox="1"/>
-          <p:nvPr/>
-        </p:nvSpPr>
-        <p:spPr>
-          <a:xfrm>
-            <a:off x="288790" y="958844"/>
-            <a:ext cx="11250267" cy="3368679"/>
-          </a:xfrm>
-          <a:prstGeom prst="rect">
-            <a:avLst/>
-          </a:prstGeom>
-          <a:noFill/>
-        </p:spPr>
-        <p:txBody>
-          <a:bodyPr wrap="square" rtlCol="0" anchor="t">
-            <a:spAutoFit/>
-          </a:bodyPr>
-          <a:lstStyle/>
-          <a:p>
-            <a:pPr marL="377825" indent="-285750">
-              <a:lnSpc>
-                <a:spcPct val="150000"/>
-              </a:lnSpc>
-              <a:buFont typeface="Arial" panose="020B0604020202020204" pitchFamily="34" charset="0"/>
-              <a:buChar char="•"/>
-            </a:pPr>
-            <a:r>
-              <a:rPr lang="ko-KR" altLang="en-US" sz="1600" spc="-50" dirty="0"/>
-              <a:t>앞서 순수한 이론적 관점에서 빈곤을 정의하려는 접근법과 달리 정책적 접근법을 활용할 수 있다</a:t>
-            </a:r>
-            <a:r>
-              <a:rPr lang="en-US" altLang="ko-KR" sz="1600" spc="-50" dirty="0"/>
-              <a:t>.</a:t>
-            </a:r>
-          </a:p>
-          <a:p>
-            <a:pPr marL="835025" lvl="1" indent="-285750">
-              <a:lnSpc>
-                <a:spcPct val="150000"/>
-              </a:lnSpc>
-              <a:buFont typeface="Wingdings" panose="05000000000000000000" pitchFamily="2" charset="2"/>
-              <a:buChar char="ü"/>
-            </a:pPr>
-            <a:r>
-              <a:rPr lang="ko-KR" altLang="en-US" sz="1600" spc="-50" dirty="0"/>
-              <a:t>사회의 전반적인 경제적 능력과 그 사회에서 빈곤을 퇴치하려고 하는 의지라는 두 요소에 기초하여 적절한 빈곤선을 선택하는 것이다</a:t>
-            </a:r>
-            <a:r>
-              <a:rPr lang="en-US" altLang="ko-KR" sz="1600" spc="-50" dirty="0"/>
-              <a:t>.</a:t>
-            </a:r>
-          </a:p>
-          <a:p>
-            <a:pPr marL="377825" indent="-285750">
-              <a:lnSpc>
-                <a:spcPct val="150000"/>
-              </a:lnSpc>
-              <a:buFont typeface="Arial" panose="020B0604020202020204" pitchFamily="34" charset="0"/>
-              <a:buChar char="•"/>
-            </a:pPr>
-            <a:r>
-              <a:rPr lang="ko-KR" altLang="en-US" sz="1600" spc="-50" dirty="0"/>
-              <a:t>우리나라의 경우 앞서 설명한 </a:t>
-            </a:r>
-            <a:r>
-              <a:rPr lang="ko-KR" altLang="en-US" sz="1600" spc="-50" dirty="0" err="1"/>
-              <a:t>국민기초생활보장제도를</a:t>
-            </a:r>
-            <a:r>
-              <a:rPr lang="ko-KR" altLang="en-US" sz="1600" spc="-50" dirty="0"/>
-              <a:t> 예로 들면</a:t>
-            </a:r>
-            <a:r>
-              <a:rPr lang="en-US" altLang="ko-KR" sz="1600" spc="-50" dirty="0"/>
-              <a:t>, 2025</a:t>
-            </a:r>
-            <a:r>
-              <a:rPr lang="ko-KR" altLang="en-US" sz="1600" spc="-50" dirty="0"/>
-              <a:t>년 생계급여를 지급 받기 위한 기준소득은 </a:t>
-            </a:r>
-            <a:r>
-              <a:rPr lang="en-US" altLang="ko-KR" sz="1600" spc="-50" dirty="0"/>
-              <a:t>4</a:t>
-            </a:r>
-            <a:r>
-              <a:rPr lang="ko-KR" altLang="en-US" sz="1600" spc="-50" dirty="0"/>
-              <a:t>인 가구 기준 월 </a:t>
-            </a:r>
-            <a:r>
-              <a:rPr lang="en-US" altLang="ko-KR" sz="1600" spc="-50" dirty="0"/>
-              <a:t>195</a:t>
-            </a:r>
-            <a:r>
-              <a:rPr lang="ko-KR" altLang="en-US" sz="1600" spc="-50" dirty="0"/>
-              <a:t>만원이다</a:t>
-            </a:r>
-            <a:r>
-              <a:rPr lang="en-US" altLang="ko-KR" sz="1600" spc="-50" dirty="0"/>
-              <a:t>.</a:t>
-            </a:r>
-          </a:p>
-          <a:p>
-            <a:pPr marL="835025" lvl="1" indent="-285750">
-              <a:lnSpc>
-                <a:spcPct val="150000"/>
-              </a:lnSpc>
-              <a:buFont typeface="Wingdings" panose="05000000000000000000" pitchFamily="2" charset="2"/>
-              <a:buChar char="ü"/>
-            </a:pPr>
-            <a:r>
-              <a:rPr lang="ko-KR" altLang="en-US" sz="1600" spc="-50" dirty="0"/>
-              <a:t>이 금액이 합리적인 빈곤선의 기준이라고 볼 수 있는지에 대한 의문의 여지는 많이 있다</a:t>
-            </a:r>
-            <a:r>
-              <a:rPr lang="en-US" altLang="ko-KR" sz="1600" spc="-50" dirty="0"/>
-              <a:t>.</a:t>
-            </a:r>
-          </a:p>
-          <a:p>
-            <a:pPr marL="1292225" lvl="2" indent="-285750">
-              <a:lnSpc>
-                <a:spcPct val="150000"/>
-              </a:lnSpc>
-              <a:buFont typeface="Wingdings" panose="05000000000000000000" pitchFamily="2" charset="2"/>
-              <a:buChar char="Ø"/>
-            </a:pPr>
-            <a:r>
-              <a:rPr lang="ko-KR" altLang="en-US" sz="1600" spc="-50" dirty="0"/>
-              <a:t>이 금액으로는 최소한의 생계유지가 불가능하다고 지적하는 것이다</a:t>
-            </a:r>
-            <a:r>
-              <a:rPr lang="en-US" altLang="ko-KR" sz="1600" spc="-50" dirty="0"/>
-              <a:t>.</a:t>
-            </a:r>
-          </a:p>
-          <a:p>
-            <a:pPr marL="835025" lvl="1" indent="-285750">
-              <a:lnSpc>
-                <a:spcPct val="150000"/>
-              </a:lnSpc>
-              <a:buFont typeface="Wingdings" panose="05000000000000000000" pitchFamily="2" charset="2"/>
-              <a:buChar char="ü"/>
-            </a:pPr>
-            <a:r>
-              <a:rPr lang="ko-KR" altLang="en-US" sz="1600" spc="-50" dirty="0"/>
-              <a:t>정부도 그런 상황에 대한 지적을 모르는 것이 아니지만</a:t>
-            </a:r>
-            <a:r>
-              <a:rPr lang="en-US" altLang="ko-KR" sz="1600" spc="-50" dirty="0"/>
-              <a:t>, </a:t>
-            </a:r>
-            <a:r>
-              <a:rPr lang="ko-KR" altLang="en-US" sz="1600" spc="-50" dirty="0"/>
-              <a:t>예산상의 제약 때문에 현실적인 수준으로 올리지 못할 수 있다</a:t>
-            </a:r>
-            <a:r>
-              <a:rPr lang="en-US" altLang="ko-KR" sz="1600" spc="-50" dirty="0"/>
-              <a:t>.</a:t>
-            </a:r>
-          </a:p>
-        </p:txBody>
-      </p:sp>
-    </p:spTree>
-    <p:extLst>
-      <p:ext uri="{BB962C8B-B14F-4D97-AF65-F5344CB8AC3E}">
-        <p14:creationId xmlns:p14="http://schemas.microsoft.com/office/powerpoint/2010/main" val="3912252466"/>
-      </p:ext>
-    </p:extLst>
-  </p:cSld>
-  <p:clrMapOvr>
-    <a:masterClrMapping/>
-  </p:clrMapOvr>
-</p:sld>
-</file>
-
-<file path=ppt/slides/slide29.xml><?xml version="1.0" encoding="utf-8"?>
-<p:sld xmlns:a="http://schemas.openxmlformats.org/drawingml/2006/main" xmlns:r="http://schemas.openxmlformats.org/officeDocument/2006/relationships" xmlns:p="http://schemas.openxmlformats.org/presentationml/2006/main">
-  <p:cSld>
-    <p:spTree>
-      <p:nvGrpSpPr>
-        <p:cNvPr id="1" name="">
-          <a:extLst>
-            <a:ext uri="{FF2B5EF4-FFF2-40B4-BE49-F238E27FC236}">
-              <a16:creationId xmlns:a16="http://schemas.microsoft.com/office/drawing/2014/main" id="{43FF1F20-BFFD-8B79-CD45-D5E28C018670}"/>
-            </a:ext>
-          </a:extLst>
-        </p:cNvPr>
-        <p:cNvGrpSpPr/>
-        <p:nvPr/>
-      </p:nvGrpSpPr>
-      <p:grpSpPr>
-        <a:xfrm>
-          <a:off x="0" y="0"/>
-          <a:ext cx="0" cy="0"/>
-          <a:chOff x="0" y="0"/>
-          <a:chExt cx="0" cy="0"/>
-        </a:xfrm>
-      </p:grpSpPr>
-      <p:pic>
-        <p:nvPicPr>
-          <p:cNvPr id="6" name="그림 5" descr="텍스트, 로고, 원, 폰트이(가) 표시된 사진&#10;&#10;AI 생성 콘텐츠는 정확하지 않을 수 있습니다.">
-            <a:extLst>
-              <a:ext uri="{FF2B5EF4-FFF2-40B4-BE49-F238E27FC236}">
-                <a16:creationId xmlns:a16="http://schemas.microsoft.com/office/drawing/2014/main" id="{E08CC498-F8E3-F728-A493-580FF322EA34}"/>
-              </a:ext>
-            </a:extLst>
-          </p:cNvPr>
-          <p:cNvPicPr>
-            <a:picLocks noChangeAspect="1"/>
-          </p:cNvPicPr>
-          <p:nvPr/>
-        </p:nvPicPr>
-        <p:blipFill>
-          <a:blip r:embed="rId2">
-            <a:alphaModFix amt="20000"/>
-            <a:extLst>
-              <a:ext uri="{28A0092B-C50C-407E-A947-70E740481C1C}">
-                <a14:useLocalDpi xmlns:a14="http://schemas.microsoft.com/office/drawing/2010/main" val="0"/>
-              </a:ext>
-            </a:extLst>
-          </a:blip>
-          <a:stretch>
-            <a:fillRect/>
-          </a:stretch>
-        </p:blipFill>
-        <p:spPr>
-          <a:xfrm>
-            <a:off x="4012070" y="1673061"/>
-            <a:ext cx="4167861" cy="4167861"/>
-          </a:xfrm>
-          <a:prstGeom prst="rect">
-            <a:avLst/>
-          </a:prstGeom>
-        </p:spPr>
-      </p:pic>
-      <p:sp>
-        <p:nvSpPr>
-          <p:cNvPr id="4" name="슬라이드 번호 개체 틀 3">
-            <a:extLst>
-              <a:ext uri="{FF2B5EF4-FFF2-40B4-BE49-F238E27FC236}">
-                <a16:creationId xmlns:a16="http://schemas.microsoft.com/office/drawing/2014/main" id="{C7A8933B-D2B8-04D3-E28B-3F7B949384E6}"/>
-              </a:ext>
-            </a:extLst>
-          </p:cNvPr>
-          <p:cNvSpPr>
-            <a:spLocks noGrp="1"/>
-          </p:cNvSpPr>
-          <p:nvPr>
-            <p:ph type="sldNum" sz="quarter" idx="12"/>
-          </p:nvPr>
-        </p:nvSpPr>
-        <p:spPr/>
-        <p:txBody>
-          <a:bodyPr/>
-          <a:lstStyle/>
-          <a:p>
-            <a:fld id="{109C872D-39A9-4065-8BF3-6A613116E2A1}" type="slidenum">
-              <a:rPr lang="ko-KR" altLang="en-US" smtClean="0"/>
-              <a:t>29</a:t>
-            </a:fld>
-            <a:endParaRPr lang="ko-KR" altLang="en-US"/>
-          </a:p>
-        </p:txBody>
-      </p:sp>
-      <p:sp>
-        <p:nvSpPr>
-          <p:cNvPr id="7" name="제목 1">
-            <a:extLst>
-              <a:ext uri="{FF2B5EF4-FFF2-40B4-BE49-F238E27FC236}">
-                <a16:creationId xmlns:a16="http://schemas.microsoft.com/office/drawing/2014/main" id="{59F26F8B-5AC0-5DD7-76B0-9276D2D72868}"/>
-              </a:ext>
-            </a:extLst>
-          </p:cNvPr>
-          <p:cNvSpPr>
-            <a:spLocks noGrp="1"/>
-          </p:cNvSpPr>
-          <p:nvPr>
-            <p:ph type="title"/>
-          </p:nvPr>
-        </p:nvSpPr>
-        <p:spPr>
-          <a:xfrm>
-            <a:off x="831850" y="3765550"/>
-            <a:ext cx="11150600" cy="652818"/>
-          </a:xfrm>
-          <a:effectLst>
-            <a:reflection blurRad="50800" stA="45000" endPos="44000" dir="5400000" sy="-100000" algn="bl" rotWithShape="0"/>
-          </a:effectLst>
-        </p:spPr>
-        <p:txBody>
-          <a:bodyPr anchor="b"/>
-          <a:lstStyle/>
-          <a:p>
-            <a:r>
-              <a:rPr lang="en-US" altLang="ko-KR" sz="4000" b="1" i="0" spc="150" dirty="0"/>
-              <a:t>Section 4</a:t>
-            </a:r>
-            <a:r>
-              <a:rPr lang="en-US" altLang="ko-KR" sz="4000" b="1" i="0" spc="150"/>
-              <a:t>. </a:t>
-            </a:r>
-            <a:r>
-              <a:rPr lang="ko-KR" altLang="en-US" sz="4000" b="1" i="0" spc="150"/>
-              <a:t>재분배정책과 효율성</a:t>
-            </a:r>
-            <a:endParaRPr lang="ko-KR" altLang="en-US" sz="3600" i="0" spc="150" dirty="0"/>
-          </a:p>
-        </p:txBody>
-      </p:sp>
-    </p:spTree>
-    <p:extLst>
-      <p:ext uri="{BB962C8B-B14F-4D97-AF65-F5344CB8AC3E}">
-        <p14:creationId xmlns:p14="http://schemas.microsoft.com/office/powerpoint/2010/main" val="715861017"/>
       </p:ext>
     </p:extLst>
   </p:cSld>
@@ -16022,6 +16461,417 @@
         <p:cNvPr id="1" name="">
           <a:extLst>
             <a:ext uri="{FF2B5EF4-FFF2-40B4-BE49-F238E27FC236}">
+              <a16:creationId xmlns:a16="http://schemas.microsoft.com/office/drawing/2014/main" id="{8CE0678B-2C54-F543-2A64-B6197C364E5C}"/>
+            </a:ext>
+          </a:extLst>
+        </p:cNvPr>
+        <p:cNvGrpSpPr/>
+        <p:nvPr/>
+      </p:nvGrpSpPr>
+      <p:grpSpPr>
+        <a:xfrm>
+          <a:off x="0" y="0"/>
+          <a:ext cx="0" cy="0"/>
+          <a:chOff x="0" y="0"/>
+          <a:chExt cx="0" cy="0"/>
+        </a:xfrm>
+      </p:grpSpPr>
+      <p:sp>
+        <p:nvSpPr>
+          <p:cNvPr id="2" name="제목 1">
+            <a:extLst>
+              <a:ext uri="{FF2B5EF4-FFF2-40B4-BE49-F238E27FC236}">
+                <a16:creationId xmlns:a16="http://schemas.microsoft.com/office/drawing/2014/main" id="{48CFB745-5DE7-23ED-764A-03F2033A302F}"/>
+              </a:ext>
+            </a:extLst>
+          </p:cNvPr>
+          <p:cNvSpPr>
+            <a:spLocks noGrp="1"/>
+          </p:cNvSpPr>
+          <p:nvPr>
+            <p:ph type="title"/>
+          </p:nvPr>
+        </p:nvSpPr>
+        <p:spPr/>
+        <p:txBody>
+          <a:bodyPr/>
+          <a:lstStyle/>
+          <a:p>
+            <a:r>
+              <a:rPr lang="ko-KR" altLang="en-US" dirty="0"/>
+              <a:t>정책적인 빈곤선</a:t>
+            </a:r>
+          </a:p>
+        </p:txBody>
+      </p:sp>
+      <p:sp>
+        <p:nvSpPr>
+          <p:cNvPr id="4" name="슬라이드 번호 개체 틀 3">
+            <a:extLst>
+              <a:ext uri="{FF2B5EF4-FFF2-40B4-BE49-F238E27FC236}">
+                <a16:creationId xmlns:a16="http://schemas.microsoft.com/office/drawing/2014/main" id="{12D00A29-5F89-C886-A807-AC70C3ADF4B5}"/>
+              </a:ext>
+            </a:extLst>
+          </p:cNvPr>
+          <p:cNvSpPr>
+            <a:spLocks noGrp="1"/>
+          </p:cNvSpPr>
+          <p:nvPr>
+            <p:ph type="sldNum" sz="quarter" idx="12"/>
+          </p:nvPr>
+        </p:nvSpPr>
+        <p:spPr/>
+        <p:txBody>
+          <a:bodyPr/>
+          <a:lstStyle/>
+          <a:p>
+            <a:fld id="{109C872D-39A9-4065-8BF3-6A613116E2A1}" type="slidenum">
+              <a:rPr lang="ko-KR" altLang="en-US" smtClean="0"/>
+              <a:t>30</a:t>
+            </a:fld>
+            <a:endParaRPr lang="ko-KR" altLang="en-US"/>
+          </a:p>
+        </p:txBody>
+      </p:sp>
+      <p:sp>
+        <p:nvSpPr>
+          <p:cNvPr id="3" name="TextBox 2">
+            <a:extLst>
+              <a:ext uri="{FF2B5EF4-FFF2-40B4-BE49-F238E27FC236}">
+                <a16:creationId xmlns:a16="http://schemas.microsoft.com/office/drawing/2014/main" id="{B6225294-83CB-18CF-D0BF-3229553C8AA7}"/>
+              </a:ext>
+            </a:extLst>
+          </p:cNvPr>
+          <p:cNvSpPr txBox="1"/>
+          <p:nvPr/>
+        </p:nvSpPr>
+        <p:spPr>
+          <a:xfrm>
+            <a:off x="288790" y="958844"/>
+            <a:ext cx="11250267" cy="3368679"/>
+          </a:xfrm>
+          <a:prstGeom prst="rect">
+            <a:avLst/>
+          </a:prstGeom>
+          <a:noFill/>
+        </p:spPr>
+        <p:txBody>
+          <a:bodyPr wrap="square" rtlCol="0" anchor="t">
+            <a:spAutoFit/>
+          </a:bodyPr>
+          <a:lstStyle/>
+          <a:p>
+            <a:pPr marL="377825" indent="-285750">
+              <a:lnSpc>
+                <a:spcPct val="150000"/>
+              </a:lnSpc>
+              <a:buFont typeface="Arial" panose="020B0604020202020204" pitchFamily="34" charset="0"/>
+              <a:buChar char="•"/>
+            </a:pPr>
+            <a:r>
+              <a:rPr lang="ko-KR" altLang="en-US" sz="1600" spc="-50" dirty="0"/>
+              <a:t>앞서 순수한 이론적 관점에서 빈곤을 정의하려는 접근법과 달리 정책적 접근법을 활용할 수 있다</a:t>
+            </a:r>
+            <a:r>
+              <a:rPr lang="en-US" altLang="ko-KR" sz="1600" spc="-50" dirty="0"/>
+              <a:t>.</a:t>
+            </a:r>
+          </a:p>
+          <a:p>
+            <a:pPr marL="835025" lvl="1" indent="-285750">
+              <a:lnSpc>
+                <a:spcPct val="150000"/>
+              </a:lnSpc>
+              <a:buFont typeface="Wingdings" panose="05000000000000000000" pitchFamily="2" charset="2"/>
+              <a:buChar char="ü"/>
+            </a:pPr>
+            <a:r>
+              <a:rPr lang="ko-KR" altLang="en-US" sz="1600" spc="-50" dirty="0"/>
+              <a:t>사회의 전반적인 경제적 능력과 그 사회에서 빈곤을 퇴치하려고 하는 의지라는 두 요소에 기초하여 적절한 빈곤선을 선택하는 것이다</a:t>
+            </a:r>
+            <a:r>
+              <a:rPr lang="en-US" altLang="ko-KR" sz="1600" spc="-50" dirty="0"/>
+              <a:t>.</a:t>
+            </a:r>
+          </a:p>
+          <a:p>
+            <a:pPr marL="377825" indent="-285750">
+              <a:lnSpc>
+                <a:spcPct val="150000"/>
+              </a:lnSpc>
+              <a:buFont typeface="Arial" panose="020B0604020202020204" pitchFamily="34" charset="0"/>
+              <a:buChar char="•"/>
+            </a:pPr>
+            <a:r>
+              <a:rPr lang="ko-KR" altLang="en-US" sz="1600" spc="-50" dirty="0"/>
+              <a:t>우리나라의 경우 앞서 설명한 </a:t>
+            </a:r>
+            <a:r>
+              <a:rPr lang="ko-KR" altLang="en-US" sz="1600" spc="-50" dirty="0" err="1"/>
+              <a:t>국민기초생활보장제도를</a:t>
+            </a:r>
+            <a:r>
+              <a:rPr lang="ko-KR" altLang="en-US" sz="1600" spc="-50" dirty="0"/>
+              <a:t> 예로 들면</a:t>
+            </a:r>
+            <a:r>
+              <a:rPr lang="en-US" altLang="ko-KR" sz="1600" spc="-50" dirty="0"/>
+              <a:t>, 2025</a:t>
+            </a:r>
+            <a:r>
+              <a:rPr lang="ko-KR" altLang="en-US" sz="1600" spc="-50" dirty="0"/>
+              <a:t>년 생계급여를 지급 받기 위한 기준소득은 </a:t>
+            </a:r>
+            <a:r>
+              <a:rPr lang="en-US" altLang="ko-KR" sz="1600" spc="-50" dirty="0"/>
+              <a:t>4</a:t>
+            </a:r>
+            <a:r>
+              <a:rPr lang="ko-KR" altLang="en-US" sz="1600" spc="-50" dirty="0"/>
+              <a:t>인 가구 기준 월 </a:t>
+            </a:r>
+            <a:r>
+              <a:rPr lang="en-US" altLang="ko-KR" sz="1600" spc="-50" dirty="0"/>
+              <a:t>195</a:t>
+            </a:r>
+            <a:r>
+              <a:rPr lang="ko-KR" altLang="en-US" sz="1600" spc="-50" dirty="0"/>
+              <a:t>만원이다</a:t>
+            </a:r>
+            <a:r>
+              <a:rPr lang="en-US" altLang="ko-KR" sz="1600" spc="-50" dirty="0"/>
+              <a:t>.</a:t>
+            </a:r>
+          </a:p>
+          <a:p>
+            <a:pPr marL="835025" lvl="1" indent="-285750">
+              <a:lnSpc>
+                <a:spcPct val="150000"/>
+              </a:lnSpc>
+              <a:buFont typeface="Wingdings" panose="05000000000000000000" pitchFamily="2" charset="2"/>
+              <a:buChar char="ü"/>
+            </a:pPr>
+            <a:r>
+              <a:rPr lang="ko-KR" altLang="en-US" sz="1600" spc="-50" dirty="0"/>
+              <a:t>이 금액이 합리적인 빈곤선의 기준이라고 볼 수 있는지에 대한 의문의 여지는 많이 있다</a:t>
+            </a:r>
+            <a:r>
+              <a:rPr lang="en-US" altLang="ko-KR" sz="1600" spc="-50" dirty="0"/>
+              <a:t>.</a:t>
+            </a:r>
+          </a:p>
+          <a:p>
+            <a:pPr marL="1292225" lvl="2" indent="-285750">
+              <a:lnSpc>
+                <a:spcPct val="150000"/>
+              </a:lnSpc>
+              <a:buFont typeface="Wingdings" panose="05000000000000000000" pitchFamily="2" charset="2"/>
+              <a:buChar char="Ø"/>
+            </a:pPr>
+            <a:r>
+              <a:rPr lang="ko-KR" altLang="en-US" sz="1600" spc="-50" dirty="0"/>
+              <a:t>이 금액으로는 최소한의 생계유지가 불가능하다고 지적하는 것이다</a:t>
+            </a:r>
+            <a:r>
+              <a:rPr lang="en-US" altLang="ko-KR" sz="1600" spc="-50" dirty="0"/>
+              <a:t>.</a:t>
+            </a:r>
+          </a:p>
+          <a:p>
+            <a:pPr marL="835025" lvl="1" indent="-285750">
+              <a:lnSpc>
+                <a:spcPct val="150000"/>
+              </a:lnSpc>
+              <a:buFont typeface="Wingdings" panose="05000000000000000000" pitchFamily="2" charset="2"/>
+              <a:buChar char="ü"/>
+            </a:pPr>
+            <a:r>
+              <a:rPr lang="ko-KR" altLang="en-US" sz="1600" spc="-50" dirty="0"/>
+              <a:t>정부도 그런 상황에 대한 지적을 모르는 것이 아니지만</a:t>
+            </a:r>
+            <a:r>
+              <a:rPr lang="en-US" altLang="ko-KR" sz="1600" spc="-50" dirty="0"/>
+              <a:t>, </a:t>
+            </a:r>
+            <a:r>
+              <a:rPr lang="ko-KR" altLang="en-US" sz="1600" spc="-50" dirty="0"/>
+              <a:t>예산상의 제약 때문에 현실적인 수준으로 올리지 못할 수 있다</a:t>
+            </a:r>
+            <a:r>
+              <a:rPr lang="en-US" altLang="ko-KR" sz="1600" spc="-50" dirty="0"/>
+              <a:t>.</a:t>
+            </a:r>
+          </a:p>
+        </p:txBody>
+      </p:sp>
+    </p:spTree>
+    <p:extLst>
+      <p:ext uri="{BB962C8B-B14F-4D97-AF65-F5344CB8AC3E}">
+        <p14:creationId xmlns:p14="http://schemas.microsoft.com/office/powerpoint/2010/main" val="3912252466"/>
+      </p:ext>
+    </p:extLst>
+  </p:cSld>
+  <p:clrMapOvr>
+    <a:masterClrMapping/>
+  </p:clrMapOvr>
+</p:sld>
+</file>
+
+<file path=ppt/slides/slide31.xml><?xml version="1.0" encoding="utf-8"?>
+<p:sld xmlns:a="http://schemas.openxmlformats.org/drawingml/2006/main" xmlns:r="http://schemas.openxmlformats.org/officeDocument/2006/relationships" xmlns:p="http://schemas.openxmlformats.org/presentationml/2006/main">
+  <p:cSld>
+    <p:spTree>
+      <p:nvGrpSpPr>
+        <p:cNvPr id="1" name="">
+          <a:extLst>
+            <a:ext uri="{FF2B5EF4-FFF2-40B4-BE49-F238E27FC236}">
+              <a16:creationId xmlns:a16="http://schemas.microsoft.com/office/drawing/2014/main" id="{43FF1F20-BFFD-8B79-CD45-D5E28C018670}"/>
+            </a:ext>
+          </a:extLst>
+        </p:cNvPr>
+        <p:cNvGrpSpPr/>
+        <p:nvPr/>
+      </p:nvGrpSpPr>
+      <p:grpSpPr>
+        <a:xfrm>
+          <a:off x="0" y="0"/>
+          <a:ext cx="0" cy="0"/>
+          <a:chOff x="0" y="0"/>
+          <a:chExt cx="0" cy="0"/>
+        </a:xfrm>
+      </p:grpSpPr>
+      <p:pic>
+        <p:nvPicPr>
+          <p:cNvPr id="6" name="그림 5" descr="텍스트, 로고, 원, 폰트이(가) 표시된 사진&#10;&#10;AI 생성 콘텐츠는 정확하지 않을 수 있습니다.">
+            <a:extLst>
+              <a:ext uri="{FF2B5EF4-FFF2-40B4-BE49-F238E27FC236}">
+                <a16:creationId xmlns:a16="http://schemas.microsoft.com/office/drawing/2014/main" id="{E08CC498-F8E3-F728-A493-580FF322EA34}"/>
+              </a:ext>
+            </a:extLst>
+          </p:cNvPr>
+          <p:cNvPicPr>
+            <a:picLocks noChangeAspect="1"/>
+          </p:cNvPicPr>
+          <p:nvPr/>
+        </p:nvPicPr>
+        <p:blipFill>
+          <a:blip r:embed="rId2">
+            <a:alphaModFix amt="20000"/>
+            <a:extLst>
+              <a:ext uri="{28A0092B-C50C-407E-A947-70E740481C1C}">
+                <a14:useLocalDpi xmlns:a14="http://schemas.microsoft.com/office/drawing/2010/main" val="0"/>
+              </a:ext>
+            </a:extLst>
+          </a:blip>
+          <a:stretch>
+            <a:fillRect/>
+          </a:stretch>
+        </p:blipFill>
+        <p:spPr>
+          <a:xfrm>
+            <a:off x="4012070" y="1673061"/>
+            <a:ext cx="4167861" cy="4167861"/>
+          </a:xfrm>
+          <a:prstGeom prst="rect">
+            <a:avLst/>
+          </a:prstGeom>
+        </p:spPr>
+      </p:pic>
+      <p:sp>
+        <p:nvSpPr>
+          <p:cNvPr id="4" name="슬라이드 번호 개체 틀 3">
+            <a:extLst>
+              <a:ext uri="{FF2B5EF4-FFF2-40B4-BE49-F238E27FC236}">
+                <a16:creationId xmlns:a16="http://schemas.microsoft.com/office/drawing/2014/main" id="{C7A8933B-D2B8-04D3-E28B-3F7B949384E6}"/>
+              </a:ext>
+            </a:extLst>
+          </p:cNvPr>
+          <p:cNvSpPr>
+            <a:spLocks noGrp="1"/>
+          </p:cNvSpPr>
+          <p:nvPr>
+            <p:ph type="sldNum" sz="quarter" idx="12"/>
+          </p:nvPr>
+        </p:nvSpPr>
+        <p:spPr/>
+        <p:txBody>
+          <a:bodyPr/>
+          <a:lstStyle/>
+          <a:p>
+            <a:fld id="{109C872D-39A9-4065-8BF3-6A613116E2A1}" type="slidenum">
+              <a:rPr lang="ko-KR" altLang="en-US" smtClean="0"/>
+              <a:t>31</a:t>
+            </a:fld>
+            <a:endParaRPr lang="ko-KR" altLang="en-US"/>
+          </a:p>
+        </p:txBody>
+      </p:sp>
+      <p:sp>
+        <p:nvSpPr>
+          <p:cNvPr id="7" name="제목 1">
+            <a:extLst>
+              <a:ext uri="{FF2B5EF4-FFF2-40B4-BE49-F238E27FC236}">
+                <a16:creationId xmlns:a16="http://schemas.microsoft.com/office/drawing/2014/main" id="{59F26F8B-5AC0-5DD7-76B0-9276D2D72868}"/>
+              </a:ext>
+            </a:extLst>
+          </p:cNvPr>
+          <p:cNvSpPr>
+            <a:spLocks noGrp="1"/>
+          </p:cNvSpPr>
+          <p:nvPr>
+            <p:ph type="title"/>
+          </p:nvPr>
+        </p:nvSpPr>
+        <p:spPr>
+          <a:xfrm>
+            <a:off x="831850" y="3765550"/>
+            <a:ext cx="11150600" cy="652818"/>
+          </a:xfrm>
+          <a:effectLst>
+            <a:reflection blurRad="50800" stA="45000" endPos="44000" dir="5400000" sy="-100000" algn="bl" rotWithShape="0"/>
+          </a:effectLst>
+        </p:spPr>
+        <p:txBody>
+          <a:bodyPr anchor="b"/>
+          <a:lstStyle/>
+          <a:p>
+            <a:r>
+              <a:rPr lang="en-US" altLang="ko-KR" sz="4000" b="1" i="0" spc="150" dirty="0"/>
+              <a:t>Section 4</a:t>
+            </a:r>
+            <a:r>
+              <a:rPr lang="en-US" altLang="ko-KR" sz="4000" b="1" i="0" spc="150"/>
+              <a:t>. </a:t>
+            </a:r>
+            <a:r>
+              <a:rPr lang="ko-KR" altLang="en-US" sz="4000" b="1" i="0" spc="150"/>
+              <a:t>재분배정책과 효율성</a:t>
+            </a:r>
+            <a:endParaRPr lang="ko-KR" altLang="en-US" sz="3600" i="0" spc="150" dirty="0"/>
+          </a:p>
+        </p:txBody>
+      </p:sp>
+    </p:spTree>
+    <p:extLst>
+      <p:ext uri="{BB962C8B-B14F-4D97-AF65-F5344CB8AC3E}">
+        <p14:creationId xmlns:p14="http://schemas.microsoft.com/office/powerpoint/2010/main" val="715861017"/>
+      </p:ext>
+    </p:extLst>
+  </p:cSld>
+  <p:clrMapOvr>
+    <a:masterClrMapping/>
+  </p:clrMapOvr>
+</p:sld>
+</file>
+
+<file path=ppt/slides/slide32.xml><?xml version="1.0" encoding="utf-8"?>
+<p:sld xmlns:a="http://schemas.openxmlformats.org/drawingml/2006/main" xmlns:r="http://schemas.openxmlformats.org/officeDocument/2006/relationships" xmlns:p="http://schemas.openxmlformats.org/presentationml/2006/main">
+  <p:cSld>
+    <p:spTree>
+      <p:nvGrpSpPr>
+        <p:cNvPr id="1" name="">
+          <a:extLst>
+            <a:ext uri="{FF2B5EF4-FFF2-40B4-BE49-F238E27FC236}">
               <a16:creationId xmlns:a16="http://schemas.microsoft.com/office/drawing/2014/main" id="{D7CE1F9D-D2C2-8892-CF3D-3C5B8C9D0632}"/>
             </a:ext>
           </a:extLst>
@@ -16088,7 +16938,7 @@
           <a:p>
             <a:fld id="{109C872D-39A9-4065-8BF3-6A613116E2A1}" type="slidenum">
               <a:rPr lang="ko-KR" altLang="en-US" smtClean="0"/>
-              <a:t>30</a:t>
+              <a:t>32</a:t>
             </a:fld>
             <a:endParaRPr lang="ko-KR" altLang="en-US"/>
           </a:p>
@@ -16418,7 +17268,7 @@
 </p:sld>
 </file>
 
-<file path=ppt/slides/slide31.xml><?xml version="1.0" encoding="utf-8"?>
+<file path=ppt/slides/slide33.xml><?xml version="1.0" encoding="utf-8"?>
 <p:sld xmlns:a="http://schemas.openxmlformats.org/drawingml/2006/main" xmlns:r="http://schemas.openxmlformats.org/officeDocument/2006/relationships" xmlns:p="http://schemas.openxmlformats.org/presentationml/2006/main">
   <p:cSld>
     <p:spTree>
@@ -16546,7 +17396,7 @@
           <a:p>
             <a:fld id="{109C872D-39A9-4065-8BF3-6A613116E2A1}" type="slidenum">
               <a:rPr lang="ko-KR" altLang="en-US" smtClean="0"/>
-              <a:t>31</a:t>
+              <a:t>33</a:t>
             </a:fld>
             <a:endParaRPr lang="ko-KR" altLang="en-US"/>
           </a:p>

--- a/재정학/01_Lectures/재정학_Chapter_9.pptx
+++ b/재정학/01_Lectures/재정학_Chapter_9.pptx
@@ -251,7 +251,7 @@
           <a:p>
             <a:fld id="{4A5E00EF-AEA4-43E2-9451-8F9C59A39471}" type="datetimeFigureOut">
               <a:rPr lang="ko-KR" altLang="en-US" smtClean="0"/>
-              <a:t>2026-05-27</a:t>
+              <a:t>2026-05-28</a:t>
             </a:fld>
             <a:endParaRPr lang="ko-KR" altLang="en-US"/>
           </a:p>
@@ -673,7 +673,7 @@
           <a:p>
             <a:fld id="{CD32C56F-BD27-4999-9E6D-D4EACE3DA9F4}" type="datetime1">
               <a:rPr lang="ko-KR" altLang="en-US" smtClean="0"/>
-              <a:t>2026-05-27</a:t>
+              <a:t>2026-05-28</a:t>
             </a:fld>
             <a:endParaRPr lang="ko-KR" altLang="en-US"/>
           </a:p>
@@ -887,7 +887,7 @@
           <a:p>
             <a:fld id="{8EF4A19C-72C8-45CA-8E3F-68A7FA345D6C}" type="datetime1">
               <a:rPr lang="ko-KR" altLang="en-US" smtClean="0"/>
-              <a:t>2026-05-27</a:t>
+              <a:t>2026-05-28</a:t>
             </a:fld>
             <a:endParaRPr lang="ko-KR" altLang="en-US"/>
           </a:p>
@@ -1111,7 +1111,7 @@
           <a:p>
             <a:fld id="{56A175B2-010B-4341-954C-5F8F5C70B124}" type="datetime1">
               <a:rPr lang="ko-KR" altLang="en-US" smtClean="0"/>
-              <a:t>2026-05-27</a:t>
+              <a:t>2026-05-28</a:t>
             </a:fld>
             <a:endParaRPr lang="ko-KR" altLang="en-US"/>
           </a:p>
@@ -1325,7 +1325,7 @@
           <a:p>
             <a:fld id="{16B83F9E-22C9-45CA-9E85-070F1D3EF530}" type="datetime1">
               <a:rPr lang="ko-KR" altLang="en-US" smtClean="0"/>
-              <a:t>2026-05-27</a:t>
+              <a:t>2026-05-28</a:t>
             </a:fld>
             <a:endParaRPr lang="ko-KR" altLang="en-US"/>
           </a:p>
@@ -1616,7 +1616,7 @@
           <a:p>
             <a:fld id="{03278F45-FB3C-4C4D-B89A-7BC3F5F229F6}" type="datetime1">
               <a:rPr lang="ko-KR" altLang="en-US" smtClean="0"/>
-              <a:t>2026-05-27</a:t>
+              <a:t>2026-05-28</a:t>
             </a:fld>
             <a:endParaRPr lang="ko-KR" altLang="en-US"/>
           </a:p>
@@ -2009,7 +2009,7 @@
           <a:p>
             <a:fld id="{38FDAC3C-35A6-415C-9F03-738A6AC328B1}" type="datetime1">
               <a:rPr lang="ko-KR" altLang="en-US" smtClean="0"/>
-              <a:t>2026-05-27</a:t>
+              <a:t>2026-05-28</a:t>
             </a:fld>
             <a:endParaRPr lang="ko-KR" altLang="en-US"/>
           </a:p>
@@ -3603,7 +3603,7 @@
           <a:p>
             <a:fld id="{507A0DF1-AEE6-4B0D-89D2-351E7B3EF65C}" type="datetime1">
               <a:rPr lang="ko-KR" altLang="en-US" smtClean="0"/>
-              <a:t>2026-05-27</a:t>
+              <a:t>2026-05-28</a:t>
             </a:fld>
             <a:endParaRPr lang="ko-KR" altLang="en-US"/>
           </a:p>
@@ -4031,7 +4031,7 @@
           <a:p>
             <a:fld id="{CA93B8C9-630F-4D57-944D-04FD37CECCD3}" type="datetime1">
               <a:rPr lang="ko-KR" altLang="en-US" smtClean="0"/>
-              <a:t>2026-05-27</a:t>
+              <a:t>2026-05-28</a:t>
             </a:fld>
             <a:endParaRPr lang="ko-KR" altLang="en-US"/>
           </a:p>
@@ -4188,7 +4188,7 @@
           <a:p>
             <a:fld id="{E986165A-AC43-4902-9541-874ECD310BA3}" type="datetime1">
               <a:rPr lang="ko-KR" altLang="en-US" smtClean="0"/>
-              <a:t>2026-05-27</a:t>
+              <a:t>2026-05-28</a:t>
             </a:fld>
             <a:endParaRPr lang="ko-KR" altLang="en-US"/>
           </a:p>
@@ -4515,7 +4515,7 @@
           <a:p>
             <a:fld id="{47E6EE6D-2B0E-43A9-87A2-7354CDB998F4}" type="datetime1">
               <a:rPr lang="ko-KR" altLang="en-US" smtClean="0"/>
-              <a:t>2026-05-27</a:t>
+              <a:t>2026-05-28</a:t>
             </a:fld>
             <a:endParaRPr lang="ko-KR" altLang="en-US"/>
           </a:p>
@@ -4819,7 +4819,7 @@
           <a:p>
             <a:fld id="{5CC5944E-0BC8-4FAA-9F94-6B4B05834E10}" type="datetime1">
               <a:rPr lang="ko-KR" altLang="en-US" smtClean="0"/>
-              <a:t>2026-05-27</a:t>
+              <a:t>2026-05-28</a:t>
             </a:fld>
             <a:endParaRPr lang="ko-KR" altLang="en-US"/>
           </a:p>
@@ -13447,8 +13447,8 @@
           </a:p>
         </p:txBody>
       </p:sp>
-      <mc:AlternateContent xmlns:mc="http://schemas.openxmlformats.org/markup-compatibility/2006">
-        <mc:Choice xmlns:a14="http://schemas.microsoft.com/office/drawing/2010/main" Requires="a14">
+      <mc:AlternateContent xmlns:mc="http://schemas.openxmlformats.org/markup-compatibility/2006" xmlns:a14="http://schemas.microsoft.com/office/drawing/2010/main">
+        <mc:Choice Requires="a14">
           <p:sp>
             <p:nvSpPr>
               <p:cNvPr id="8" name="TextBox 7">
@@ -13783,7 +13783,7 @@
             </p:txBody>
           </p:sp>
         </mc:Choice>
-        <mc:Fallback>
+        <mc:Fallback xmlns="">
           <p:sp>
             <p:nvSpPr>
               <p:cNvPr id="8" name="TextBox 7">
@@ -15009,15 +15009,7 @@
             </a:pPr>
             <a:r>
               <a:rPr lang="ko-KR" altLang="en-US" sz="1600" spc="-50" dirty="0"/>
-              <a:t>보통 어떤 하나의 소득수준을 </a:t>
-            </a:r>
-            <a:r>
-              <a:rPr lang="ko-KR" altLang="en-US" sz="1600" b="1" spc="-50" dirty="0"/>
-              <a:t>빈곤선</a:t>
-            </a:r>
-            <a:r>
-              <a:rPr lang="ko-KR" altLang="en-US" sz="1600" spc="-50" dirty="0"/>
-              <a:t>으로 책정해놓고</a:t>
+              <a:t>보통 어떤 하나의 소득수준을 빈곤선으로 책정해놓고</a:t>
             </a:r>
             <a:r>
               <a:rPr lang="en-US" altLang="ko-KR" sz="1600" spc="-50" dirty="0"/>
@@ -16959,7 +16951,7 @@
         <p:spPr>
           <a:xfrm>
             <a:off x="288790" y="958844"/>
-            <a:ext cx="11250267" cy="5215338"/>
+            <a:ext cx="11250267" cy="5584670"/>
           </a:xfrm>
           <a:prstGeom prst="rect">
             <a:avLst/>
@@ -17143,6 +17135,34 @@
               <a:buFont typeface="Wingdings" panose="05000000000000000000" pitchFamily="2" charset="2"/>
               <a:buChar char="Ø"/>
             </a:pPr>
+            <a:r>
+              <a:rPr lang="ko-KR" altLang="en-US" sz="1600" spc="-50" dirty="0" err="1"/>
+              <a:t>블라이더는</a:t>
+            </a:r>
+            <a:r>
+              <a:rPr lang="ko-KR" altLang="en-US" sz="1600" spc="-50" dirty="0"/>
+              <a:t> 경제안정정책</a:t>
+            </a:r>
+            <a:r>
+              <a:rPr lang="en-US" altLang="ko-KR" sz="1600" spc="-50" dirty="0"/>
+              <a:t>, </a:t>
+            </a:r>
+            <a:r>
+              <a:rPr lang="ko-KR" altLang="en-US" sz="1600" spc="-50" dirty="0"/>
+              <a:t>무역정책</a:t>
+            </a:r>
+            <a:r>
+              <a:rPr lang="en-US" altLang="ko-KR" sz="1600" spc="-50" dirty="0"/>
+              <a:t>, </a:t>
+            </a:r>
+            <a:r>
+              <a:rPr lang="ko-KR" altLang="en-US" sz="1600" spc="-50" dirty="0"/>
+              <a:t>환경정책 또한 가난한 사람들에게 도움을 주는 동시에 효율성을 높일 수 있다고 지적한다</a:t>
+            </a:r>
+            <a:r>
+              <a:rPr lang="en-US" altLang="ko-KR" sz="1600" spc="-50"/>
+              <a:t>.</a:t>
+            </a:r>
             <a:endParaRPr lang="en-US" altLang="ko-KR" sz="1600" spc="-50" dirty="0"/>
           </a:p>
           <a:p>
@@ -17248,10 +17268,9 @@
               <a:t>가지 필수요소가 잘 발휘되기 위해서는 사회구성원들이 공평한 대우를 받고 있다는 느낌을 갖고 있어야 한다고 말한다</a:t>
             </a:r>
             <a:r>
-              <a:rPr lang="en-US" altLang="ko-KR" sz="1600" spc="-50"/>
+              <a:rPr lang="en-US" altLang="ko-KR" sz="1600" spc="-50" dirty="0"/>
               <a:t>.</a:t>
             </a:r>
-            <a:endParaRPr lang="en-US" altLang="ko-KR" sz="1600" spc="-50" dirty="0"/>
           </a:p>
         </p:txBody>
       </p:sp>

--- a/재정학/01_Lectures/재정학_Chapter_9.pptx
+++ b/재정학/01_Lectures/재정학_Chapter_9.pptx
@@ -251,7 +251,7 @@
           <a:p>
             <a:fld id="{4A5E00EF-AEA4-43E2-9451-8F9C59A39471}" type="datetimeFigureOut">
               <a:rPr lang="ko-KR" altLang="en-US" smtClean="0"/>
-              <a:t>2026-05-28</a:t>
+              <a:t>2026-05-31</a:t>
             </a:fld>
             <a:endParaRPr lang="ko-KR" altLang="en-US"/>
           </a:p>
@@ -673,7 +673,7 @@
           <a:p>
             <a:fld id="{CD32C56F-BD27-4999-9E6D-D4EACE3DA9F4}" type="datetime1">
               <a:rPr lang="ko-KR" altLang="en-US" smtClean="0"/>
-              <a:t>2026-05-28</a:t>
+              <a:t>2026-05-31</a:t>
             </a:fld>
             <a:endParaRPr lang="ko-KR" altLang="en-US"/>
           </a:p>
@@ -887,7 +887,7 @@
           <a:p>
             <a:fld id="{8EF4A19C-72C8-45CA-8E3F-68A7FA345D6C}" type="datetime1">
               <a:rPr lang="ko-KR" altLang="en-US" smtClean="0"/>
-              <a:t>2026-05-28</a:t>
+              <a:t>2026-05-31</a:t>
             </a:fld>
             <a:endParaRPr lang="ko-KR" altLang="en-US"/>
           </a:p>
@@ -1111,7 +1111,7 @@
           <a:p>
             <a:fld id="{56A175B2-010B-4341-954C-5F8F5C70B124}" type="datetime1">
               <a:rPr lang="ko-KR" altLang="en-US" smtClean="0"/>
-              <a:t>2026-05-28</a:t>
+              <a:t>2026-05-31</a:t>
             </a:fld>
             <a:endParaRPr lang="ko-KR" altLang="en-US"/>
           </a:p>
@@ -1325,7 +1325,7 @@
           <a:p>
             <a:fld id="{16B83F9E-22C9-45CA-9E85-070F1D3EF530}" type="datetime1">
               <a:rPr lang="ko-KR" altLang="en-US" smtClean="0"/>
-              <a:t>2026-05-28</a:t>
+              <a:t>2026-05-31</a:t>
             </a:fld>
             <a:endParaRPr lang="ko-KR" altLang="en-US"/>
           </a:p>
@@ -1616,7 +1616,7 @@
           <a:p>
             <a:fld id="{03278F45-FB3C-4C4D-B89A-7BC3F5F229F6}" type="datetime1">
               <a:rPr lang="ko-KR" altLang="en-US" smtClean="0"/>
-              <a:t>2026-05-28</a:t>
+              <a:t>2026-05-31</a:t>
             </a:fld>
             <a:endParaRPr lang="ko-KR" altLang="en-US"/>
           </a:p>
@@ -2009,7 +2009,7 @@
           <a:p>
             <a:fld id="{38FDAC3C-35A6-415C-9F03-738A6AC328B1}" type="datetime1">
               <a:rPr lang="ko-KR" altLang="en-US" smtClean="0"/>
-              <a:t>2026-05-28</a:t>
+              <a:t>2026-05-31</a:t>
             </a:fld>
             <a:endParaRPr lang="ko-KR" altLang="en-US"/>
           </a:p>
@@ -3603,7 +3603,7 @@
           <a:p>
             <a:fld id="{507A0DF1-AEE6-4B0D-89D2-351E7B3EF65C}" type="datetime1">
               <a:rPr lang="ko-KR" altLang="en-US" smtClean="0"/>
-              <a:t>2026-05-28</a:t>
+              <a:t>2026-05-31</a:t>
             </a:fld>
             <a:endParaRPr lang="ko-KR" altLang="en-US"/>
           </a:p>
@@ -4031,7 +4031,7 @@
           <a:p>
             <a:fld id="{CA93B8C9-630F-4D57-944D-04FD37CECCD3}" type="datetime1">
               <a:rPr lang="ko-KR" altLang="en-US" smtClean="0"/>
-              <a:t>2026-05-28</a:t>
+              <a:t>2026-05-31</a:t>
             </a:fld>
             <a:endParaRPr lang="ko-KR" altLang="en-US"/>
           </a:p>
@@ -4188,7 +4188,7 @@
           <a:p>
             <a:fld id="{E986165A-AC43-4902-9541-874ECD310BA3}" type="datetime1">
               <a:rPr lang="ko-KR" altLang="en-US" smtClean="0"/>
-              <a:t>2026-05-28</a:t>
+              <a:t>2026-05-31</a:t>
             </a:fld>
             <a:endParaRPr lang="ko-KR" altLang="en-US"/>
           </a:p>
@@ -4515,7 +4515,7 @@
           <a:p>
             <a:fld id="{47E6EE6D-2B0E-43A9-87A2-7354CDB998F4}" type="datetime1">
               <a:rPr lang="ko-KR" altLang="en-US" smtClean="0"/>
-              <a:t>2026-05-28</a:t>
+              <a:t>2026-05-31</a:t>
             </a:fld>
             <a:endParaRPr lang="ko-KR" altLang="en-US"/>
           </a:p>
@@ -4819,7 +4819,7 @@
           <a:p>
             <a:fld id="{5CC5944E-0BC8-4FAA-9F94-6B4B05834E10}" type="datetime1">
               <a:rPr lang="ko-KR" altLang="en-US" smtClean="0"/>
-              <a:t>2026-05-28</a:t>
+              <a:t>2026-05-31</a:t>
             </a:fld>
             <a:endParaRPr lang="ko-KR" altLang="en-US"/>
           </a:p>
@@ -7997,39 +7997,7 @@
             </a:r>
             <a:r>
               <a:rPr lang="en-US" altLang="ko-KR" sz="1600" spc="-50" dirty="0"/>
-              <a:t>. (</a:t>
-            </a:r>
-            <a:r>
-              <a:rPr lang="ko-KR" altLang="en-US" sz="1600" spc="-50" dirty="0"/>
-              <a:t>사회보험제도의 예로는 국민연금</a:t>
-            </a:r>
-            <a:r>
-              <a:rPr lang="en-US" altLang="ko-KR" sz="1600" spc="-50" dirty="0"/>
-              <a:t>, </a:t>
-            </a:r>
-            <a:r>
-              <a:rPr lang="ko-KR" altLang="en-US" sz="1600" spc="-50" dirty="0"/>
-              <a:t>건강보험</a:t>
-            </a:r>
-            <a:r>
-              <a:rPr lang="en-US" altLang="ko-KR" sz="1600" spc="-50" dirty="0"/>
-              <a:t>, </a:t>
-            </a:r>
-            <a:r>
-              <a:rPr lang="ko-KR" altLang="en-US" sz="1600" spc="-50" dirty="0"/>
-              <a:t>고용보험</a:t>
-            </a:r>
-            <a:r>
-              <a:rPr lang="en-US" altLang="ko-KR" sz="1600" spc="-50" dirty="0"/>
-              <a:t>, </a:t>
-            </a:r>
-            <a:r>
-              <a:rPr lang="ko-KR" altLang="en-US" sz="1600" spc="-50" dirty="0"/>
-              <a:t>산재보험 등이 있다</a:t>
-            </a:r>
-            <a:r>
-              <a:rPr lang="en-US" altLang="ko-KR" sz="1600" spc="-50" dirty="0"/>
-              <a:t>.)</a:t>
+              <a:t>.</a:t>
             </a:r>
           </a:p>
           <a:p>
